--- a/PRESENTATION.pptx
+++ b/PRESENTATION.pptx
@@ -15,6 +15,7 @@
     <p:sldId id="263" r:id="rId15"/>
     <p:sldId id="264" r:id="rId16"/>
     <p:sldId id="265" r:id="rId17"/>
+    <p:sldId id="272" r:id="rId24"/>
     <p:sldId id="266" r:id="rId18"/>
     <p:sldId id="267" r:id="rId19"/>
     <p:sldId id="268" r:id="rId20"/>
@@ -4908,7 +4909,7 @@
               </a:defRPr>
             </a:pPr>
             <a:r>
-              <a:t>SWITCH TO HARDWARE</a:t>
+              <a:t>BOTH DIRECTIONS</a:t>
             </a:r>
           </a:p>
           <a:p>
@@ -4924,7 +4925,7 @@
               </a:defRPr>
             </a:pPr>
             <a:r>
-              <a:t>Live demonstration</a:t>
+              <a:t>Control and resilience</a:t>
             </a:r>
           </a:p>
         </p:txBody>
@@ -4971,6 +4972,18 @@
           <a:p>
             <a:pPr algn="ctr"/>
           </a:p>
+          <a:p>
+            <a:pPr algn="ctr"/>
+          </a:p>
+          <a:p>
+            <a:pPr algn="ctr"/>
+          </a:p>
+          <a:p>
+            <a:pPr algn="ctr"/>
+          </a:p>
+          <a:p>
+            <a:pPr algn="ctr"/>
+          </a:p>
         </p:txBody>
       </p:sp>
       <p:sp>
@@ -4997,9 +5010,25 @@
           <a:p>
             <a:pPr>
               <a:spcAft>
-                <a:spcPts val="1600"/>
-              </a:spcAft>
-              <a:defRPr sz="1900" b="0">
+                <a:spcPts val="2200"/>
+              </a:spcAft>
+              <a:defRPr sz="2200" b="1">
+                <a:solidFill>
+                  <a:srgbClr val="0B6B62"/>
+                </a:solidFill>
+                <a:latin typeface="Calibri"/>
+              </a:defRPr>
+            </a:pPr>
+            <a:r>
+              <a:t>Telemetry alone makes a device observable. It does not make it manageable.</a:t>
+            </a:r>
+          </a:p>
+          <a:p>
+            <a:pPr>
+              <a:spcAft>
+                <a:spcPts val="1800"/>
+              </a:spcAft>
+              <a:defRPr sz="1800" b="0">
                 <a:solidFill>
                   <a:srgbClr val="1A1A1A"/>
                 </a:solidFill>
@@ -5007,15 +5036,15 @@
               </a:defRPr>
             </a:pPr>
             <a:r>
-              <a:t>1.   Board 1 serial:  no Wi-Fi association, and a real link-layer ack</a:t>
-            </a:r>
-          </a:p>
-          <a:p>
-            <a:pPr>
-              <a:spcAft>
-                <a:spcPts val="1600"/>
-              </a:spcAft>
-              <a:defRPr sz="1900" b="0">
+              <a:t>The gateway subscribes to v1/devices/me/rpc/request/+ and replies on the matching response topic. Three methods: getStatus, setPublishInterval, resetCounters.</a:t>
+            </a:r>
+          </a:p>
+          <a:p>
+            <a:pPr>
+              <a:spcAft>
+                <a:spcPts val="1000"/>
+              </a:spcAft>
+              <a:defRPr sz="1900" b="1">
                 <a:solidFill>
                   <a:srgbClr val="1A1A1A"/>
                 </a:solidFill>
@@ -5023,15 +5052,15 @@
               </a:defRPr>
             </a:pPr>
             <a:r>
-              <a:t>2.   Board 2 serial:  the same packet arriving, validated, deduplicated</a:t>
-            </a:r>
-          </a:p>
-          <a:p>
-            <a:pPr>
-              <a:spcAft>
-                <a:spcPts val="1600"/>
-              </a:spcAft>
-              <a:defRPr sz="1900" b="0">
+              <a:t>Verified end to end - a dashboard button produced the request in the gateway log, the applied change, and the new interval back in the next telemetry message. The round trip, not just the request.</a:t>
+            </a:r>
+          </a:p>
+          <a:p>
+            <a:pPr>
+              <a:spcAft>
+                <a:spcPts val="1800"/>
+              </a:spcAft>
+              <a:defRPr sz="1700" b="0">
                 <a:solidFill>
                   <a:srgbClr val="1A1A1A"/>
                 </a:solidFill>
@@ -5039,39 +5068,7 @@
               </a:defRPr>
             </a:pPr>
             <a:r>
-              <a:t>3.   ThingsBoard:  the same numbers, in the cloud</a:t>
-            </a:r>
-          </a:p>
-          <a:p>
-            <a:pPr>
-              <a:spcAft>
-                <a:spcPts val="1600"/>
-              </a:spcAft>
-              <a:defRPr sz="1900" b="1">
-                <a:solidFill>
-                  <a:srgbClr val="0B6B62"/>
-                </a:solidFill>
-                <a:latin typeface="Calibri"/>
-              </a:defRPr>
-            </a:pPr>
-            <a:r>
-              <a:t>4.   Warm the sensor by hand and watch the chart move</a:t>
-            </a:r>
-          </a:p>
-          <a:p>
-            <a:pPr>
-              <a:spcAft>
-                <a:spcPts val="2400"/>
-              </a:spcAft>
-              <a:defRPr sz="1900" b="0">
-                <a:solidFill>
-                  <a:srgbClr val="1A1A1A"/>
-                </a:solidFill>
-                <a:latin typeface="Calibri"/>
-              </a:defRPr>
-            </a:pPr>
-            <a:r>
-              <a:t>5.   Unplug Board 1:  node1_online goes false after 20 s</a:t>
+              <a:t>setPublishInterval range-checks and rejects rather than clamping. Silently applying a value the operator did not ask for would leave them believing something untrue about the device.</a:t>
             </a:r>
           </a:p>
           <a:p>
@@ -5079,7 +5076,7 @@
               <a:spcAft>
                 <a:spcPts val="0"/>
               </a:spcAft>
-              <a:defRPr sz="1600" b="0">
+              <a:defRPr sz="1700" b="0">
                 <a:solidFill>
                   <a:srgbClr val="606060"/>
                 </a:solidFill>
@@ -5087,7 +5084,7 @@
               </a:defRPr>
             </a:pPr>
             <a:r>
-              <a:t>Roughly 21 C to 28 C in fifteen seconds - it proves the whole chain, sensor to cloud, in one gesture.</a:t>
+              <a:t>Unsent payloads go to a twelve-slot ring buffer and flush oldest-first on reconnect. Measured: 4 buffered, 4 flushed, 0 dropped.</a:t>
             </a:r>
           </a:p>
         </p:txBody>
@@ -5144,7 +5141,7 @@
               </a:defRPr>
             </a:pPr>
             <a:r>
-              <a:t>HARDWARE SUBSTITUTION</a:t>
+              <a:t>SWITCH TO HARDWARE</a:t>
             </a:r>
           </a:p>
           <a:p>
@@ -5160,7 +5157,7 @@
               </a:defRPr>
             </a:pPr>
             <a:r>
-              <a:t>DHT11 instead of BMP280</a:t>
+              <a:t>Live demonstration</a:t>
             </a:r>
           </a:p>
         </p:txBody>
@@ -5233,9 +5230,9 @@
           <a:p>
             <a:pPr>
               <a:spcAft>
-                <a:spcPts val="2200"/>
-              </a:spcAft>
-              <a:defRPr sz="2000" b="0">
+                <a:spcPts val="1600"/>
+              </a:spcAft>
+              <a:defRPr sz="1900" b="0">
                 <a:solidFill>
                   <a:srgbClr val="1A1A1A"/>
                 </a:solidFill>
@@ -5243,31 +5240,15 @@
               </a:defRPr>
             </a:pPr>
             <a:r>
-              <a:t>The brief specified BMP280. The available hardware was DHT11.</a:t>
-            </a:r>
-          </a:p>
-          <a:p>
-            <a:pPr>
-              <a:spcAft>
-                <a:spcPts val="800"/>
-              </a:spcAft>
-              <a:defRPr sz="1800" b="1">
-                <a:solidFill>
-                  <a:srgbClr val="A83A1F"/>
-                </a:solidFill>
-                <a:latin typeface="Calibri"/>
-              </a:defRPr>
-            </a:pPr>
-            <a:r>
-              <a:t>Lost</a:t>
-            </a:r>
-          </a:p>
-          <a:p>
-            <a:pPr>
-              <a:spcAft>
-                <a:spcPts val="800"/>
-              </a:spcAft>
-              <a:defRPr sz="1700" b="0">
+              <a:t>1.   Board 1 serial:  no Wi-Fi association, and a real link-layer ack</a:t>
+            </a:r>
+          </a:p>
+          <a:p>
+            <a:pPr>
+              <a:spcAft>
+                <a:spcPts val="1600"/>
+              </a:spcAft>
+              <a:defRPr sz="1900" b="0">
                 <a:solidFill>
                   <a:srgbClr val="1A1A1A"/>
                 </a:solidFill>
@@ -5275,15 +5256,15 @@
               </a:defRPr>
             </a:pPr>
             <a:r>
-              <a:t>-   No I2C experience - DHT11 is single-wire bit-banged</a:t>
-            </a:r>
-          </a:p>
-          <a:p>
-            <a:pPr>
-              <a:spcAft>
-                <a:spcPts val="1800"/>
-              </a:spcAft>
-              <a:defRPr sz="1700" b="0">
+              <a:t>2.   Board 2 serial:  the same packet arriving, validated, deduplicated</a:t>
+            </a:r>
+          </a:p>
+          <a:p>
+            <a:pPr>
+              <a:spcAft>
+                <a:spcPts val="1600"/>
+              </a:spcAft>
+              <a:defRPr sz="1900" b="0">
                 <a:solidFill>
                   <a:srgbClr val="1A1A1A"/>
                 </a:solidFill>
@@ -5291,15 +5272,15 @@
               </a:defRPr>
             </a:pPr>
             <a:r>
-              <a:t>-   Lower resolution, hence the stepped chart traces</a:t>
-            </a:r>
-          </a:p>
-          <a:p>
-            <a:pPr>
-              <a:spcAft>
-                <a:spcPts val="800"/>
-              </a:spcAft>
-              <a:defRPr sz="1800" b="1">
+              <a:t>3.   ThingsBoard:  the same numbers, in the cloud</a:t>
+            </a:r>
+          </a:p>
+          <a:p>
+            <a:pPr>
+              <a:spcAft>
+                <a:spcPts val="1600"/>
+              </a:spcAft>
+              <a:defRPr sz="1900" b="1">
                 <a:solidFill>
                   <a:srgbClr val="0B6B62"/>
                 </a:solidFill>
@@ -5307,15 +5288,15 @@
               </a:defRPr>
             </a:pPr>
             <a:r>
-              <a:t>Gained</a:t>
-            </a:r>
-          </a:p>
-          <a:p>
-            <a:pPr>
-              <a:spcAft>
-                <a:spcPts val="800"/>
-              </a:spcAft>
-              <a:defRPr sz="1700" b="0">
+              <a:t>4.   Warm the sensor by hand and watch the chart move</a:t>
+            </a:r>
+          </a:p>
+          <a:p>
+            <a:pPr>
+              <a:spcAft>
+                <a:spcPts val="2400"/>
+              </a:spcAft>
+              <a:defRPr sz="1900" b="0">
                 <a:solidFill>
                   <a:srgbClr val="1A1A1A"/>
                 </a:solidFill>
@@ -5323,7 +5304,7 @@
               </a:defRPr>
             </a:pPr>
             <a:r>
-              <a:t>-   Humidity responds to a hand in seconds; indoor pressure would be flat for hours</a:t>
+              <a:t>5.   Unplug Board 1:  node1_online goes false after 20 s</a:t>
             </a:r>
           </a:p>
           <a:p>
@@ -5331,15 +5312,15 @@
               <a:spcAft>
                 <a:spcPts val="0"/>
               </a:spcAft>
-              <a:defRPr sz="1700" b="0">
-                <a:solidFill>
-                  <a:srgbClr val="1A1A1A"/>
-                </a:solidFill>
-                <a:latin typeface="Calibri"/>
-              </a:defRPr>
-            </a:pPr>
-            <a:r>
-              <a:t>-   Everything above the sensing layer is unchanged - the packet carries two floats and does not care what they represent</a:t>
+              <a:defRPr sz="1600" b="0">
+                <a:solidFill>
+                  <a:srgbClr val="606060"/>
+                </a:solidFill>
+                <a:latin typeface="Calibri"/>
+              </a:defRPr>
+            </a:pPr>
+            <a:r>
+              <a:t>Roughly 21 C to 28 C in fifteen seconds - it proves the whole chain, sensor to cloud, in one gesture.</a:t>
             </a:r>
           </a:p>
         </p:txBody>
@@ -5396,7 +5377,7 @@
               </a:defRPr>
             </a:pPr>
             <a:r>
-              <a:t>HONESTLY</a:t>
+              <a:t>HARDWARE SUBSTITUTION</a:t>
             </a:r>
           </a:p>
           <a:p>
@@ -5412,7 +5393,7 @@
               </a:defRPr>
             </a:pPr>
             <a:r>
-              <a:t>Limitations</a:t>
+              <a:t>DHT11 instead of BMP280</a:t>
             </a:r>
           </a:p>
         </p:txBody>
@@ -5485,9 +5466,9 @@
           <a:p>
             <a:pPr>
               <a:spcAft>
-                <a:spcPts val="1500"/>
-              </a:spcAft>
-              <a:defRPr sz="1800" b="0">
+                <a:spcPts val="2200"/>
+              </a:spcAft>
+              <a:defRPr sz="2000" b="0">
                 <a:solidFill>
                   <a:srgbClr val="1A1A1A"/>
                 </a:solidFill>
@@ -5495,15 +5476,31 @@
               </a:defRPr>
             </a:pPr>
             <a:r>
-              <a:t>-   One hop only - two radios cannot demonstrate multi-hop forwarding</a:t>
-            </a:r>
-          </a:p>
-          <a:p>
-            <a:pPr>
-              <a:spcAft>
-                <a:spcPts val="1500"/>
-              </a:spcAft>
-              <a:defRPr sz="1800" b="0">
+              <a:t>The brief specified BMP280. The available hardware was DHT11.</a:t>
+            </a:r>
+          </a:p>
+          <a:p>
+            <a:pPr>
+              <a:spcAft>
+                <a:spcPts val="800"/>
+              </a:spcAft>
+              <a:defRPr sz="1800" b="1">
+                <a:solidFill>
+                  <a:srgbClr val="A83A1F"/>
+                </a:solidFill>
+                <a:latin typeface="Calibri"/>
+              </a:defRPr>
+            </a:pPr>
+            <a:r>
+              <a:t>Lost</a:t>
+            </a:r>
+          </a:p>
+          <a:p>
+            <a:pPr>
+              <a:spcAft>
+                <a:spcPts val="800"/>
+              </a:spcAft>
+              <a:defRPr sz="1700" b="0">
                 <a:solidFill>
                   <a:srgbClr val="1A1A1A"/>
                 </a:solidFill>
@@ -5511,15 +5508,15 @@
               </a:defRPr>
             </a:pPr>
             <a:r>
-              <a:t>-   ttl and hop_count are designed for but unexercised</a:t>
-            </a:r>
-          </a:p>
-          <a:p>
-            <a:pPr>
-              <a:spcAft>
-                <a:spcPts val="1500"/>
-              </a:spcAft>
-              <a:defRPr sz="1800" b="0">
+              <a:t>-   No I2C experience - DHT11 is single-wire bit-banged</a:t>
+            </a:r>
+          </a:p>
+          <a:p>
+            <a:pPr>
+              <a:spcAft>
+                <a:spcPts val="1800"/>
+              </a:spcAft>
+              <a:defRPr sz="1700" b="0">
                 <a:solidFill>
                   <a:srgbClr val="1A1A1A"/>
                 </a:solidFill>
@@ -5527,15 +5524,31 @@
               </a:defRPr>
             </a:pPr>
             <a:r>
-              <a:t>-   No encryption on either the radio or the MQTT leg</a:t>
-            </a:r>
-          </a:p>
-          <a:p>
-            <a:pPr>
-              <a:spcAft>
-                <a:spcPts val="1500"/>
-              </a:spcAft>
-              <a:defRPr sz="1800" b="0">
+              <a:t>-   Lower resolution, hence the stepped chart traces</a:t>
+            </a:r>
+          </a:p>
+          <a:p>
+            <a:pPr>
+              <a:spcAft>
+                <a:spcPts val="800"/>
+              </a:spcAft>
+              <a:defRPr sz="1800" b="1">
+                <a:solidFill>
+                  <a:srgbClr val="0B6B62"/>
+                </a:solidFill>
+                <a:latin typeface="Calibri"/>
+              </a:defRPr>
+            </a:pPr>
+            <a:r>
+              <a:t>Gained</a:t>
+            </a:r>
+          </a:p>
+          <a:p>
+            <a:pPr>
+              <a:spcAft>
+                <a:spcPts val="800"/>
+              </a:spcAft>
+              <a:defRPr sz="1700" b="0">
                 <a:solidFill>
                   <a:srgbClr val="1A1A1A"/>
                 </a:solidFill>
@@ -5543,15 +5556,15 @@
               </a:defRPr>
             </a:pPr>
             <a:r>
-              <a:t>-   Credentials compiled into firmware, recoverable over USB</a:t>
-            </a:r>
-          </a:p>
-          <a:p>
-            <a:pPr>
-              <a:spcAft>
-                <a:spcPts val="1500"/>
-              </a:spcAft>
-              <a:defRPr sz="1800" b="0">
+              <a:t>-   Humidity responds to a hand in seconds; indoor pressure would be flat for hours</a:t>
+            </a:r>
+          </a:p>
+          <a:p>
+            <a:pPr>
+              <a:spcAft>
+                <a:spcPts val="0"/>
+              </a:spcAft>
+              <a:defRPr sz="1700" b="0">
                 <a:solidFill>
                   <a:srgbClr val="1A1A1A"/>
                 </a:solidFill>
@@ -5559,23 +5572,7 @@
               </a:defRPr>
             </a:pPr>
             <a:r>
-              <a:t>-   Manual channel configuration - a gateway roam silently breaks the link</a:t>
-            </a:r>
-          </a:p>
-          <a:p>
-            <a:pPr>
-              <a:spcAft>
-                <a:spcPts val="1500"/>
-              </a:spcAft>
-              <a:defRPr sz="1800" b="0">
-                <a:solidFill>
-                  <a:srgbClr val="1A1A1A"/>
-                </a:solidFill>
-                <a:latin typeface="Calibri"/>
-              </a:defRPr>
-            </a:pPr>
-            <a:r>
-              <a:t>-   Single remote node - dedup state is one slot, not an array</a:t>
+              <a:t>-   Everything above the sensing layer is unchanged - the packet carries two floats and does not care what they represent</a:t>
             </a:r>
           </a:p>
         </p:txBody>
@@ -5632,7 +5629,7 @@
               </a:defRPr>
             </a:pPr>
             <a:r>
-              <a:t>MEASURED, NOT ASSUMED</a:t>
+              <a:t>HONESTLY</a:t>
             </a:r>
           </a:p>
           <a:p>
@@ -5648,7 +5645,7 @@
               </a:defRPr>
             </a:pPr>
             <a:r>
-              <a:t>What we found</a:t>
+              <a:t>Limitations</a:t>
             </a:r>
           </a:p>
         </p:txBody>
@@ -5721,25 +5718,9 @@
           <a:p>
             <a:pPr>
               <a:spcAft>
-                <a:spcPts val="800"/>
-              </a:spcAft>
-              <a:defRPr sz="1900" b="1">
-                <a:solidFill>
-                  <a:srgbClr val="0B6B62"/>
-                </a:solidFill>
-                <a:latin typeface="Calibri"/>
-              </a:defRPr>
-            </a:pPr>
-            <a:r>
-              <a:t>Port 1883 is open outbound on eduroam</a:t>
-            </a:r>
-          </a:p>
-          <a:p>
-            <a:pPr>
-              <a:spcAft>
-                <a:spcPts val="1800"/>
-              </a:spcAft>
-              <a:defRPr sz="1600" b="0">
+                <a:spcPts val="1500"/>
+              </a:spcAft>
+              <a:defRPr sz="1800" b="0">
                 <a:solidFill>
                   <a:srgbClr val="1A1A1A"/>
                 </a:solidFill>
@@ -5747,31 +5728,15 @@
               </a:defRPr>
             </a:pPr>
             <a:r>
-              <a:t>Proved by the MQTT return code: state=5 is a reply from the broker, so the packets crossed the firewall. state=-2 would have meant no TCP connection at all.</a:t>
-            </a:r>
-          </a:p>
-          <a:p>
-            <a:pPr>
-              <a:spcAft>
-                <a:spcPts val="800"/>
-              </a:spcAft>
-              <a:defRPr sz="1900" b="1">
-                <a:solidFill>
-                  <a:srgbClr val="0B6B62"/>
-                </a:solidFill>
-                <a:latin typeface="Calibri"/>
-              </a:defRPr>
-            </a:pPr>
-            <a:r>
-              <a:t>WPA2-Enterprise costs ~97 KB of flash</a:t>
-            </a:r>
-          </a:p>
-          <a:p>
-            <a:pPr>
-              <a:spcAft>
-                <a:spcPts val="1800"/>
-              </a:spcAft>
-              <a:defRPr sz="1600" b="0">
+              <a:t>-   One hop only - two radios cannot demonstrate multi-hop forwarding</a:t>
+            </a:r>
+          </a:p>
+          <a:p>
+            <a:pPr>
+              <a:spcAft>
+                <a:spcPts val="1500"/>
+              </a:spcAft>
+              <a:defRPr sz="1800" b="0">
                 <a:solidFill>
                   <a:srgbClr val="1A1A1A"/>
                 </a:solidFill>
@@ -5779,31 +5744,15 @@
               </a:defRPr>
             </a:pPr>
             <a:r>
-              <a:t>915,267 bytes with PSK against 1,012,651 with PEAP. Enterprise auth is not free.</a:t>
-            </a:r>
-          </a:p>
-          <a:p>
-            <a:pPr>
-              <a:spcAft>
-                <a:spcPts val="800"/>
-              </a:spcAft>
-              <a:defRPr sz="1900" b="1">
-                <a:solidFill>
-                  <a:srgbClr val="0B6B62"/>
-                </a:solidFill>
-                <a:latin typeface="Calibri"/>
-              </a:defRPr>
-            </a:pPr>
-            <a:r>
-              <a:t>eduroam routes by RADIUS realm, not email domain</a:t>
-            </a:r>
-          </a:p>
-          <a:p>
-            <a:pPr>
-              <a:spcAft>
-                <a:spcPts val="0"/>
-              </a:spcAft>
-              <a:defRPr sz="1600" b="0">
+              <a:t>-   ttl and hop_count are designed for but unexercised</a:t>
+            </a:r>
+          </a:p>
+          <a:p>
+            <a:pPr>
+              <a:spcAft>
+                <a:spcPts val="1500"/>
+              </a:spcAft>
+              <a:defRPr sz="1800" b="0">
                 <a:solidFill>
                   <a:srgbClr val="1A1A1A"/>
                 </a:solidFill>
@@ -5811,7 +5760,55 @@
               </a:defRPr>
             </a:pPr>
             <a:r>
-              <a:t>user@student.&lt;institution&gt; failed; user@&lt;institution&gt; worked. The failure is silent - the same status code as a wrong password.</a:t>
+              <a:t>-   MQTT without TLS - the radio leg is encrypted, the cloud leg is not</a:t>
+            </a:r>
+          </a:p>
+          <a:p>
+            <a:pPr>
+              <a:spcAft>
+                <a:spcPts val="1500"/>
+              </a:spcAft>
+              <a:defRPr sz="1800" b="0">
+                <a:solidFill>
+                  <a:srgbClr val="1A1A1A"/>
+                </a:solidFill>
+                <a:latin typeface="Calibri"/>
+              </a:defRPr>
+            </a:pPr>
+            <a:r>
+              <a:t>-   Credentials compiled into firmware, recoverable over USB</a:t>
+            </a:r>
+          </a:p>
+          <a:p>
+            <a:pPr>
+              <a:spcAft>
+                <a:spcPts val="1500"/>
+              </a:spcAft>
+              <a:defRPr sz="1800" b="0">
+                <a:solidFill>
+                  <a:srgbClr val="1A1A1A"/>
+                </a:solidFill>
+                <a:latin typeface="Calibri"/>
+              </a:defRPr>
+            </a:pPr>
+            <a:r>
+              <a:t>-   Manual channel configuration - a gateway roam silently breaks the link</a:t>
+            </a:r>
+          </a:p>
+          <a:p>
+            <a:pPr>
+              <a:spcAft>
+                <a:spcPts val="1500"/>
+              </a:spcAft>
+              <a:defRPr sz="1800" b="0">
+                <a:solidFill>
+                  <a:srgbClr val="1A1A1A"/>
+                </a:solidFill>
+                <a:latin typeface="Calibri"/>
+              </a:defRPr>
+            </a:pPr>
+            <a:r>
+              <a:t>-   Single remote node - dedup state is one slot, not an array</a:t>
             </a:r>
           </a:p>
         </p:txBody>
@@ -5868,7 +5865,7 @@
               </a:defRPr>
             </a:pPr>
             <a:r>
-              <a:t>WHAT WOULD COME NEXT</a:t>
+              <a:t>MEASURED, NOT ASSUMED</a:t>
             </a:r>
           </a:p>
           <a:p>
@@ -5884,7 +5881,7 @@
               </a:defRPr>
             </a:pPr>
             <a:r>
-              <a:t>Further work</a:t>
+              <a:t>What we found</a:t>
             </a:r>
           </a:p>
         </p:txBody>
@@ -5957,9 +5954,25 @@
           <a:p>
             <a:pPr>
               <a:spcAft>
-                <a:spcPts val="1700"/>
-              </a:spcAft>
-              <a:defRPr sz="1900" b="0">
+                <a:spcPts val="800"/>
+              </a:spcAft>
+              <a:defRPr sz="1900" b="1">
+                <a:solidFill>
+                  <a:srgbClr val="0B6B62"/>
+                </a:solidFill>
+                <a:latin typeface="Calibri"/>
+              </a:defRPr>
+            </a:pPr>
+            <a:r>
+              <a:t>Port 1883 is open outbound on eduroam</a:t>
+            </a:r>
+          </a:p>
+          <a:p>
+            <a:pPr>
+              <a:spcAft>
+                <a:spcPts val="1800"/>
+              </a:spcAft>
+              <a:defRPr sz="1600" b="0">
                 <a:solidFill>
                   <a:srgbClr val="1A1A1A"/>
                 </a:solidFill>
@@ -5967,15 +5980,31 @@
               </a:defRPr>
             </a:pPr>
             <a:r>
-              <a:t>1.   A third node - actually exercise ttl and hop_count</a:t>
-            </a:r>
-          </a:p>
-          <a:p>
-            <a:pPr>
-              <a:spcAft>
-                <a:spcPts val="1700"/>
-              </a:spcAft>
-              <a:defRPr sz="1900" b="0">
+              <a:t>Proved by the MQTT return code: state=5 is a reply from the broker, so the packets crossed the firewall. state=-2 would have meant no TCP connection at all.</a:t>
+            </a:r>
+          </a:p>
+          <a:p>
+            <a:pPr>
+              <a:spcAft>
+                <a:spcPts val="800"/>
+              </a:spcAft>
+              <a:defRPr sz="1900" b="1">
+                <a:solidFill>
+                  <a:srgbClr val="0B6B62"/>
+                </a:solidFill>
+                <a:latin typeface="Calibri"/>
+              </a:defRPr>
+            </a:pPr>
+            <a:r>
+              <a:t>WPA2-Enterprise costs ~97 KB of flash</a:t>
+            </a:r>
+          </a:p>
+          <a:p>
+            <a:pPr>
+              <a:spcAft>
+                <a:spcPts val="1800"/>
+              </a:spcAft>
+              <a:defRPr sz="1600" b="0">
                 <a:solidFill>
                   <a:srgbClr val="1A1A1A"/>
                 </a:solidFill>
@@ -5983,15 +6012,31 @@
               </a:defRPr>
             </a:pPr>
             <a:r>
-              <a:t>2.   ESP-NOW encryption with PMK/LMK for real sender authentication</a:t>
-            </a:r>
-          </a:p>
-          <a:p>
-            <a:pPr>
-              <a:spcAft>
-                <a:spcPts val="1700"/>
-              </a:spcAft>
-              <a:defRPr sz="1900" b="0">
+              <a:t>915,267 bytes with PSK against 1,012,651 with PEAP. Enterprise auth is not free.</a:t>
+            </a:r>
+          </a:p>
+          <a:p>
+            <a:pPr>
+              <a:spcAft>
+                <a:spcPts val="800"/>
+              </a:spcAft>
+              <a:defRPr sz="1900" b="1">
+                <a:solidFill>
+                  <a:srgbClr val="0B6B62"/>
+                </a:solidFill>
+                <a:latin typeface="Calibri"/>
+              </a:defRPr>
+            </a:pPr>
+            <a:r>
+              <a:t>eduroam routes by RADIUS realm, not email domain</a:t>
+            </a:r>
+          </a:p>
+          <a:p>
+            <a:pPr>
+              <a:spcAft>
+                <a:spcPts val="0"/>
+              </a:spcAft>
+              <a:defRPr sz="1600" b="0">
                 <a:solidFill>
                   <a:srgbClr val="1A1A1A"/>
                 </a:solidFill>
@@ -5999,39 +6044,7 @@
               </a:defRPr>
             </a:pPr>
             <a:r>
-              <a:t>3.   MQTT over TLS on port 8883</a:t>
-            </a:r>
-          </a:p>
-          <a:p>
-            <a:pPr>
-              <a:spcAft>
-                <a:spcPts val="1700"/>
-              </a:spcAft>
-              <a:defRPr sz="1900" b="0">
-                <a:solidFill>
-                  <a:srgbClr val="1A1A1A"/>
-                </a:solidFill>
-                <a:latin typeface="Calibri"/>
-              </a:defRPr>
-            </a:pPr>
-            <a:r>
-              <a:t>4.   Credentials provisioned into NVS at first boot, not compiled in</a:t>
-            </a:r>
-          </a:p>
-          <a:p>
-            <a:pPr>
-              <a:spcAft>
-                <a:spcPts val="1700"/>
-              </a:spcAft>
-              <a:defRPr sz="1900" b="0">
-                <a:solidFill>
-                  <a:srgbClr val="1A1A1A"/>
-                </a:solidFill>
-                <a:latin typeface="Calibri"/>
-              </a:defRPr>
-            </a:pPr>
-            <a:r>
-              <a:t>5.   Automatic channel recovery instead of a manual re-upload</a:t>
+              <a:t>user@student.&lt;institution&gt; failed; user@&lt;institution&gt; worked. The failure is silent - the same status code as a wrong password.</a:t>
             </a:r>
           </a:p>
         </p:txBody>
@@ -6045,6 +6058,226 @@
 </file>
 
 <file path=ppt/slides/slide16.xml><?xml version="1.0" encoding="utf-8"?>
+<p:sld xmlns:a="http://schemas.openxmlformats.org/drawingml/2006/main" xmlns:p="http://schemas.openxmlformats.org/presentationml/2006/main" xmlns:r="http://schemas.openxmlformats.org/officeDocument/2006/relationships">
+  <p:cSld>
+    <p:spTree>
+      <p:nvGrpSpPr>
+        <p:cNvPr id="1" name=""/>
+        <p:cNvGrpSpPr/>
+        <p:nvPr/>
+      </p:nvGrpSpPr>
+      <p:grpSpPr/>
+      <p:sp>
+        <p:nvSpPr>
+          <p:cNvPr id="2" name="TextBox 1"/>
+          <p:cNvSpPr txBox="1"/>
+          <p:nvPr/>
+        </p:nvSpPr>
+        <p:spPr>
+          <a:xfrm>
+            <a:off x="640080" y="411480"/>
+            <a:ext cx="10911535" cy="1005840"/>
+          </a:xfrm>
+          <a:prstGeom prst="rect">
+            <a:avLst/>
+          </a:prstGeom>
+          <a:noFill/>
+        </p:spPr>
+        <p:txBody>
+          <a:bodyPr wrap="square">
+            <a:spAutoFit/>
+          </a:bodyPr>
+          <a:lstStyle/>
+          <a:p>
+            <a:pPr>
+              <a:spcAft>
+                <a:spcPts val="200"/>
+              </a:spcAft>
+              <a:defRPr sz="1200" b="1">
+                <a:solidFill>
+                  <a:srgbClr val="0B6B62"/>
+                </a:solidFill>
+                <a:latin typeface="Calibri"/>
+              </a:defRPr>
+            </a:pPr>
+            <a:r>
+              <a:t>WHAT WOULD COME NEXT</a:t>
+            </a:r>
+          </a:p>
+          <a:p>
+            <a:pPr>
+              <a:spcAft>
+                <a:spcPts val="0"/>
+              </a:spcAft>
+              <a:defRPr sz="3200" b="1">
+                <a:solidFill>
+                  <a:srgbClr val="1A1A1A"/>
+                </a:solidFill>
+                <a:latin typeface="Calibri"/>
+              </a:defRPr>
+            </a:pPr>
+            <a:r>
+              <a:t>Further work</a:t>
+            </a:r>
+          </a:p>
+        </p:txBody>
+      </p:sp>
+      <p:sp>
+        <p:nvSpPr>
+          <p:cNvPr id="3" name="Rectangle 2"/>
+          <p:cNvSpPr/>
+          <p:nvPr/>
+        </p:nvSpPr>
+        <p:spPr>
+          <a:xfrm>
+            <a:off x="640080" y="1481328"/>
+            <a:ext cx="10911535" cy="9525"/>
+          </a:xfrm>
+          <a:prstGeom prst="rect">
+            <a:avLst/>
+          </a:prstGeom>
+          <a:solidFill>
+            <a:srgbClr val="D8D8D8"/>
+          </a:solidFill>
+          <a:ln>
+            <a:noFill/>
+          </a:ln>
+          <a:effectLst/>
+        </p:spPr>
+        <p:style>
+          <a:lnRef idx="1">
+            <a:schemeClr val="accent1"/>
+          </a:lnRef>
+          <a:fillRef idx="3">
+            <a:schemeClr val="accent1"/>
+          </a:fillRef>
+          <a:effectRef idx="2">
+            <a:schemeClr val="accent1"/>
+          </a:effectRef>
+          <a:fontRef idx="minor">
+            <a:schemeClr val="lt1"/>
+          </a:fontRef>
+        </p:style>
+        <p:txBody>
+          <a:bodyPr rtlCol="0" anchor="ctr"/>
+          <a:lstStyle/>
+          <a:p>
+            <a:pPr algn="ctr"/>
+          </a:p>
+        </p:txBody>
+      </p:sp>
+      <p:sp>
+        <p:nvSpPr>
+          <p:cNvPr id="4" name="TextBox 3"/>
+          <p:cNvSpPr txBox="1"/>
+          <p:nvPr/>
+        </p:nvSpPr>
+        <p:spPr>
+          <a:xfrm>
+            <a:off x="640080" y="1828800"/>
+            <a:ext cx="10911535" cy="4480560"/>
+          </a:xfrm>
+          <a:prstGeom prst="rect">
+            <a:avLst/>
+          </a:prstGeom>
+          <a:noFill/>
+        </p:spPr>
+        <p:txBody>
+          <a:bodyPr wrap="square">
+            <a:spAutoFit/>
+          </a:bodyPr>
+          <a:lstStyle/>
+          <a:p>
+            <a:pPr>
+              <a:spcAft>
+                <a:spcPts val="1700"/>
+              </a:spcAft>
+              <a:defRPr sz="1900" b="0">
+                <a:solidFill>
+                  <a:srgbClr val="1A1A1A"/>
+                </a:solidFill>
+                <a:latin typeface="Calibri"/>
+              </a:defRPr>
+            </a:pPr>
+            <a:r>
+              <a:t>1.   A third node - actually exercise ttl and hop_count</a:t>
+            </a:r>
+          </a:p>
+          <a:p>
+            <a:pPr>
+              <a:spcAft>
+                <a:spcPts val="1700"/>
+              </a:spcAft>
+              <a:defRPr sz="1900" b="0">
+                <a:solidFill>
+                  <a:srgbClr val="1A1A1A"/>
+                </a:solidFill>
+                <a:latin typeface="Calibri"/>
+              </a:defRPr>
+            </a:pPr>
+            <a:r>
+              <a:t>2.   MQTT over TLS on port 8883</a:t>
+            </a:r>
+          </a:p>
+          <a:p>
+            <a:pPr>
+              <a:spcAft>
+                <a:spcPts val="1700"/>
+              </a:spcAft>
+              <a:defRPr sz="1900" b="0">
+                <a:solidFill>
+                  <a:srgbClr val="1A1A1A"/>
+                </a:solidFill>
+                <a:latin typeface="Calibri"/>
+              </a:defRPr>
+            </a:pPr>
+            <a:r>
+              <a:t>3.   Credentials provisioned into NVS at first boot, not compiled in</a:t>
+            </a:r>
+          </a:p>
+          <a:p>
+            <a:pPr>
+              <a:spcAft>
+                <a:spcPts val="1700"/>
+              </a:spcAft>
+              <a:defRPr sz="1900" b="0">
+                <a:solidFill>
+                  <a:srgbClr val="1A1A1A"/>
+                </a:solidFill>
+                <a:latin typeface="Calibri"/>
+              </a:defRPr>
+            </a:pPr>
+            <a:r>
+              <a:t>4.   Automatic channel recovery instead of a manual re-upload</a:t>
+            </a:r>
+          </a:p>
+          <a:p>
+            <a:pPr>
+              <a:spcAft>
+                <a:spcPts val="1700"/>
+              </a:spcAft>
+              <a:defRPr sz="1900" b="0">
+                <a:solidFill>
+                  <a:srgbClr val="1A1A1A"/>
+                </a:solidFill>
+                <a:latin typeface="Calibri"/>
+              </a:defRPr>
+            </a:pPr>
+            <a:r>
+              <a:t>5.   Persist the buffer to NVS so it survives a reboot, not just a reconnect</a:t>
+            </a:r>
+          </a:p>
+        </p:txBody>
+      </p:sp>
+    </p:spTree>
+  </p:cSld>
+  <p:clrMapOvr>
+    <a:masterClrMapping/>
+  </p:clrMapOvr>
+</p:sld>
+</file>
+
+<file path=ppt/slides/slide17.xml><?xml version="1.0" encoding="utf-8"?>
 <p:sld xmlns:a="http://schemas.openxmlformats.org/drawingml/2006/main" xmlns:p="http://schemas.openxmlformats.org/presentationml/2006/main" xmlns:r="http://schemas.openxmlformats.org/officeDocument/2006/relationships">
   <p:cSld>
     <p:spTree>
@@ -7819,7 +8052,23 @@
               </a:defRPr>
             </a:pPr>
             <a:r>
-              <a:t>+   Sender MAC filtering</a:t>
+              <a:t>+   ESP-NOW encryption + sender auth - PMK + per-peer LMK</a:t>
+            </a:r>
+          </a:p>
+          <a:p>
+            <a:pPr>
+              <a:spcAft>
+                <a:spcPts val="900"/>
+              </a:spcAft>
+              <a:defRPr sz="1600" b="0">
+                <a:solidFill>
+                  <a:srgbClr val="1A1A1A"/>
+                </a:solidFill>
+                <a:latin typeface="Calibri"/>
+              </a:defRPr>
+            </a:pPr>
+            <a:r>
+              <a:t>+   Sender MAC filtering (defence in depth)</a:t>
             </a:r>
           </a:p>
           <a:p>
@@ -7890,38 +8139,6 @@
               </a:defRPr>
             </a:pPr>
             <a:r>
-              <a:t>-   ESP-NOW payloads unencrypted</a:t>
-            </a:r>
-          </a:p>
-          <a:p>
-            <a:pPr>
-              <a:spcAft>
-                <a:spcPts val="900"/>
-              </a:spcAft>
-              <a:defRPr sz="1600" b="0">
-                <a:solidFill>
-                  <a:srgbClr val="1A1A1A"/>
-                </a:solidFill>
-                <a:latin typeface="Calibri"/>
-              </a:defRPr>
-            </a:pPr>
-            <a:r>
-              <a:t>-   No cryptographic sender authentication</a:t>
-            </a:r>
-          </a:p>
-          <a:p>
-            <a:pPr>
-              <a:spcAft>
-                <a:spcPts val="900"/>
-              </a:spcAft>
-              <a:defRPr sz="1600" b="0">
-                <a:solidFill>
-                  <a:srgbClr val="1A1A1A"/>
-                </a:solidFill>
-                <a:latin typeface="Calibri"/>
-              </a:defRPr>
-            </a:pPr>
-            <a:r>
               <a:t>-   MQTT without TLS - token in clear text</a:t>
             </a:r>
           </a:p>
@@ -8009,7 +8226,7 @@
               </a:defRPr>
             </a:pPr>
             <a:r>
-              <a:t>src_id is a claim, not proof. A forged packet with a high sequence number under the live boot_id advances the dedup baseline - after which every genuine packet is rejected until the node reboots. Replay protection becomes the attack surface.</a:t>
+              <a:t>src_id is a claim, not proof. A forged packet with a high sequence number under the live boot_id advances the dedup baseline - after which every genuine packet is rejected until the node reboots. Replay protection becomes the attack surface. Fixed by encrypting the link: a MAC filter was not enough, because the attacker controls the value being filtered on.</a:t>
             </a:r>
           </a:p>
         </p:txBody>

--- a/PRESENTATION.pptx
+++ b/PRESENTATION.pptx
@@ -9,6 +9,7 @@
     <p:sldId id="257" r:id="rId9"/>
     <p:sldId id="258" r:id="rId10"/>
     <p:sldId id="259" r:id="rId11"/>
+    <p:sldId id="273" r:id="rId25"/>
     <p:sldId id="260" r:id="rId12"/>
     <p:sldId id="261" r:id="rId13"/>
     <p:sldId id="262" r:id="rId14"/>
@@ -4672,7 +4673,7 @@
               </a:defRPr>
             </a:pPr>
             <a:r>
-              <a:t>[ Your names ]     |     [ Date ]</a:t>
+              <a:t>Bhanu Gupta  ·  Roshan Aryal     |     9 September 2026</a:t>
             </a:r>
           </a:p>
         </p:txBody>
@@ -4804,14 +4805,15 @@
         </p:nvPicPr>
         <p:blipFill>
           <a:blip r:embed="rId3"/>
+          <a:srcRect b="7500"/>
           <a:stretch>
             <a:fillRect/>
           </a:stretch>
         </p:blipFill>
         <p:spPr>
           <a:xfrm>
-            <a:off x="1463040" y="1783080"/>
-            <a:ext cx="9235440" cy="6071133"/>
+            <a:off x="1691640" y="1755648"/>
+            <a:ext cx="8778240" cy="4736592"/>
           </a:xfrm>
           <a:prstGeom prst="rect">
             <a:avLst/>
@@ -6366,7 +6368,7 @@
 </p:sld>
 </file>
 
-<file path=ppt/slides/slide2.xml><?xml version="1.0" encoding="utf-8"?>
+<file path=ppt/slides/slide18.xml><?xml version="1.0" encoding="utf-8"?>
 <p:sld xmlns:a="http://schemas.openxmlformats.org/drawingml/2006/main" xmlns:p="http://schemas.openxmlformats.org/presentationml/2006/main" xmlns:r="http://schemas.openxmlformats.org/officeDocument/2006/relationships">
   <p:cSld>
     <p:spTree>
@@ -6410,7 +6412,7 @@
               </a:defRPr>
             </a:pPr>
             <a:r>
-              <a:t>WHY THIS EXISTS</a:t>
+              <a:t>WIRING</a:t>
             </a:r>
           </a:p>
           <a:p>
@@ -6426,7 +6428,7 @@
               </a:defRPr>
             </a:pPr>
             <a:r>
-              <a:t>The problem</a:t>
+              <a:t>Circuit</a:t>
             </a:r>
           </a:p>
         </p:txBody>
@@ -6475,109 +6477,30 @@
           </a:p>
         </p:txBody>
       </p:sp>
-      <p:sp>
-        <p:nvSpPr>
-          <p:cNvPr id="4" name="TextBox 3"/>
-          <p:cNvSpPr txBox="1"/>
+      <p:pic>
+        <p:nvPicPr>
+          <p:cNvPr id="4" name="Picture 3" descr="fig_circuit_diagram.png"/>
+          <p:cNvPicPr>
+            <a:picLocks noChangeAspect="1"/>
+          </p:cNvPicPr>
           <p:nvPr/>
-        </p:nvSpPr>
+        </p:nvPicPr>
+        <p:blipFill>
+          <a:blip r:embed="rId2"/>
+          <a:stretch>
+            <a:fillRect/>
+          </a:stretch>
+        </p:blipFill>
         <p:spPr>
           <a:xfrm>
-            <a:off x="640080" y="1828800"/>
-            <a:ext cx="10911535" cy="4480560"/>
+            <a:off x="640080" y="1783080"/>
+            <a:ext cx="10908792" cy="6732847"/>
           </a:xfrm>
           <a:prstGeom prst="rect">
             <a:avLst/>
           </a:prstGeom>
-          <a:noFill/>
         </p:spPr>
-        <p:txBody>
-          <a:bodyPr wrap="square">
-            <a:spAutoFit/>
-          </a:bodyPr>
-          <a:lstStyle/>
-          <a:p>
-            <a:pPr>
-              <a:spcAft>
-                <a:spcPts val="2600"/>
-              </a:spcAft>
-              <a:defRPr sz="2200" b="0">
-                <a:solidFill>
-                  <a:srgbClr val="1A1A1A"/>
-                </a:solidFill>
-                <a:latin typeface="Calibri"/>
-              </a:defRPr>
-            </a:pPr>
-            <a:r>
-              <a:t>A sensor is somewhere without Wi-Fi coverage, mains power, or both.</a:t>
-            </a:r>
-          </a:p>
-          <a:p>
-            <a:pPr>
-              <a:spcAft>
-                <a:spcPts val="1400"/>
-              </a:spcAft>
-              <a:defRPr sz="1900" b="0">
-                <a:solidFill>
-                  <a:srgbClr val="1A1A1A"/>
-                </a:solidFill>
-                <a:latin typeface="Calibri"/>
-              </a:defRPr>
-            </a:pPr>
-            <a:r>
-              <a:t>-   Wi-Fi association costs seconds and milliamps before a single byte moves</a:t>
-            </a:r>
-          </a:p>
-          <a:p>
-            <a:pPr>
-              <a:spcAft>
-                <a:spcPts val="1400"/>
-              </a:spcAft>
-              <a:defRPr sz="1900" b="0">
-                <a:solidFill>
-                  <a:srgbClr val="1A1A1A"/>
-                </a:solidFill>
-                <a:latin typeface="Calibri"/>
-              </a:defRPr>
-            </a:pPr>
-            <a:r>
-              <a:t>-   Every node needing its own AP credentials does not scale</a:t>
-            </a:r>
-          </a:p>
-          <a:p>
-            <a:pPr>
-              <a:spcAft>
-                <a:spcPts val="1400"/>
-              </a:spcAft>
-              <a:defRPr sz="1900" b="0">
-                <a:solidFill>
-                  <a:srgbClr val="1A1A1A"/>
-                </a:solidFill>
-                <a:latin typeface="Calibri"/>
-              </a:defRPr>
-            </a:pPr>
-            <a:r>
-              <a:t>-   One device with connectivity should be able to carry data for several without</a:t>
-            </a:r>
-          </a:p>
-          <a:p>
-            <a:pPr>
-              <a:spcAft>
-                <a:spcPts val="0"/>
-              </a:spcAft>
-              <a:defRPr sz="2200" b="1">
-                <a:solidFill>
-                  <a:srgbClr val="0B6B62"/>
-                </a:solidFill>
-                <a:latin typeface="Calibri"/>
-              </a:defRPr>
-            </a:pPr>
-            <a:r>
-              <a:t>So: cheap radio between the nodes, one gateway that owns the cloud link.</a:t>
-            </a:r>
-          </a:p>
-        </p:txBody>
-      </p:sp>
+      </p:pic>
     </p:spTree>
   </p:cSld>
   <p:clrMapOvr>
@@ -6586,7 +6509,7 @@
 </p:sld>
 </file>
 
-<file path=ppt/slides/slide3.xml><?xml version="1.0" encoding="utf-8"?>
+<file path=ppt/slides/slide2.xml><?xml version="1.0" encoding="utf-8"?>
 <p:sld xmlns:a="http://schemas.openxmlformats.org/drawingml/2006/main" xmlns:p="http://schemas.openxmlformats.org/presentationml/2006/main" xmlns:r="http://schemas.openxmlformats.org/officeDocument/2006/relationships">
   <p:cSld>
     <p:spTree>
@@ -6630,7 +6553,7 @@
               </a:defRPr>
             </a:pPr>
             <a:r>
-              <a:t>SCOPE</a:t>
+              <a:t>WHY THIS EXISTS</a:t>
             </a:r>
           </a:p>
           <a:p>
@@ -6646,7 +6569,7 @@
               </a:defRPr>
             </a:pPr>
             <a:r>
-              <a:t>What we built</a:t>
+              <a:t>The problem</a:t>
             </a:r>
           </a:p>
         </p:txBody>
@@ -6703,8 +6626,8 @@
         </p:nvSpPr>
         <p:spPr>
           <a:xfrm>
-            <a:off x="640080" y="1783080"/>
-            <a:ext cx="6400800" cy="4526280"/>
+            <a:off x="640080" y="1828800"/>
+            <a:ext cx="10911535" cy="4480560"/>
           </a:xfrm>
           <a:prstGeom prst="rect">
             <a:avLst/>
@@ -6719,9 +6642,73 @@
           <a:p>
             <a:pPr>
               <a:spcAft>
-                <a:spcPts val="600"/>
-              </a:spcAft>
-              <a:defRPr sz="2000" b="1">
+                <a:spcPts val="2600"/>
+              </a:spcAft>
+              <a:defRPr sz="2200" b="0">
+                <a:solidFill>
+                  <a:srgbClr val="1A1A1A"/>
+                </a:solidFill>
+                <a:latin typeface="Calibri"/>
+              </a:defRPr>
+            </a:pPr>
+            <a:r>
+              <a:t>A sensor is somewhere without Wi-Fi coverage, mains power, or both.</a:t>
+            </a:r>
+          </a:p>
+          <a:p>
+            <a:pPr>
+              <a:spcAft>
+                <a:spcPts val="1400"/>
+              </a:spcAft>
+              <a:defRPr sz="1900" b="0">
+                <a:solidFill>
+                  <a:srgbClr val="1A1A1A"/>
+                </a:solidFill>
+                <a:latin typeface="Calibri"/>
+              </a:defRPr>
+            </a:pPr>
+            <a:r>
+              <a:t>-   Wi-Fi association costs seconds and milliamps before a single byte moves</a:t>
+            </a:r>
+          </a:p>
+          <a:p>
+            <a:pPr>
+              <a:spcAft>
+                <a:spcPts val="1400"/>
+              </a:spcAft>
+              <a:defRPr sz="1900" b="0">
+                <a:solidFill>
+                  <a:srgbClr val="1A1A1A"/>
+                </a:solidFill>
+                <a:latin typeface="Calibri"/>
+              </a:defRPr>
+            </a:pPr>
+            <a:r>
+              <a:t>-   Every node needing its own AP credentials does not scale</a:t>
+            </a:r>
+          </a:p>
+          <a:p>
+            <a:pPr>
+              <a:spcAft>
+                <a:spcPts val="1400"/>
+              </a:spcAft>
+              <a:defRPr sz="1900" b="0">
+                <a:solidFill>
+                  <a:srgbClr val="1A1A1A"/>
+                </a:solidFill>
+                <a:latin typeface="Calibri"/>
+              </a:defRPr>
+            </a:pPr>
+            <a:r>
+              <a:t>-   One connected gateway can carry data for several local nodes</a:t>
+            </a:r>
+          </a:p>
+          <a:p>
+            <a:pPr>
+              <a:spcAft>
+                <a:spcPts val="0"/>
+              </a:spcAft>
+              <a:defRPr sz="2200" b="1">
                 <a:solidFill>
                   <a:srgbClr val="0B6B62"/>
                 </a:solidFill>
@@ -6729,115 +6716,11 @@
               </a:defRPr>
             </a:pPr>
             <a:r>
-              <a:t>Board 1  -  Remote node</a:t>
-            </a:r>
-          </a:p>
-          <a:p>
-            <a:pPr>
-              <a:spcAft>
-                <a:spcPts val="1800"/>
-              </a:spcAft>
-              <a:defRPr sz="1700" b="0">
-                <a:solidFill>
-                  <a:srgbClr val="1A1A1A"/>
-                </a:solidFill>
-                <a:latin typeface="Calibri"/>
-              </a:defRPr>
-            </a:pPr>
-            <a:r>
-              <a:t>DHT11 on GPIO4. Reads and transmits every 5 s over ESP-NOW. Never joins the access point.</a:t>
-            </a:r>
-          </a:p>
-          <a:p>
-            <a:pPr>
-              <a:spcAft>
-                <a:spcPts val="600"/>
-              </a:spcAft>
-              <a:defRPr sz="2000" b="1">
-                <a:solidFill>
-                  <a:srgbClr val="0B6B62"/>
-                </a:solidFill>
-                <a:latin typeface="Calibri"/>
-              </a:defRPr>
-            </a:pPr>
-            <a:r>
-              <a:t>Board 2  -  Gateway</a:t>
-            </a:r>
-          </a:p>
-          <a:p>
-            <a:pPr>
-              <a:spcAft>
-                <a:spcPts val="2000"/>
-              </a:spcAft>
-              <a:defRPr sz="1700" b="0">
-                <a:solidFill>
-                  <a:srgbClr val="1A1A1A"/>
-                </a:solidFill>
-                <a:latin typeface="Calibri"/>
-              </a:defRPr>
-            </a:pPr>
-            <a:r>
-              <a:t>DHT11 on GPIO5. Joins eduroam, receives and deduplicates Board 1's packets, merges both readings, publishes to ThingsBoard over MQTT every 10 s.</a:t>
-            </a:r>
-          </a:p>
-          <a:p>
-            <a:pPr>
-              <a:spcAft>
-                <a:spcPts val="1600"/>
-              </a:spcAft>
-              <a:defRPr sz="1800" b="1">
-                <a:solidFill>
-                  <a:srgbClr val="1A1A1A"/>
-                </a:solidFill>
-                <a:latin typeface="Calibri"/>
-              </a:defRPr>
-            </a:pPr>
-            <a:r>
-              <a:t>No wire between the two boards. The only link is a 2.4 GHz radio.</a:t>
-            </a:r>
-          </a:p>
-          <a:p>
-            <a:pPr>
-              <a:spcAft>
-                <a:spcPts val="0"/>
-              </a:spcAft>
-              <a:defRPr sz="1500" b="0">
-                <a:solidFill>
-                  <a:srgbClr val="A83A1F"/>
-                </a:solidFill>
-                <a:latin typeface="Calibri"/>
-              </a:defRPr>
-            </a:pPr>
-            <a:r>
-              <a:t>Two-node prototype with a mesh-ready packet design - not a demonstrated multi-hop mesh. Two radios can only ever be one hop.</a:t>
-            </a:r>
-          </a:p>
-        </p:txBody>
-      </p:sp>
-      <p:pic>
-        <p:nvPicPr>
-          <p:cNvPr id="5" name="Picture 4" descr="photo_01_both_boards_no_wire.jpeg"/>
-          <p:cNvPicPr>
-            <a:picLocks noChangeAspect="1"/>
-          </p:cNvPicPr>
-          <p:nvPr/>
-        </p:nvPicPr>
-        <p:blipFill>
-          <a:blip r:embed="rId3"/>
-          <a:stretch>
-            <a:fillRect/>
-          </a:stretch>
-        </p:blipFill>
-        <p:spPr>
-          <a:xfrm>
-            <a:off x="7498079" y="1783080"/>
-            <a:ext cx="4023360" cy="5364924"/>
-          </a:xfrm>
-          <a:prstGeom prst="rect">
-            <a:avLst/>
-          </a:prstGeom>
-        </p:spPr>
-      </p:pic>
+              <a:t>So: cheap radio between the nodes, one gateway that owns the cloud link.</a:t>
+            </a:r>
+          </a:p>
+        </p:txBody>
+      </p:sp>
     </p:spTree>
   </p:cSld>
   <p:clrMapOvr>
@@ -6846,7 +6729,7 @@
 </p:sld>
 </file>
 
-<file path=ppt/slides/slide4.xml><?xml version="1.0" encoding="utf-8"?>
+<file path=ppt/slides/slide3.xml><?xml version="1.0" encoding="utf-8"?>
 <p:sld xmlns:a="http://schemas.openxmlformats.org/drawingml/2006/main" xmlns:p="http://schemas.openxmlformats.org/presentationml/2006/main" xmlns:r="http://schemas.openxmlformats.org/officeDocument/2006/relationships">
   <p:cSld>
     <p:spTree>
@@ -6890,7 +6773,7 @@
               </a:defRPr>
             </a:pPr>
             <a:r>
-              <a:t>NETWORKING</a:t>
+              <a:t>SCOPE</a:t>
             </a:r>
           </a:p>
           <a:p>
@@ -6906,7 +6789,7 @@
               </a:defRPr>
             </a:pPr>
             <a:r>
-              <a:t>Architecture</a:t>
+              <a:t>What we built</a:t>
             </a:r>
           </a:p>
         </p:txBody>
@@ -6963,8 +6846,8 @@
         </p:nvSpPr>
         <p:spPr>
           <a:xfrm>
-            <a:off x="640080" y="1920240"/>
-            <a:ext cx="10911535" cy="4389120"/>
+            <a:off x="640080" y="1783080"/>
+            <a:ext cx="6400800" cy="4526280"/>
           </a:xfrm>
           <a:prstGeom prst="rect">
             <a:avLst/>
@@ -6979,25 +6862,25 @@
           <a:p>
             <a:pPr>
               <a:spcAft>
+                <a:spcPts val="600"/>
+              </a:spcAft>
+              <a:defRPr sz="2000" b="1">
+                <a:solidFill>
+                  <a:srgbClr val="0B6B62"/>
+                </a:solidFill>
+                <a:latin typeface="Calibri"/>
+              </a:defRPr>
+            </a:pPr>
+            <a:r>
+              <a:t>Board 1  -  Remote node</a:t>
+            </a:r>
+          </a:p>
+          <a:p>
+            <a:pPr>
+              <a:spcAft>
                 <a:spcPts val="1800"/>
               </a:spcAft>
-              <a:defRPr sz="1600" b="1">
-                <a:solidFill>
-                  <a:srgbClr val="606060"/>
-                </a:solidFill>
-                <a:latin typeface="Calibri"/>
-              </a:defRPr>
-            </a:pPr>
-            <a:r>
-              <a:t>Board 1                          Board 2                        Cloud</a:t>
-            </a:r>
-          </a:p>
-          <a:p>
-            <a:pPr>
-              <a:spcAft>
-                <a:spcPts val="2600"/>
-              </a:spcAft>
-              <a:defRPr sz="1900" b="1">
+              <a:defRPr sz="1700" b="0">
                 <a:solidFill>
                   <a:srgbClr val="1A1A1A"/>
                 </a:solidFill>
@@ -7005,59 +6888,99 @@
               </a:defRPr>
             </a:pPr>
             <a:r>
-              <a:t>DHT11  -&gt;  ESP-NOW unicast  -&gt;  validate  -&gt;  dedup  -&gt;  merge  -&gt;  MQTT  -&gt;  ThingsBoard</a:t>
-            </a:r>
-          </a:p>
-          <a:p>
-            <a:pPr>
-              <a:spcAft>
-                <a:spcPts val="1200"/>
+              <a:t>DHT11 on GPIO4. Reads and transmits every 5 s over ESP-NOW. Never joins the access point.</a:t>
+            </a:r>
+          </a:p>
+          <a:p>
+            <a:pPr>
+              <a:spcAft>
+                <a:spcPts val="600"/>
+              </a:spcAft>
+              <a:defRPr sz="2000" b="1">
+                <a:solidFill>
+                  <a:srgbClr val="0B6B62"/>
+                </a:solidFill>
+                <a:latin typeface="Calibri"/>
+              </a:defRPr>
+            </a:pPr>
+            <a:r>
+              <a:t>Board 2  -  Gateway</a:t>
+            </a:r>
+          </a:p>
+          <a:p>
+            <a:pPr>
+              <a:spcAft>
+                <a:spcPts val="2000"/>
+              </a:spcAft>
+              <a:defRPr sz="1700" b="0">
+                <a:solidFill>
+                  <a:srgbClr val="1A1A1A"/>
+                </a:solidFill>
+                <a:latin typeface="Calibri"/>
+              </a:defRPr>
+            </a:pPr>
+            <a:r>
+              <a:t>DHT11 on GPIO5. Joins eduroam, receives and deduplicates Board 1's packets, merges both readings, publishes to ThingsBoard over MQTT every 10 s.</a:t>
+            </a:r>
+          </a:p>
+          <a:p>
+            <a:pPr>
+              <a:spcAft>
+                <a:spcPts val="1600"/>
+              </a:spcAft>
+              <a:defRPr sz="1800" b="1">
+                <a:solidFill>
+                  <a:srgbClr val="1A1A1A"/>
+                </a:solidFill>
+                <a:latin typeface="Calibri"/>
+              </a:defRPr>
+            </a:pPr>
+            <a:r>
+              <a:t>No wire between the two boards. The only link is a 2.4 GHz radio.</a:t>
+            </a:r>
+          </a:p>
+          <a:p>
+            <a:pPr>
+              <a:spcAft>
+                <a:spcPts val="0"/>
               </a:spcAft>
               <a:defRPr sz="1500" b="0">
                 <a:solidFill>
-                  <a:srgbClr val="1A1A1A"/>
-                </a:solidFill>
-                <a:latin typeface="Consolas"/>
-              </a:defRPr>
-            </a:pPr>
-            <a:r>
-              <a:t>ESP-NOW        connectionless, no IP stack, link-layer acknowledged, 26-byte payload</a:t>
-            </a:r>
-          </a:p>
-          <a:p>
-            <a:pPr>
-              <a:spcAft>
-                <a:spcPts val="1200"/>
-              </a:spcAft>
-              <a:defRPr sz="1500" b="0">
-                <a:solidFill>
-                  <a:srgbClr val="1A1A1A"/>
-                </a:solidFill>
-                <a:latin typeface="Consolas"/>
-              </a:defRPr>
-            </a:pPr>
-            <a:r>
-              <a:t>MQTT           TCP, port 1883, topic v1/devices/me/telemetry, token authentication</a:t>
-            </a:r>
-          </a:p>
-          <a:p>
-            <a:pPr>
-              <a:spcAft>
-                <a:spcPts val="1200"/>
-              </a:spcAft>
-              <a:defRPr sz="1500" b="0">
-                <a:solidFill>
-                  <a:srgbClr val="1A1A1A"/>
-                </a:solidFill>
-                <a:latin typeface="Consolas"/>
-              </a:defRPr>
-            </a:pPr>
-            <a:r>
-              <a:t>Aggregation    both readings merged at the edge, before data leaves the network</a:t>
-            </a:r>
-          </a:p>
-        </p:txBody>
-      </p:sp>
+                  <a:srgbClr val="A83A1F"/>
+                </a:solidFill>
+                <a:latin typeface="Calibri"/>
+              </a:defRPr>
+            </a:pPr>
+            <a:r>
+              <a:t>Two-node prototype with a mesh-ready packet design - not a demonstrated multi-hop mesh. Two radios can only ever be one hop.</a:t>
+            </a:r>
+          </a:p>
+        </p:txBody>
+      </p:sp>
+      <p:pic>
+        <p:nvPicPr>
+          <p:cNvPr id="5" name="Picture 4" descr="photo_01_both_boards_no_wire.jpeg"/>
+          <p:cNvPicPr>
+            <a:picLocks noChangeAspect="1"/>
+          </p:cNvPicPr>
+          <p:nvPr/>
+        </p:nvPicPr>
+        <p:blipFill>
+          <a:blip r:embed="rId3"/>
+          <a:stretch>
+            <a:fillRect/>
+          </a:stretch>
+        </p:blipFill>
+        <p:spPr>
+          <a:xfrm>
+            <a:off x="7766313" y="1783080"/>
+            <a:ext cx="3785302" cy="5047488"/>
+          </a:xfrm>
+          <a:prstGeom prst="rect">
+            <a:avLst/>
+          </a:prstGeom>
+        </p:spPr>
+      </p:pic>
     </p:spTree>
   </p:cSld>
   <p:clrMapOvr>
@@ -7066,7 +6989,7 @@
 </p:sld>
 </file>
 
-<file path=ppt/slides/slide5.xml><?xml version="1.0" encoding="utf-8"?>
+<file path=ppt/slides/slide4.xml><?xml version="1.0" encoding="utf-8"?>
 <p:sld xmlns:a="http://schemas.openxmlformats.org/drawingml/2006/main" xmlns:p="http://schemas.openxmlformats.org/presentationml/2006/main" xmlns:r="http://schemas.openxmlformats.org/officeDocument/2006/relationships">
   <p:cSld>
     <p:spTree>
@@ -7110,7 +7033,7 @@
               </a:defRPr>
             </a:pPr>
             <a:r>
-              <a:t>THE GOVERNING CONSTRAINT</a:t>
+              <a:t>NETWORKING</a:t>
             </a:r>
           </a:p>
           <a:p>
@@ -7126,7 +7049,7 @@
               </a:defRPr>
             </a:pPr>
             <a:r>
-              <a:t>One radio, one channel</a:t>
+              <a:t>Architecture</a:t>
             </a:r>
           </a:p>
         </p:txBody>
@@ -7175,125 +7098,30 @@
           </a:p>
         </p:txBody>
       </p:sp>
-      <p:sp>
-        <p:nvSpPr>
-          <p:cNvPr id="4" name="TextBox 3"/>
-          <p:cNvSpPr txBox="1"/>
+      <p:pic>
+        <p:nvPicPr>
+          <p:cNvPr id="4" name="Picture 3" descr="fig_block_diagram.png"/>
+          <p:cNvPicPr>
+            <a:picLocks noChangeAspect="1"/>
+          </p:cNvPicPr>
           <p:nvPr/>
-        </p:nvSpPr>
+        </p:nvPicPr>
+        <p:blipFill>
+          <a:blip r:embed="rId3"/>
+          <a:stretch>
+            <a:fillRect/>
+          </a:stretch>
+        </p:blipFill>
         <p:spPr>
           <a:xfrm>
-            <a:off x="640080" y="1828800"/>
-            <a:ext cx="10911535" cy="4480560"/>
+            <a:off x="640080" y="1783080"/>
+            <a:ext cx="10908792" cy="6426809"/>
           </a:xfrm>
           <a:prstGeom prst="rect">
             <a:avLst/>
           </a:prstGeom>
-          <a:noFill/>
         </p:spPr>
-        <p:txBody>
-          <a:bodyPr wrap="square">
-            <a:spAutoFit/>
-          </a:bodyPr>
-          <a:lstStyle/>
-          <a:p>
-            <a:pPr>
-              <a:spcAft>
-                <a:spcPts val="2000"/>
-              </a:spcAft>
-              <a:defRPr sz="2100" b="0">
-                <a:solidFill>
-                  <a:srgbClr val="1A1A1A"/>
-                </a:solidFill>
-                <a:latin typeface="Calibri"/>
-              </a:defRPr>
-            </a:pPr>
-            <a:r>
-              <a:t>An ESP32 has a single radio, so it is on exactly one channel at a time.</a:t>
-            </a:r>
-          </a:p>
-          <a:p>
-            <a:pPr>
-              <a:spcAft>
-                <a:spcPts val="2000"/>
-              </a:spcAft>
-              <a:defRPr sz="1900" b="0">
-                <a:solidFill>
-                  <a:srgbClr val="1A1A1A"/>
-                </a:solidFill>
-                <a:latin typeface="Calibri"/>
-              </a:defRPr>
-            </a:pPr>
-            <a:r>
-              <a:t>The gateway must join Wi-Fi for the cloud - and the access point decides which channel that is.</a:t>
-            </a:r>
-          </a:p>
-          <a:p>
-            <a:pPr>
-              <a:spcAft>
-                <a:spcPts val="2400"/>
-              </a:spcAft>
-              <a:defRPr sz="2100" b="1">
-                <a:solidFill>
-                  <a:srgbClr val="0B6B62"/>
-                </a:solidFill>
-                <a:latin typeface="Calibri"/>
-              </a:defRPr>
-            </a:pPr>
-            <a:r>
-              <a:t>So the channel is discovered at runtime, never chosen at design time.</a:t>
-            </a:r>
-          </a:p>
-          <a:p>
-            <a:pPr>
-              <a:spcAft>
-                <a:spcPts val="1200"/>
-              </a:spcAft>
-              <a:defRPr sz="1700" b="0">
-                <a:solidFill>
-                  <a:srgbClr val="1A1A1A"/>
-                </a:solidFill>
-                <a:latin typeface="Calibri"/>
-              </a:defRPr>
-            </a:pPr>
-            <a:r>
-              <a:t>-   The node is pinned to that channel by hand, and reads it back to confirm</a:t>
-            </a:r>
-          </a:p>
-          <a:p>
-            <a:pPr>
-              <a:spcAft>
-                <a:spcPts val="1200"/>
-              </a:spcAft>
-              <a:defRPr sz="1700" b="0">
-                <a:solidFill>
-                  <a:srgbClr val="1A1A1A"/>
-                </a:solidFill>
-                <a:latin typeface="Calibri"/>
-              </a:defRPr>
-            </a:pPr>
-            <a:r>
-              <a:t>-   The node never associates - association would let the two boards drift apart</a:t>
-            </a:r>
-          </a:p>
-          <a:p>
-            <a:pPr>
-              <a:spcAft>
-                <a:spcPts val="1200"/>
-              </a:spcAft>
-              <a:defRPr sz="1700" b="0">
-                <a:solidFill>
-                  <a:srgbClr val="1A1A1A"/>
-                </a:solidFill>
-                <a:latin typeface="Calibri"/>
-              </a:defRPr>
-            </a:pPr>
-            <a:r>
-              <a:t>-   Gateway must be flashed and running before the node can even be configured</a:t>
-            </a:r>
-          </a:p>
-        </p:txBody>
-      </p:sp>
+      </p:pic>
     </p:spTree>
   </p:cSld>
   <p:clrMapOvr>
@@ -7302,7 +7130,7 @@
 </p:sld>
 </file>
 
-<file path=ppt/slides/slide6.xml><?xml version="1.0" encoding="utf-8"?>
+<file path=ppt/slides/slide5.xml><?xml version="1.0" encoding="utf-8"?>
 <p:sld xmlns:a="http://schemas.openxmlformats.org/drawingml/2006/main" xmlns:p="http://schemas.openxmlformats.org/presentationml/2006/main" xmlns:r="http://schemas.openxmlformats.org/officeDocument/2006/relationships">
   <p:cSld>
     <p:spTree>
@@ -7346,7 +7174,7 @@
               </a:defRPr>
             </a:pPr>
             <a:r>
-              <a:t>26 BYTES</a:t>
+              <a:t>THE GOVERNING CONSTRAINT</a:t>
             </a:r>
           </a:p>
           <a:p>
@@ -7362,7 +7190,7 @@
               </a:defRPr>
             </a:pPr>
             <a:r>
-              <a:t>Packet design</a:t>
+              <a:t>One radio, one channel</a:t>
             </a:r>
           </a:p>
         </p:txBody>
@@ -7420,7 +7248,7 @@
         <p:spPr>
           <a:xfrm>
             <a:off x="640080" y="1828800"/>
-            <a:ext cx="5852160" cy="4480560"/>
+            <a:ext cx="10911535" cy="4480560"/>
           </a:xfrm>
           <a:prstGeom prst="rect">
             <a:avLst/>
@@ -7435,200 +7263,97 @@
           <a:p>
             <a:pPr>
               <a:spcAft>
-                <a:spcPts val="900"/>
-              </a:spcAft>
-              <a:defRPr sz="1400" b="0">
+                <a:spcPts val="2000"/>
+              </a:spcAft>
+              <a:defRPr sz="2100" b="0">
                 <a:solidFill>
                   <a:srgbClr val="1A1A1A"/>
                 </a:solidFill>
-                <a:latin typeface="Consolas"/>
-              </a:defRPr>
-            </a:pPr>
-            <a:r>
-              <a:t>version, msg_type      protocol evolution</a:t>
-            </a:r>
-          </a:p>
-          <a:p>
-            <a:pPr>
-              <a:spcAft>
-                <a:spcPts val="900"/>
-              </a:spcAft>
-              <a:defRPr sz="1400" b="0">
+                <a:latin typeface="Calibri"/>
+              </a:defRPr>
+            </a:pPr>
+            <a:r>
+              <a:t>An ESP32 has a single radio, so it is on exactly one channel at a time.</a:t>
+            </a:r>
+          </a:p>
+          <a:p>
+            <a:pPr>
+              <a:spcAft>
+                <a:spcPts val="2000"/>
+              </a:spcAft>
+              <a:defRPr sz="1900" b="0">
                 <a:solidFill>
                   <a:srgbClr val="1A1A1A"/>
                 </a:solidFill>
-                <a:latin typeface="Consolas"/>
-              </a:defRPr>
-            </a:pPr>
-            <a:r>
-              <a:t>src_id, dst_id         addressing, not broadcast</a:t>
-            </a:r>
-          </a:p>
-          <a:p>
-            <a:pPr>
-              <a:spcAft>
-                <a:spcPts val="900"/>
-              </a:spcAft>
-              <a:defRPr sz="1400" b="0">
+                <a:latin typeface="Calibri"/>
+              </a:defRPr>
+            </a:pPr>
+            <a:r>
+              <a:t>The gateway must join Wi-Fi for the cloud - and the access point decides which channel that is.</a:t>
+            </a:r>
+          </a:p>
+          <a:p>
+            <a:pPr>
+              <a:spcAft>
+                <a:spcPts val="2400"/>
+              </a:spcAft>
+              <a:defRPr sz="2100" b="1">
+                <a:solidFill>
+                  <a:srgbClr val="0B6B62"/>
+                </a:solidFill>
+                <a:latin typeface="Calibri"/>
+              </a:defRPr>
+            </a:pPr>
+            <a:r>
+              <a:t>So the channel is discovered at runtime, never chosen at design time.</a:t>
+            </a:r>
+          </a:p>
+          <a:p>
+            <a:pPr>
+              <a:spcAft>
+                <a:spcPts val="1200"/>
+              </a:spcAft>
+              <a:defRPr sz="1700" b="0">
                 <a:solidFill>
                   <a:srgbClr val="1A1A1A"/>
                 </a:solidFill>
-                <a:latin typeface="Consolas"/>
-              </a:defRPr>
-            </a:pPr>
-            <a:r>
-              <a:t>boot_id                random per power-up</a:t>
-            </a:r>
-          </a:p>
-          <a:p>
-            <a:pPr>
-              <a:spcAft>
-                <a:spcPts val="900"/>
-              </a:spcAft>
-              <a:defRPr sz="1400" b="0">
+                <a:latin typeface="Calibri"/>
+              </a:defRPr>
+            </a:pPr>
+            <a:r>
+              <a:t>-   The node is pinned to that channel by hand, and reads it back to confirm</a:t>
+            </a:r>
+          </a:p>
+          <a:p>
+            <a:pPr>
+              <a:spcAft>
+                <a:spcPts val="1200"/>
+              </a:spcAft>
+              <a:defRPr sz="1700" b="0">
                 <a:solidFill>
                   <a:srgbClr val="1A1A1A"/>
                 </a:solidFill>
-                <a:latin typeface="Consolas"/>
-              </a:defRPr>
-            </a:pPr>
-            <a:r>
-              <a:t>seq                    ordering within a session</a:t>
-            </a:r>
-          </a:p>
-          <a:p>
-            <a:pPr>
-              <a:spcAft>
-                <a:spcPts val="900"/>
-              </a:spcAft>
-              <a:defRPr sz="1400" b="0">
+                <a:latin typeface="Calibri"/>
+              </a:defRPr>
+            </a:pPr>
+            <a:r>
+              <a:t>-   The node never associates - association would let the two boards drift apart</a:t>
+            </a:r>
+          </a:p>
+          <a:p>
+            <a:pPr>
+              <a:spcAft>
+                <a:spcPts val="1200"/>
+              </a:spcAft>
+              <a:defRPr sz="1700" b="0">
                 <a:solidFill>
                   <a:srgbClr val="1A1A1A"/>
                 </a:solidFill>
-                <a:latin typeface="Consolas"/>
-              </a:defRPr>
-            </a:pPr>
-            <a:r>
-              <a:t>ttl, hop_count         carried, never decremented</a:t>
-            </a:r>
-          </a:p>
-          <a:p>
-            <a:pPr>
-              <a:spcAft>
-                <a:spcPts val="900"/>
-              </a:spcAft>
-              <a:defRPr sz="1400" b="0">
-                <a:solidFill>
-                  <a:srgbClr val="1A1A1A"/>
-                </a:solidFill>
-                <a:latin typeface="Consolas"/>
-              </a:defRPr>
-            </a:pPr>
-            <a:r>
-              <a:t>temperature, humidity  the payload</a:t>
-            </a:r>
-          </a:p>
-          <a:p>
-            <a:pPr>
-              <a:spcAft>
-                <a:spcPts val="900"/>
-              </a:spcAft>
-              <a:defRPr sz="1400" b="0">
-                <a:solidFill>
-                  <a:srgbClr val="1A1A1A"/>
-                </a:solidFill>
-                <a:latin typeface="Consolas"/>
-              </a:defRPr>
-            </a:pPr>
-            <a:r>
-              <a:t>uptime_ms              sender liveness</a:t>
-            </a:r>
-          </a:p>
-        </p:txBody>
-      </p:sp>
-      <p:sp>
-        <p:nvSpPr>
-          <p:cNvPr id="5" name="TextBox 4"/>
-          <p:cNvSpPr txBox="1"/>
-          <p:nvPr/>
-        </p:nvSpPr>
-        <p:spPr>
-          <a:xfrm>
-            <a:off x="6766560" y="1828800"/>
-            <a:ext cx="4754880" cy="4480560"/>
-          </a:xfrm>
-          <a:prstGeom prst="rect">
-            <a:avLst/>
-          </a:prstGeom>
-          <a:noFill/>
-        </p:spPr>
-        <p:txBody>
-          <a:bodyPr wrap="square">
-            <a:spAutoFit/>
-          </a:bodyPr>
-          <a:lstStyle/>
-          <a:p>
-            <a:pPr>
-              <a:spcAft>
-                <a:spcPts val="1000"/>
-              </a:spcAft>
-              <a:defRPr sz="1900" b="1">
-                <a:solidFill>
-                  <a:srgbClr val="0B6B62"/>
-                </a:solidFill>
-                <a:latin typeface="Calibri"/>
-              </a:defRPr>
-            </a:pPr>
-            <a:r>
-              <a:t>Why no checksum?</a:t>
-            </a:r>
-          </a:p>
-          <a:p>
-            <a:pPr>
-              <a:spcAft>
-                <a:spcPts val="2000"/>
-              </a:spcAft>
-              <a:defRPr sz="1600" b="0">
-                <a:solidFill>
-                  <a:srgbClr val="1A1A1A"/>
-                </a:solidFill>
-                <a:latin typeface="Calibri"/>
-              </a:defRPr>
-            </a:pPr>
-            <a:r>
-              <a:t>802.11 already CRC-checks every delivered frame. A checksum would duplicate hardware work - and would not authenticate anything.</a:t>
-            </a:r>
-          </a:p>
-          <a:p>
-            <a:pPr>
-              <a:spcAft>
-                <a:spcPts val="800"/>
-              </a:spcAft>
-              <a:defRPr sz="1400" b="1">
-                <a:solidFill>
-                  <a:srgbClr val="1A1A1A"/>
-                </a:solidFill>
-                <a:latin typeface="Calibri"/>
-              </a:defRPr>
-            </a:pPr>
-            <a:r>
-              <a:t>static_assert(sizeof == 26)</a:t>
-            </a:r>
-          </a:p>
-          <a:p>
-            <a:pPr>
-              <a:spcAft>
-                <a:spcPts val="800"/>
-              </a:spcAft>
-              <a:defRPr sz="1500" b="0">
-                <a:solidFill>
-                  <a:srgbClr val="606060"/>
-                </a:solidFill>
-                <a:latin typeface="Calibri"/>
-              </a:defRPr>
-            </a:pPr>
-            <a:r>
-              <a:t>Pins the size in both sketches. It constrains layout but does not prove field agreement - fields could be reordered and still pass.</a:t>
+                <a:latin typeface="Calibri"/>
+              </a:defRPr>
+            </a:pPr>
+            <a:r>
+              <a:t>-   Gateway must be flashed and running before the node can even be configured</a:t>
             </a:r>
           </a:p>
         </p:txBody>
@@ -7641,7 +7366,7 @@
 </p:sld>
 </file>
 
-<file path=ppt/slides/slide7.xml><?xml version="1.0" encoding="utf-8"?>
+<file path=ppt/slides/slide6.xml><?xml version="1.0" encoding="utf-8"?>
 <p:sld xmlns:a="http://schemas.openxmlformats.org/drawingml/2006/main" xmlns:p="http://schemas.openxmlformats.org/presentationml/2006/main" xmlns:r="http://schemas.openxmlformats.org/officeDocument/2006/relationships">
   <p:cSld>
     <p:spTree>
@@ -7685,7 +7410,7 @@
               </a:defRPr>
             </a:pPr>
             <a:r>
-              <a:t>SOFTWARE</a:t>
+              <a:t>26 BYTES</a:t>
             </a:r>
           </a:p>
           <a:p>
@@ -7701,7 +7426,7 @@
               </a:defRPr>
             </a:pPr>
             <a:r>
-              <a:t>Deduplication</a:t>
+              <a:t>Packet design</a:t>
             </a:r>
           </a:p>
         </p:txBody>
@@ -7759,7 +7484,7 @@
         <p:spPr>
           <a:xfrm>
             <a:off x="640080" y="1828800"/>
-            <a:ext cx="10911535" cy="4480560"/>
+            <a:ext cx="5852160" cy="4480560"/>
           </a:xfrm>
           <a:prstGeom prst="rect">
             <a:avLst/>
@@ -7774,9 +7499,144 @@
           <a:p>
             <a:pPr>
               <a:spcAft>
-                <a:spcPts val="2200"/>
-              </a:spcAft>
-              <a:defRPr sz="2200" b="1">
+                <a:spcPts val="900"/>
+              </a:spcAft>
+              <a:defRPr sz="1400" b="0">
+                <a:solidFill>
+                  <a:srgbClr val="1A1A1A"/>
+                </a:solidFill>
+                <a:latin typeface="Consolas"/>
+              </a:defRPr>
+            </a:pPr>
+            <a:r>
+              <a:t>version, msg_type      protocol evolution</a:t>
+            </a:r>
+          </a:p>
+          <a:p>
+            <a:pPr>
+              <a:spcAft>
+                <a:spcPts val="900"/>
+              </a:spcAft>
+              <a:defRPr sz="1400" b="0">
+                <a:solidFill>
+                  <a:srgbClr val="1A1A1A"/>
+                </a:solidFill>
+                <a:latin typeface="Consolas"/>
+              </a:defRPr>
+            </a:pPr>
+            <a:r>
+              <a:t>src_id, dst_id         addressing, not broadcast</a:t>
+            </a:r>
+          </a:p>
+          <a:p>
+            <a:pPr>
+              <a:spcAft>
+                <a:spcPts val="900"/>
+              </a:spcAft>
+              <a:defRPr sz="1400" b="0">
+                <a:solidFill>
+                  <a:srgbClr val="1A1A1A"/>
+                </a:solidFill>
+                <a:latin typeface="Consolas"/>
+              </a:defRPr>
+            </a:pPr>
+            <a:r>
+              <a:t>boot_id                random per power-up</a:t>
+            </a:r>
+          </a:p>
+          <a:p>
+            <a:pPr>
+              <a:spcAft>
+                <a:spcPts val="900"/>
+              </a:spcAft>
+              <a:defRPr sz="1400" b="0">
+                <a:solidFill>
+                  <a:srgbClr val="1A1A1A"/>
+                </a:solidFill>
+                <a:latin typeface="Consolas"/>
+              </a:defRPr>
+            </a:pPr>
+            <a:r>
+              <a:t>seq                    ordering within a session</a:t>
+            </a:r>
+          </a:p>
+          <a:p>
+            <a:pPr>
+              <a:spcAft>
+                <a:spcPts val="900"/>
+              </a:spcAft>
+              <a:defRPr sz="1400" b="0">
+                <a:solidFill>
+                  <a:srgbClr val="1A1A1A"/>
+                </a:solidFill>
+                <a:latin typeface="Consolas"/>
+              </a:defRPr>
+            </a:pPr>
+            <a:r>
+              <a:t>ttl, hop_count         carried, never decremented</a:t>
+            </a:r>
+          </a:p>
+          <a:p>
+            <a:pPr>
+              <a:spcAft>
+                <a:spcPts val="900"/>
+              </a:spcAft>
+              <a:defRPr sz="1400" b="0">
+                <a:solidFill>
+                  <a:srgbClr val="1A1A1A"/>
+                </a:solidFill>
+                <a:latin typeface="Consolas"/>
+              </a:defRPr>
+            </a:pPr>
+            <a:r>
+              <a:t>temperature, humidity  the payload</a:t>
+            </a:r>
+          </a:p>
+          <a:p>
+            <a:pPr>
+              <a:spcAft>
+                <a:spcPts val="900"/>
+              </a:spcAft>
+              <a:defRPr sz="1400" b="0">
+                <a:solidFill>
+                  <a:srgbClr val="1A1A1A"/>
+                </a:solidFill>
+                <a:latin typeface="Consolas"/>
+              </a:defRPr>
+            </a:pPr>
+            <a:r>
+              <a:t>uptime_ms              sender liveness</a:t>
+            </a:r>
+          </a:p>
+        </p:txBody>
+      </p:sp>
+      <p:sp>
+        <p:nvSpPr>
+          <p:cNvPr id="5" name="TextBox 4"/>
+          <p:cNvSpPr txBox="1"/>
+          <p:nvPr/>
+        </p:nvSpPr>
+        <p:spPr>
+          <a:xfrm>
+            <a:off x="6766560" y="1828800"/>
+            <a:ext cx="4754880" cy="4480560"/>
+          </a:xfrm>
+          <a:prstGeom prst="rect">
+            <a:avLst/>
+          </a:prstGeom>
+          <a:noFill/>
+        </p:spPr>
+        <p:txBody>
+          <a:bodyPr wrap="square">
+            <a:spAutoFit/>
+          </a:bodyPr>
+          <a:lstStyle/>
+          <a:p>
+            <a:pPr>
+              <a:spcAft>
+                <a:spcPts val="1000"/>
+              </a:spcAft>
+              <a:defRPr sz="1900" b="1">
                 <a:solidFill>
                   <a:srgbClr val="0B6B62"/>
                 </a:solidFill>
@@ -7784,15 +7644,15 @@
               </a:defRPr>
             </a:pPr>
             <a:r>
-              <a:t>Key:   (src_id, boot_id, seq)</a:t>
-            </a:r>
-          </a:p>
-          <a:p>
-            <a:pPr>
-              <a:spcAft>
-                <a:spcPts val="1800"/>
-              </a:spcAft>
-              <a:defRPr sz="1800" b="0">
+              <a:t>Why no checksum?</a:t>
+            </a:r>
+          </a:p>
+          <a:p>
+            <a:pPr>
+              <a:spcAft>
+                <a:spcPts val="2000"/>
+              </a:spcAft>
+              <a:defRPr sz="1600" b="0">
                 <a:solidFill>
                   <a:srgbClr val="1A1A1A"/>
                 </a:solidFill>
@@ -7800,15 +7660,15 @@
               </a:defRPr>
             </a:pPr>
             <a:r>
-              <a:t>Strict last-sequence-wins. Anything not newer than the highest already accepted in this session is a duplicate.</a:t>
-            </a:r>
-          </a:p>
-          <a:p>
-            <a:pPr>
-              <a:spcAft>
-                <a:spcPts val="1000"/>
-              </a:spcAft>
-              <a:defRPr sz="1900" b="1">
+              <a:t>802.11 already CRC-checks every delivered frame. A checksum would duplicate hardware work - and would not authenticate anything.</a:t>
+            </a:r>
+          </a:p>
+          <a:p>
+            <a:pPr>
+              <a:spcAft>
+                <a:spcPts val="800"/>
+              </a:spcAft>
+              <a:defRPr sz="1400" b="1">
                 <a:solidFill>
                   <a:srgbClr val="1A1A1A"/>
                 </a:solidFill>
@@ -7816,31 +7676,15 @@
               </a:defRPr>
             </a:pPr>
             <a:r>
-              <a:t>boot_id is randomised every power-up.</a:t>
-            </a:r>
-          </a:p>
-          <a:p>
-            <a:pPr>
-              <a:spcAft>
-                <a:spcPts val="1800"/>
-              </a:spcAft>
-              <a:defRPr sz="1700" b="0">
-                <a:solidFill>
-                  <a:srgbClr val="1A1A1A"/>
-                </a:solidFill>
-                <a:latin typeface="Calibri"/>
-              </a:defRPr>
-            </a:pPr>
-            <a:r>
-              <a:t>Without it, a node restart looks identical to a replay: every packet arrives with a sequence below the stored baseline and is rejected forever. The node never comes back.</a:t>
-            </a:r>
-          </a:p>
-          <a:p>
-            <a:pPr>
-              <a:spcAft>
-                <a:spcPts val="0"/>
-              </a:spcAft>
-              <a:defRPr sz="1700" b="0">
+              <a:t>static_assert(sizeof == 26)</a:t>
+            </a:r>
+          </a:p>
+          <a:p>
+            <a:pPr>
+              <a:spcAft>
+                <a:spcPts val="800"/>
+              </a:spcAft>
+              <a:defRPr sz="1500" b="0">
                 <a:solidFill>
                   <a:srgbClr val="606060"/>
                 </a:solidFill>
@@ -7848,7 +7692,7 @@
               </a:defRPr>
             </a:pPr>
             <a:r>
-              <a:t>A forward jump is a gap, not a duplicate - those packets were lost, not repeated. A receiver demanding contiguous sequences would deadlock on the first loss.</a:t>
+              <a:t>Pins the size in both sketches. It constrains layout but does not prove field agreement - fields could be reordered and still pass.</a:t>
             </a:r>
           </a:p>
         </p:txBody>
@@ -7861,7 +7705,7 @@
 </p:sld>
 </file>
 
-<file path=ppt/slides/slide8.xml><?xml version="1.0" encoding="utf-8"?>
+<file path=ppt/slides/slide7.xml><?xml version="1.0" encoding="utf-8"?>
 <p:sld xmlns:a="http://schemas.openxmlformats.org/drawingml/2006/main" xmlns:p="http://schemas.openxmlformats.org/presentationml/2006/main" xmlns:r="http://schemas.openxmlformats.org/officeDocument/2006/relationships">
   <p:cSld>
     <p:spTree>
@@ -7905,7 +7749,7 @@
               </a:defRPr>
             </a:pPr>
             <a:r>
-              <a:t>THREAT MODEL</a:t>
+              <a:t>SOFTWARE</a:t>
             </a:r>
           </a:p>
           <a:p>
@@ -7921,7 +7765,7 @@
               </a:defRPr>
             </a:pPr>
             <a:r>
-              <a:t>Security</a:t>
+              <a:t>Deduplication</a:t>
             </a:r>
           </a:p>
         </p:txBody>
@@ -7978,8 +7822,8 @@
         </p:nvSpPr>
         <p:spPr>
           <a:xfrm>
-            <a:off x="640080" y="1783080"/>
-            <a:ext cx="5760720" cy="4526280"/>
+            <a:off x="640080" y="1828800"/>
+            <a:ext cx="10911535" cy="4480560"/>
           </a:xfrm>
           <a:prstGeom prst="rect">
             <a:avLst/>
@@ -7994,41 +7838,57 @@
           <a:p>
             <a:pPr>
               <a:spcAft>
+                <a:spcPts val="2200"/>
+              </a:spcAft>
+              <a:defRPr sz="2200" b="1">
+                <a:solidFill>
+                  <a:srgbClr val="0B6B62"/>
+                </a:solidFill>
+                <a:latin typeface="Calibri"/>
+              </a:defRPr>
+            </a:pPr>
+            <a:r>
+              <a:t>Key:   (src_id, boot_id, seq)</a:t>
+            </a:r>
+          </a:p>
+          <a:p>
+            <a:pPr>
+              <a:spcAft>
+                <a:spcPts val="1800"/>
+              </a:spcAft>
+              <a:defRPr sz="1800" b="0">
+                <a:solidFill>
+                  <a:srgbClr val="1A1A1A"/>
+                </a:solidFill>
+                <a:latin typeface="Calibri"/>
+              </a:defRPr>
+            </a:pPr>
+            <a:r>
+              <a:t>Strict last-sequence-wins. Anything not newer than the highest already accepted in this session is a duplicate.</a:t>
+            </a:r>
+          </a:p>
+          <a:p>
+            <a:pPr>
+              <a:spcAft>
                 <a:spcPts val="1000"/>
               </a:spcAft>
               <a:defRPr sz="1900" b="1">
                 <a:solidFill>
-                  <a:srgbClr val="0B6B62"/>
-                </a:solidFill>
-                <a:latin typeface="Calibri"/>
-              </a:defRPr>
-            </a:pPr>
-            <a:r>
-              <a:t>Defended</a:t>
-            </a:r>
-          </a:p>
-          <a:p>
-            <a:pPr>
-              <a:spcAft>
-                <a:spcPts val="900"/>
-              </a:spcAft>
-              <a:defRPr sz="1600" b="0">
-                <a:solidFill>
                   <a:srgbClr val="1A1A1A"/>
                 </a:solidFill>
                 <a:latin typeface="Calibri"/>
               </a:defRPr>
             </a:pPr>
             <a:r>
-              <a:t>+   Length, version, type, addressing, range validation</a:t>
-            </a:r>
-          </a:p>
-          <a:p>
-            <a:pPr>
-              <a:spcAft>
-                <a:spcPts val="900"/>
-              </a:spcAft>
-              <a:defRPr sz="1600" b="0">
+              <a:t>boot_id is randomised every power-up.</a:t>
+            </a:r>
+          </a:p>
+          <a:p>
+            <a:pPr>
+              <a:spcAft>
+                <a:spcPts val="1800"/>
+              </a:spcAft>
+              <a:defRPr sz="1700" b="0">
                 <a:solidFill>
                   <a:srgbClr val="1A1A1A"/>
                 </a:solidFill>
@@ -8036,181 +7896,7 @@
               </a:defRPr>
             </a:pPr>
             <a:r>
-              <a:t>+   Replay rejection via sequence numbers</a:t>
-            </a:r>
-          </a:p>
-          <a:p>
-            <a:pPr>
-              <a:spcAft>
-                <a:spcPts val="900"/>
-              </a:spcAft>
-              <a:defRPr sz="1600" b="0">
-                <a:solidFill>
-                  <a:srgbClr val="1A1A1A"/>
-                </a:solidFill>
-                <a:latin typeface="Calibri"/>
-              </a:defRPr>
-            </a:pPr>
-            <a:r>
-              <a:t>+   ESP-NOW encryption + sender auth - PMK + per-peer LMK</a:t>
-            </a:r>
-          </a:p>
-          <a:p>
-            <a:pPr>
-              <a:spcAft>
-                <a:spcPts val="900"/>
-              </a:spcAft>
-              <a:defRPr sz="1600" b="0">
-                <a:solidFill>
-                  <a:srgbClr val="1A1A1A"/>
-                </a:solidFill>
-                <a:latin typeface="Calibri"/>
-              </a:defRPr>
-            </a:pPr>
-            <a:r>
-              <a:t>+   Sender MAC filtering (defence in depth)</a:t>
-            </a:r>
-          </a:p>
-          <a:p>
-            <a:pPr>
-              <a:spcAft>
-                <a:spcPts val="900"/>
-              </a:spcAft>
-              <a:defRPr sz="1600" b="0">
-                <a:solidFill>
-                  <a:srgbClr val="1A1A1A"/>
-                </a:solidFill>
-                <a:latin typeface="Calibri"/>
-              </a:defRPr>
-            </a:pPr>
-            <a:r>
-              <a:t>+   Credentials excluded from version control</a:t>
-            </a:r>
-          </a:p>
-        </p:txBody>
-      </p:sp>
-      <p:sp>
-        <p:nvSpPr>
-          <p:cNvPr id="5" name="TextBox 4"/>
-          <p:cNvSpPr txBox="1"/>
-          <p:nvPr/>
-        </p:nvSpPr>
-        <p:spPr>
-          <a:xfrm>
-            <a:off x="6492240" y="1783080"/>
-            <a:ext cx="5029200" cy="4526280"/>
-          </a:xfrm>
-          <a:prstGeom prst="rect">
-            <a:avLst/>
-          </a:prstGeom>
-          <a:noFill/>
-        </p:spPr>
-        <p:txBody>
-          <a:bodyPr wrap="square">
-            <a:spAutoFit/>
-          </a:bodyPr>
-          <a:lstStyle/>
-          <a:p>
-            <a:pPr>
-              <a:spcAft>
-                <a:spcPts val="1000"/>
-              </a:spcAft>
-              <a:defRPr sz="1900" b="1">
-                <a:solidFill>
-                  <a:srgbClr val="A83A1F"/>
-                </a:solidFill>
-                <a:latin typeface="Calibri"/>
-              </a:defRPr>
-            </a:pPr>
-            <a:r>
-              <a:t>Not defended</a:t>
-            </a:r>
-          </a:p>
-          <a:p>
-            <a:pPr>
-              <a:spcAft>
-                <a:spcPts val="900"/>
-              </a:spcAft>
-              <a:defRPr sz="1600" b="0">
-                <a:solidFill>
-                  <a:srgbClr val="1A1A1A"/>
-                </a:solidFill>
-                <a:latin typeface="Calibri"/>
-              </a:defRPr>
-            </a:pPr>
-            <a:r>
-              <a:t>-   MQTT without TLS - token in clear text</a:t>
-            </a:r>
-          </a:p>
-          <a:p>
-            <a:pPr>
-              <a:spcAft>
-                <a:spcPts val="900"/>
-              </a:spcAft>
-              <a:defRPr sz="1600" b="0">
-                <a:solidFill>
-                  <a:srgbClr val="1A1A1A"/>
-                </a:solidFill>
-                <a:latin typeface="Calibri"/>
-              </a:defRPr>
-            </a:pPr>
-            <a:r>
-              <a:t>-   RADIUS certificate not validated</a:t>
-            </a:r>
-          </a:p>
-          <a:p>
-            <a:pPr>
-              <a:spcAft>
-                <a:spcPts val="900"/>
-              </a:spcAft>
-              <a:defRPr sz="1600" b="0">
-                <a:solidFill>
-                  <a:srgbClr val="1A1A1A"/>
-                </a:solidFill>
-                <a:latin typeface="Calibri"/>
-              </a:defRPr>
-            </a:pPr>
-            <a:r>
-              <a:t>-   Credentials readable from flash over USB</a:t>
-            </a:r>
-          </a:p>
-        </p:txBody>
-      </p:sp>
-      <p:sp>
-        <p:nvSpPr>
-          <p:cNvPr id="6" name="TextBox 5"/>
-          <p:cNvSpPr txBox="1"/>
-          <p:nvPr/>
-        </p:nvSpPr>
-        <p:spPr>
-          <a:xfrm>
-            <a:off x="640080" y="4892040"/>
-            <a:ext cx="10911535" cy="1463040"/>
-          </a:xfrm>
-          <a:prstGeom prst="rect">
-            <a:avLst/>
-          </a:prstGeom>
-          <a:noFill/>
-        </p:spPr>
-        <p:txBody>
-          <a:bodyPr wrap="square">
-            <a:spAutoFit/>
-          </a:bodyPr>
-          <a:lstStyle/>
-          <a:p>
-            <a:pPr>
-              <a:spcAft>
-                <a:spcPts val="800"/>
-              </a:spcAft>
-              <a:defRPr sz="1700" b="1">
-                <a:solidFill>
-                  <a:srgbClr val="A83A1F"/>
-                </a:solidFill>
-                <a:latin typeface="Calibri"/>
-              </a:defRPr>
-            </a:pPr>
-            <a:r>
-              <a:t>The interesting finding</a:t>
+              <a:t>Without it, a node restart looks identical to a replay: every packet arrives with a sequence below the stored baseline and is rejected forever. The node never comes back.</a:t>
             </a:r>
           </a:p>
           <a:p>
@@ -8218,15 +7904,15 @@
               <a:spcAft>
                 <a:spcPts val="0"/>
               </a:spcAft>
-              <a:defRPr sz="1500" b="0">
-                <a:solidFill>
-                  <a:srgbClr val="1A1A1A"/>
-                </a:solidFill>
-                <a:latin typeface="Calibri"/>
-              </a:defRPr>
-            </a:pPr>
-            <a:r>
-              <a:t>src_id is a claim, not proof. A forged packet with a high sequence number under the live boot_id advances the dedup baseline - after which every genuine packet is rejected until the node reboots. Replay protection becomes the attack surface. Fixed by encrypting the link: a MAC filter was not enough, because the attacker controls the value being filtered on.</a:t>
+              <a:defRPr sz="1700" b="0">
+                <a:solidFill>
+                  <a:srgbClr val="606060"/>
+                </a:solidFill>
+                <a:latin typeface="Calibri"/>
+              </a:defRPr>
+            </a:pPr>
+            <a:r>
+              <a:t>A forward jump is a gap, not a duplicate - those packets were lost, not repeated. A receiver demanding contiguous sequences would deadlock on the first loss.</a:t>
             </a:r>
           </a:p>
         </p:txBody>
@@ -8239,7 +7925,7 @@
 </p:sld>
 </file>
 
-<file path=ppt/slides/slide9.xml><?xml version="1.0" encoding="utf-8"?>
+<file path=ppt/slides/slide8.xml><?xml version="1.0" encoding="utf-8"?>
 <p:sld xmlns:a="http://schemas.openxmlformats.org/drawingml/2006/main" xmlns:p="http://schemas.openxmlformats.org/presentationml/2006/main" xmlns:r="http://schemas.openxmlformats.org/officeDocument/2006/relationships">
   <p:cSld>
     <p:spTree>
@@ -8283,7 +7969,7 @@
               </a:defRPr>
             </a:pPr>
             <a:r>
-              <a:t>MEASURED</a:t>
+              <a:t>THREAT MODEL</a:t>
             </a:r>
           </a:p>
           <a:p>
@@ -8299,7 +7985,7 @@
               </a:defRPr>
             </a:pPr>
             <a:r>
-              <a:t>Results</a:t>
+              <a:t>Security</a:t>
             </a:r>
           </a:p>
         </p:txBody>
@@ -8356,6 +8042,384 @@
         </p:nvSpPr>
         <p:spPr>
           <a:xfrm>
+            <a:off x="640080" y="1783080"/>
+            <a:ext cx="5760720" cy="4526280"/>
+          </a:xfrm>
+          <a:prstGeom prst="rect">
+            <a:avLst/>
+          </a:prstGeom>
+          <a:noFill/>
+        </p:spPr>
+        <p:txBody>
+          <a:bodyPr wrap="square">
+            <a:spAutoFit/>
+          </a:bodyPr>
+          <a:lstStyle/>
+          <a:p>
+            <a:pPr>
+              <a:spcAft>
+                <a:spcPts val="1000"/>
+              </a:spcAft>
+              <a:defRPr sz="1900" b="1">
+                <a:solidFill>
+                  <a:srgbClr val="0B6B62"/>
+                </a:solidFill>
+                <a:latin typeface="Calibri"/>
+              </a:defRPr>
+            </a:pPr>
+            <a:r>
+              <a:t>Defended</a:t>
+            </a:r>
+          </a:p>
+          <a:p>
+            <a:pPr>
+              <a:spcAft>
+                <a:spcPts val="900"/>
+              </a:spcAft>
+              <a:defRPr sz="1600" b="0">
+                <a:solidFill>
+                  <a:srgbClr val="1A1A1A"/>
+                </a:solidFill>
+                <a:latin typeface="Calibri"/>
+              </a:defRPr>
+            </a:pPr>
+            <a:r>
+              <a:t>+   Length, version, type, addressing, range validation</a:t>
+            </a:r>
+          </a:p>
+          <a:p>
+            <a:pPr>
+              <a:spcAft>
+                <a:spcPts val="900"/>
+              </a:spcAft>
+              <a:defRPr sz="1600" b="0">
+                <a:solidFill>
+                  <a:srgbClr val="1A1A1A"/>
+                </a:solidFill>
+                <a:latin typeface="Calibri"/>
+              </a:defRPr>
+            </a:pPr>
+            <a:r>
+              <a:t>+   Replay rejection via sequence numbers</a:t>
+            </a:r>
+          </a:p>
+          <a:p>
+            <a:pPr>
+              <a:spcAft>
+                <a:spcPts val="900"/>
+              </a:spcAft>
+              <a:defRPr sz="1600" b="0">
+                <a:solidFill>
+                  <a:srgbClr val="1A1A1A"/>
+                </a:solidFill>
+                <a:latin typeface="Calibri"/>
+              </a:defRPr>
+            </a:pPr>
+            <a:r>
+              <a:t>+   ESP-NOW encryption + sender auth - PMK + per-peer LMK</a:t>
+            </a:r>
+          </a:p>
+          <a:p>
+            <a:pPr>
+              <a:spcAft>
+                <a:spcPts val="900"/>
+              </a:spcAft>
+              <a:defRPr sz="1600" b="0">
+                <a:solidFill>
+                  <a:srgbClr val="1A1A1A"/>
+                </a:solidFill>
+                <a:latin typeface="Calibri"/>
+              </a:defRPr>
+            </a:pPr>
+            <a:r>
+              <a:t>+   Sender MAC filtering (defence in depth)</a:t>
+            </a:r>
+          </a:p>
+          <a:p>
+            <a:pPr>
+              <a:spcAft>
+                <a:spcPts val="900"/>
+              </a:spcAft>
+              <a:defRPr sz="1600" b="0">
+                <a:solidFill>
+                  <a:srgbClr val="1A1A1A"/>
+                </a:solidFill>
+                <a:latin typeface="Calibri"/>
+              </a:defRPr>
+            </a:pPr>
+            <a:r>
+              <a:t>+   Credentials excluded from version control</a:t>
+            </a:r>
+          </a:p>
+        </p:txBody>
+      </p:sp>
+      <p:sp>
+        <p:nvSpPr>
+          <p:cNvPr id="5" name="TextBox 4"/>
+          <p:cNvSpPr txBox="1"/>
+          <p:nvPr/>
+        </p:nvSpPr>
+        <p:spPr>
+          <a:xfrm>
+            <a:off x="6492240" y="1783080"/>
+            <a:ext cx="5029200" cy="4526280"/>
+          </a:xfrm>
+          <a:prstGeom prst="rect">
+            <a:avLst/>
+          </a:prstGeom>
+          <a:noFill/>
+        </p:spPr>
+        <p:txBody>
+          <a:bodyPr wrap="square">
+            <a:spAutoFit/>
+          </a:bodyPr>
+          <a:lstStyle/>
+          <a:p>
+            <a:pPr>
+              <a:spcAft>
+                <a:spcPts val="1000"/>
+              </a:spcAft>
+              <a:defRPr sz="1900" b="1">
+                <a:solidFill>
+                  <a:srgbClr val="A83A1F"/>
+                </a:solidFill>
+                <a:latin typeface="Calibri"/>
+              </a:defRPr>
+            </a:pPr>
+            <a:r>
+              <a:t>Not defended</a:t>
+            </a:r>
+          </a:p>
+          <a:p>
+            <a:pPr>
+              <a:spcAft>
+                <a:spcPts val="900"/>
+              </a:spcAft>
+              <a:defRPr sz="1600" b="0">
+                <a:solidFill>
+                  <a:srgbClr val="1A1A1A"/>
+                </a:solidFill>
+                <a:latin typeface="Calibri"/>
+              </a:defRPr>
+            </a:pPr>
+            <a:r>
+              <a:t>-   MQTT without TLS - token in clear text</a:t>
+            </a:r>
+          </a:p>
+          <a:p>
+            <a:pPr>
+              <a:spcAft>
+                <a:spcPts val="900"/>
+              </a:spcAft>
+              <a:defRPr sz="1600" b="0">
+                <a:solidFill>
+                  <a:srgbClr val="1A1A1A"/>
+                </a:solidFill>
+                <a:latin typeface="Calibri"/>
+              </a:defRPr>
+            </a:pPr>
+            <a:r>
+              <a:t>-   RADIUS certificate not validated</a:t>
+            </a:r>
+          </a:p>
+          <a:p>
+            <a:pPr>
+              <a:spcAft>
+                <a:spcPts val="900"/>
+              </a:spcAft>
+              <a:defRPr sz="1600" b="0">
+                <a:solidFill>
+                  <a:srgbClr val="1A1A1A"/>
+                </a:solidFill>
+                <a:latin typeface="Calibri"/>
+              </a:defRPr>
+            </a:pPr>
+            <a:r>
+              <a:t>-   Credentials readable from flash over USB</a:t>
+            </a:r>
+          </a:p>
+        </p:txBody>
+      </p:sp>
+      <p:sp>
+        <p:nvSpPr>
+          <p:cNvPr id="6" name="TextBox 5"/>
+          <p:cNvSpPr txBox="1"/>
+          <p:nvPr/>
+        </p:nvSpPr>
+        <p:spPr>
+          <a:xfrm>
+            <a:off x="640080" y="4892040"/>
+            <a:ext cx="10911535" cy="1463040"/>
+          </a:xfrm>
+          <a:prstGeom prst="rect">
+            <a:avLst/>
+          </a:prstGeom>
+          <a:noFill/>
+        </p:spPr>
+        <p:txBody>
+          <a:bodyPr wrap="square">
+            <a:spAutoFit/>
+          </a:bodyPr>
+          <a:lstStyle/>
+          <a:p>
+            <a:pPr>
+              <a:spcAft>
+                <a:spcPts val="800"/>
+              </a:spcAft>
+              <a:defRPr sz="1700" b="1">
+                <a:solidFill>
+                  <a:srgbClr val="A83A1F"/>
+                </a:solidFill>
+                <a:latin typeface="Calibri"/>
+              </a:defRPr>
+            </a:pPr>
+            <a:r>
+              <a:t>The interesting finding</a:t>
+            </a:r>
+          </a:p>
+          <a:p>
+            <a:pPr>
+              <a:spcAft>
+                <a:spcPts val="0"/>
+              </a:spcAft>
+              <a:defRPr sz="1500" b="0">
+                <a:solidFill>
+                  <a:srgbClr val="1A1A1A"/>
+                </a:solidFill>
+                <a:latin typeface="Calibri"/>
+              </a:defRPr>
+            </a:pPr>
+            <a:r>
+              <a:t>src_id is a claim, not proof. A forged packet with a high sequence number under the live boot_id advances the dedup baseline - after which every genuine packet is rejected until the node reboots. Replay protection becomes the attack surface. Fixed by encrypting the link: a MAC filter was not enough, because the attacker controls the value being filtered on.</a:t>
+            </a:r>
+          </a:p>
+        </p:txBody>
+      </p:sp>
+    </p:spTree>
+  </p:cSld>
+  <p:clrMapOvr>
+    <a:masterClrMapping/>
+  </p:clrMapOvr>
+</p:sld>
+</file>
+
+<file path=ppt/slides/slide9.xml><?xml version="1.0" encoding="utf-8"?>
+<p:sld xmlns:a="http://schemas.openxmlformats.org/drawingml/2006/main" xmlns:p="http://schemas.openxmlformats.org/presentationml/2006/main" xmlns:r="http://schemas.openxmlformats.org/officeDocument/2006/relationships">
+  <p:cSld>
+    <p:spTree>
+      <p:nvGrpSpPr>
+        <p:cNvPr id="1" name=""/>
+        <p:cNvGrpSpPr/>
+        <p:nvPr/>
+      </p:nvGrpSpPr>
+      <p:grpSpPr/>
+      <p:sp>
+        <p:nvSpPr>
+          <p:cNvPr id="2" name="TextBox 1"/>
+          <p:cNvSpPr txBox="1"/>
+          <p:nvPr/>
+        </p:nvSpPr>
+        <p:spPr>
+          <a:xfrm>
+            <a:off x="640080" y="411480"/>
+            <a:ext cx="10911535" cy="1005840"/>
+          </a:xfrm>
+          <a:prstGeom prst="rect">
+            <a:avLst/>
+          </a:prstGeom>
+          <a:noFill/>
+        </p:spPr>
+        <p:txBody>
+          <a:bodyPr wrap="square">
+            <a:spAutoFit/>
+          </a:bodyPr>
+          <a:lstStyle/>
+          <a:p>
+            <a:pPr>
+              <a:spcAft>
+                <a:spcPts val="200"/>
+              </a:spcAft>
+              <a:defRPr sz="1200" b="1">
+                <a:solidFill>
+                  <a:srgbClr val="0B6B62"/>
+                </a:solidFill>
+                <a:latin typeface="Calibri"/>
+              </a:defRPr>
+            </a:pPr>
+            <a:r>
+              <a:t>MEASURED</a:t>
+            </a:r>
+          </a:p>
+          <a:p>
+            <a:pPr>
+              <a:spcAft>
+                <a:spcPts val="0"/>
+              </a:spcAft>
+              <a:defRPr sz="3200" b="1">
+                <a:solidFill>
+                  <a:srgbClr val="1A1A1A"/>
+                </a:solidFill>
+                <a:latin typeface="Calibri"/>
+              </a:defRPr>
+            </a:pPr>
+            <a:r>
+              <a:t>Results</a:t>
+            </a:r>
+          </a:p>
+        </p:txBody>
+      </p:sp>
+      <p:sp>
+        <p:nvSpPr>
+          <p:cNvPr id="3" name="Rectangle 2"/>
+          <p:cNvSpPr/>
+          <p:nvPr/>
+        </p:nvSpPr>
+        <p:spPr>
+          <a:xfrm>
+            <a:off x="640080" y="1481328"/>
+            <a:ext cx="10911535" cy="9525"/>
+          </a:xfrm>
+          <a:prstGeom prst="rect">
+            <a:avLst/>
+          </a:prstGeom>
+          <a:solidFill>
+            <a:srgbClr val="D8D8D8"/>
+          </a:solidFill>
+          <a:ln>
+            <a:noFill/>
+          </a:ln>
+          <a:effectLst/>
+        </p:spPr>
+        <p:style>
+          <a:lnRef idx="1">
+            <a:schemeClr val="accent1"/>
+          </a:lnRef>
+          <a:fillRef idx="3">
+            <a:schemeClr val="accent1"/>
+          </a:fillRef>
+          <a:effectRef idx="2">
+            <a:schemeClr val="accent1"/>
+          </a:effectRef>
+          <a:fontRef idx="minor">
+            <a:schemeClr val="lt1"/>
+          </a:fontRef>
+        </p:style>
+        <p:txBody>
+          <a:bodyPr rtlCol="0" anchor="ctr"/>
+          <a:lstStyle/>
+          <a:p>
+            <a:pPr algn="ctr"/>
+          </a:p>
+        </p:txBody>
+      </p:sp>
+      <p:sp>
+        <p:nvSpPr>
+          <p:cNvPr id="4" name="TextBox 3"/>
+          <p:cNvSpPr txBox="1"/>
+          <p:nvPr/>
+        </p:nvSpPr>
+        <p:spPr>
+          <a:xfrm>
             <a:off x="640080" y="1920240"/>
             <a:ext cx="10911535" cy="4389120"/>
           </a:xfrm>
@@ -8430,7 +8494,7 @@
               </a:defRPr>
             </a:pPr>
             <a:r>
-              <a:t>11 / 11        acceptance criteria evidenced</a:t>
+              <a:t>14 / 14        acceptance criteria evidenced</a:t>
             </a:r>
           </a:p>
           <a:p>

--- a/PRESENTATION.pptx
+++ b/PRESENTATION.pptx
@@ -4584,7 +4584,7 @@
         <p:spPr>
           <a:xfrm>
             <a:off x="914400" y="2103120"/>
-            <a:ext cx="10362895" cy="2743200"/>
+            <a:ext cx="9509760" cy="2743200"/>
           </a:xfrm>
           <a:prstGeom prst="rect">
             <a:avLst/>
@@ -4598,8 +4598,11 @@
           <a:lstStyle/>
           <a:p>
             <a:pPr>
-              <a:spcAft>
-                <a:spcPts val="1400"/>
+              <a:lnSpc>
+                <a:spcPct val="118000"/>
+              </a:lnSpc>
+              <a:spcAft>
+                <a:spcPts val="1100"/>
               </a:spcAft>
               <a:defRPr sz="1300" b="1">
                 <a:solidFill>
@@ -4614,8 +4617,11 @@
           </a:p>
           <a:p>
             <a:pPr>
-              <a:spcAft>
-                <a:spcPts val="400"/>
+              <a:lnSpc>
+                <a:spcPct val="118000"/>
+              </a:lnSpc>
+              <a:spcAft>
+                <a:spcPts val="1100"/>
               </a:spcAft>
               <a:defRPr sz="4000" b="1">
                 <a:solidFill>
@@ -4630,8 +4636,11 @@
           </a:p>
           <a:p>
             <a:pPr>
-              <a:spcAft>
-                <a:spcPts val="2200"/>
+              <a:lnSpc>
+                <a:spcPct val="118000"/>
+              </a:lnSpc>
+              <a:spcAft>
+                <a:spcPts val="1100"/>
               </a:spcAft>
               <a:defRPr sz="4000" b="1">
                 <a:solidFill>
@@ -4646,8 +4655,11 @@
           </a:p>
           <a:p>
             <a:pPr>
-              <a:spcAft>
-                <a:spcPts val="2600"/>
+              <a:lnSpc>
+                <a:spcPct val="118000"/>
+              </a:lnSpc>
+              <a:spcAft>
+                <a:spcPts val="1100"/>
               </a:spcAft>
               <a:defRPr sz="1700" b="0">
                 <a:solidFill>
@@ -4662,8 +4674,11 @@
           </a:p>
           <a:p>
             <a:pPr>
-              <a:spcAft>
-                <a:spcPts val="800"/>
+              <a:lnSpc>
+                <a:spcPct val="118000"/>
+              </a:lnSpc>
+              <a:spcAft>
+                <a:spcPts val="1100"/>
               </a:spcAft>
               <a:defRPr sz="1500" b="0">
                 <a:solidFill>
@@ -4730,7 +4745,7 @@
               </a:defRPr>
             </a:pPr>
             <a:r>
-              <a:t>CLOUD</a:t>
+              <a:t>MEASURED</a:t>
             </a:r>
           </a:p>
           <a:p>
@@ -4746,7 +4761,7 @@
               </a:defRPr>
             </a:pPr>
             <a:r>
-              <a:t>Edge aggregation, visualised</a:t>
+              <a:t>Results</a:t>
             </a:r>
           </a:p>
         </p:txBody>
@@ -4795,41 +4810,16 @@
           </a:p>
         </p:txBody>
       </p:sp>
-      <p:pic>
-        <p:nvPicPr>
-          <p:cNvPr id="4" name="Picture 3" descr="dashboard_01_temperature_both_boards.jpg"/>
-          <p:cNvPicPr>
-            <a:picLocks noChangeAspect="1"/>
-          </p:cNvPicPr>
+      <p:sp>
+        <p:nvSpPr>
+          <p:cNvPr id="4" name="TextBox 3"/>
+          <p:cNvSpPr txBox="1"/>
           <p:nvPr/>
-        </p:nvPicPr>
-        <p:blipFill>
-          <a:blip r:embed="rId3"/>
-          <a:srcRect b="7500"/>
-          <a:stretch>
-            <a:fillRect/>
-          </a:stretch>
-        </p:blipFill>
+        </p:nvSpPr>
         <p:spPr>
           <a:xfrm>
-            <a:off x="1691640" y="1755648"/>
-            <a:ext cx="8778240" cy="4736592"/>
-          </a:xfrm>
-          <a:prstGeom prst="rect">
-            <a:avLst/>
-          </a:prstGeom>
-        </p:spPr>
-      </p:pic>
-      <p:sp>
-        <p:nvSpPr>
-          <p:cNvPr id="5" name="TextBox 4"/>
-          <p:cNvSpPr txBox="1"/>
-          <p:nvPr/>
-        </p:nvSpPr>
-        <p:spPr>
-          <a:xfrm>
-            <a:off x="640080" y="6035040"/>
-            <a:ext cx="10911535" cy="640080"/>
+            <a:off x="640080" y="1920240"/>
+            <a:ext cx="9509760" cy="4389120"/>
           </a:xfrm>
           <a:prstGeom prst="rect">
             <a:avLst/>
@@ -4842,11 +4832,90 @@
           </a:bodyPr>
           <a:lstStyle/>
           <a:p>
-            <a:pPr algn="ctr">
-              <a:spcAft>
-                <a:spcPts val="800"/>
-              </a:spcAft>
-              <a:defRPr sz="1400" b="0">
+            <a:pPr>
+              <a:lnSpc>
+                <a:spcPct val="118000"/>
+              </a:lnSpc>
+              <a:spcAft>
+                <a:spcPts val="1100"/>
+              </a:spcAft>
+              <a:defRPr sz="2000" b="1">
+                <a:solidFill>
+                  <a:srgbClr val="1A1A1A"/>
+                </a:solidFill>
+                <a:latin typeface="Calibri"/>
+              </a:defRPr>
+            </a:pPr>
+            <a:r>
+              <a:t>634        packets received and validated</a:t>
+            </a:r>
+          </a:p>
+          <a:p>
+            <a:pPr>
+              <a:lnSpc>
+                <a:spcPct val="118000"/>
+              </a:lnSpc>
+              <a:spcAft>
+                <a:spcPts val="1100"/>
+              </a:spcAft>
+              <a:defRPr sz="2000" b="1">
+                <a:solidFill>
+                  <a:srgbClr val="1A1A1A"/>
+                </a:solidFill>
+                <a:latin typeface="Calibri"/>
+              </a:defRPr>
+            </a:pPr>
+            <a:r>
+              <a:t>82        duplicates rejected</a:t>
+            </a:r>
+          </a:p>
+          <a:p>
+            <a:pPr>
+              <a:lnSpc>
+                <a:spcPct val="118000"/>
+              </a:lnSpc>
+              <a:spcAft>
+                <a:spcPts val="1100"/>
+              </a:spcAft>
+              <a:defRPr sz="2000" b="1">
+                <a:solidFill>
+                  <a:srgbClr val="1A1A1A"/>
+                </a:solidFill>
+                <a:latin typeface="Calibri"/>
+              </a:defRPr>
+            </a:pPr>
+            <a:r>
+              <a:t>0        invalid packets - both boards agree on the 26-byte layout</a:t>
+            </a:r>
+          </a:p>
+          <a:p>
+            <a:pPr>
+              <a:lnSpc>
+                <a:spcPct val="118000"/>
+              </a:lnSpc>
+              <a:spcAft>
+                <a:spcPts val="1100"/>
+              </a:spcAft>
+              <a:defRPr sz="2000" b="1">
+                <a:solidFill>
+                  <a:srgbClr val="1A1A1A"/>
+                </a:solidFill>
+                <a:latin typeface="Calibri"/>
+              </a:defRPr>
+            </a:pPr>
+            <a:r>
+              <a:t>14 / 14        acceptance criteria evidenced</a:t>
+            </a:r>
+          </a:p>
+          <a:p>
+            <a:pPr>
+              <a:lnSpc>
+                <a:spcPct val="118000"/>
+              </a:lnSpc>
+              <a:spcAft>
+                <a:spcPts val="1100"/>
+              </a:spcAft>
+              <a:defRPr sz="1600" b="0">
                 <a:solidFill>
                   <a:srgbClr val="606060"/>
                 </a:solidFill>
@@ -4854,7 +4923,7 @@
               </a:defRPr>
             </a:pPr>
             <a:r>
-              <a:t>Blue: gateway local sensor.    Green: remote node, via ESP-NOW.    Stepped traces are DHT11 quantisation, not a frozen sensor.</a:t>
+              <a:t>Node offline detection latches at 20 s; last known value keeps publishing while node1_online carries the truth about freshness.</a:t>
             </a:r>
           </a:p>
         </p:txBody>
@@ -4911,7 +4980,7 @@
               </a:defRPr>
             </a:pPr>
             <a:r>
-              <a:t>BOTH DIRECTIONS</a:t>
+              <a:t>CLOUD</a:t>
             </a:r>
           </a:p>
           <a:p>
@@ -4927,7 +4996,7 @@
               </a:defRPr>
             </a:pPr>
             <a:r>
-              <a:t>Control and resilience</a:t>
+              <a:t>Edge aggregation, visualised</a:t>
             </a:r>
           </a:p>
         </p:txBody>
@@ -4974,30 +5043,43 @@
           <a:p>
             <a:pPr algn="ctr"/>
           </a:p>
-          <a:p>
-            <a:pPr algn="ctr"/>
-          </a:p>
-          <a:p>
-            <a:pPr algn="ctr"/>
-          </a:p>
-          <a:p>
-            <a:pPr algn="ctr"/>
-          </a:p>
-          <a:p>
-            <a:pPr algn="ctr"/>
-          </a:p>
-        </p:txBody>
-      </p:sp>
-      <p:sp>
-        <p:nvSpPr>
-          <p:cNvPr id="4" name="TextBox 3"/>
+        </p:txBody>
+      </p:sp>
+      <p:pic>
+        <p:nvPicPr>
+          <p:cNvPr id="4" name="Picture 3" descr="dashboard_01_temperature_both_boards.jpg"/>
+          <p:cNvPicPr>
+            <a:picLocks noChangeAspect="1"/>
+          </p:cNvPicPr>
+          <p:nvPr/>
+        </p:nvPicPr>
+        <p:blipFill>
+          <a:blip r:embed="rId3"/>
+          <a:srcRect b="7500"/>
+          <a:stretch>
+            <a:fillRect/>
+          </a:stretch>
+        </p:blipFill>
+        <p:spPr>
+          <a:xfrm>
+            <a:off x="1662989" y="1755648"/>
+            <a:ext cx="8862972" cy="4782312"/>
+          </a:xfrm>
+          <a:prstGeom prst="rect">
+            <a:avLst/>
+          </a:prstGeom>
+        </p:spPr>
+      </p:pic>
+      <p:sp>
+        <p:nvSpPr>
+          <p:cNvPr id="5" name="TextBox 4"/>
           <p:cNvSpPr txBox="1"/>
           <p:nvPr/>
         </p:nvSpPr>
         <p:spPr>
           <a:xfrm>
-            <a:off x="640080" y="1828800"/>
-            <a:ext cx="10911535" cy="4480560"/>
+            <a:off x="640080" y="6035040"/>
+            <a:ext cx="10911535" cy="640080"/>
           </a:xfrm>
           <a:prstGeom prst="rect">
             <a:avLst/>
@@ -5010,75 +5092,14 @@
           </a:bodyPr>
           <a:lstStyle/>
           <a:p>
-            <a:pPr>
-              <a:spcAft>
-                <a:spcPts val="2200"/>
-              </a:spcAft>
-              <a:defRPr sz="2200" b="1">
-                <a:solidFill>
-                  <a:srgbClr val="0B6B62"/>
-                </a:solidFill>
-                <a:latin typeface="Calibri"/>
-              </a:defRPr>
-            </a:pPr>
-            <a:r>
-              <a:t>Telemetry alone makes a device observable. It does not make it manageable.</a:t>
-            </a:r>
-          </a:p>
-          <a:p>
-            <a:pPr>
-              <a:spcAft>
-                <a:spcPts val="1800"/>
-              </a:spcAft>
-              <a:defRPr sz="1800" b="0">
-                <a:solidFill>
-                  <a:srgbClr val="1A1A1A"/>
-                </a:solidFill>
-                <a:latin typeface="Calibri"/>
-              </a:defRPr>
-            </a:pPr>
-            <a:r>
-              <a:t>The gateway subscribes to v1/devices/me/rpc/request/+ and replies on the matching response topic. Three methods: getStatus, setPublishInterval, resetCounters.</a:t>
-            </a:r>
-          </a:p>
-          <a:p>
-            <a:pPr>
-              <a:spcAft>
-                <a:spcPts val="1000"/>
-              </a:spcAft>
-              <a:defRPr sz="1900" b="1">
-                <a:solidFill>
-                  <a:srgbClr val="1A1A1A"/>
-                </a:solidFill>
-                <a:latin typeface="Calibri"/>
-              </a:defRPr>
-            </a:pPr>
-            <a:r>
-              <a:t>Verified end to end - a dashboard button produced the request in the gateway log, the applied change, and the new interval back in the next telemetry message. The round trip, not just the request.</a:t>
-            </a:r>
-          </a:p>
-          <a:p>
-            <a:pPr>
-              <a:spcAft>
-                <a:spcPts val="1800"/>
-              </a:spcAft>
-              <a:defRPr sz="1700" b="0">
-                <a:solidFill>
-                  <a:srgbClr val="1A1A1A"/>
-                </a:solidFill>
-                <a:latin typeface="Calibri"/>
-              </a:defRPr>
-            </a:pPr>
-            <a:r>
-              <a:t>setPublishInterval range-checks and rejects rather than clamping. Silently applying a value the operator did not ask for would leave them believing something untrue about the device.</a:t>
-            </a:r>
-          </a:p>
-          <a:p>
-            <a:pPr>
-              <a:spcAft>
-                <a:spcPts val="0"/>
-              </a:spcAft>
-              <a:defRPr sz="1700" b="0">
+            <a:pPr algn="ctr">
+              <a:lnSpc>
+                <a:spcPct val="118000"/>
+              </a:lnSpc>
+              <a:spcAft>
+                <a:spcPts val="1100"/>
+              </a:spcAft>
+              <a:defRPr sz="1400" b="0">
                 <a:solidFill>
                   <a:srgbClr val="606060"/>
                 </a:solidFill>
@@ -5086,7 +5107,7 @@
               </a:defRPr>
             </a:pPr>
             <a:r>
-              <a:t>Unsent payloads go to a twelve-slot ring buffer and flush oldest-first on reconnect. Measured: 4 buffered, 4 flushed, 0 dropped.</a:t>
+              <a:t>Blue: gateway local sensor.    Green: remote node, via ESP-NOW.    Stepped traces are DHT11 quantisation, not a frozen sensor.</a:t>
             </a:r>
           </a:p>
         </p:txBody>
@@ -5143,7 +5164,7 @@
               </a:defRPr>
             </a:pPr>
             <a:r>
-              <a:t>SWITCH TO HARDWARE</a:t>
+              <a:t>BOTH DIRECTIONS</a:t>
             </a:r>
           </a:p>
           <a:p>
@@ -5159,7 +5180,7 @@
               </a:defRPr>
             </a:pPr>
             <a:r>
-              <a:t>Live demonstration</a:t>
+              <a:t>Control and resilience</a:t>
             </a:r>
           </a:p>
         </p:txBody>
@@ -5206,6 +5227,18 @@
           <a:p>
             <a:pPr algn="ctr"/>
           </a:p>
+          <a:p>
+            <a:pPr algn="ctr"/>
+          </a:p>
+          <a:p>
+            <a:pPr algn="ctr"/>
+          </a:p>
+          <a:p>
+            <a:pPr algn="ctr"/>
+          </a:p>
+          <a:p>
+            <a:pPr algn="ctr"/>
+          </a:p>
         </p:txBody>
       </p:sp>
       <p:sp>
@@ -5217,7 +5250,7 @@
         <p:spPr>
           <a:xfrm>
             <a:off x="640080" y="1828800"/>
-            <a:ext cx="10911535" cy="4480560"/>
+            <a:ext cx="9509760" cy="4480560"/>
           </a:xfrm>
           <a:prstGeom prst="rect">
             <a:avLst/>
@@ -5231,10 +5264,32 @@
           <a:lstStyle/>
           <a:p>
             <a:pPr>
-              <a:spcAft>
-                <a:spcPts val="1600"/>
-              </a:spcAft>
-              <a:defRPr sz="1900" b="0">
+              <a:lnSpc>
+                <a:spcPct val="118000"/>
+              </a:lnSpc>
+              <a:spcAft>
+                <a:spcPts val="1100"/>
+              </a:spcAft>
+              <a:defRPr sz="2200" b="1">
+                <a:solidFill>
+                  <a:srgbClr val="0B6B62"/>
+                </a:solidFill>
+                <a:latin typeface="Calibri"/>
+              </a:defRPr>
+            </a:pPr>
+            <a:r>
+              <a:t>Telemetry alone makes a device observable. It does not make it manageable.</a:t>
+            </a:r>
+          </a:p>
+          <a:p>
+            <a:pPr>
+              <a:lnSpc>
+                <a:spcPct val="118000"/>
+              </a:lnSpc>
+              <a:spcAft>
+                <a:spcPts val="1100"/>
+              </a:spcAft>
+              <a:defRPr sz="1800" b="0">
                 <a:solidFill>
                   <a:srgbClr val="1A1A1A"/>
                 </a:solidFill>
@@ -5242,15 +5297,18 @@
               </a:defRPr>
             </a:pPr>
             <a:r>
-              <a:t>1.   Board 1 serial:  no Wi-Fi association, and a real link-layer ack</a:t>
-            </a:r>
-          </a:p>
-          <a:p>
-            <a:pPr>
-              <a:spcAft>
-                <a:spcPts val="1600"/>
-              </a:spcAft>
-              <a:defRPr sz="1900" b="0">
+              <a:t>The gateway subscribes to v1/devices/me/rpc/request/+ and replies on the matching response topic. Three methods: getStatus, setPublishInterval, resetCounters.</a:t>
+            </a:r>
+          </a:p>
+          <a:p>
+            <a:pPr>
+              <a:lnSpc>
+                <a:spcPct val="118000"/>
+              </a:lnSpc>
+              <a:spcAft>
+                <a:spcPts val="1100"/>
+              </a:spcAft>
+              <a:defRPr sz="1900" b="1">
                 <a:solidFill>
                   <a:srgbClr val="1A1A1A"/>
                 </a:solidFill>
@@ -5258,15 +5316,18 @@
               </a:defRPr>
             </a:pPr>
             <a:r>
-              <a:t>2.   Board 2 serial:  the same packet arriving, validated, deduplicated</a:t>
-            </a:r>
-          </a:p>
-          <a:p>
-            <a:pPr>
-              <a:spcAft>
-                <a:spcPts val="1600"/>
-              </a:spcAft>
-              <a:defRPr sz="1900" b="0">
+              <a:t>Verified end to end - a dashboard button produced the request in the gateway log, the applied change, and the new interval back in the next telemetry message. The round trip, not just the request.</a:t>
+            </a:r>
+          </a:p>
+          <a:p>
+            <a:pPr>
+              <a:lnSpc>
+                <a:spcPct val="118000"/>
+              </a:lnSpc>
+              <a:spcAft>
+                <a:spcPts val="1100"/>
+              </a:spcAft>
+              <a:defRPr sz="1700" b="0">
                 <a:solidFill>
                   <a:srgbClr val="1A1A1A"/>
                 </a:solidFill>
@@ -5274,47 +5335,18 @@
               </a:defRPr>
             </a:pPr>
             <a:r>
-              <a:t>3.   ThingsBoard:  the same numbers, in the cloud</a:t>
-            </a:r>
-          </a:p>
-          <a:p>
-            <a:pPr>
-              <a:spcAft>
-                <a:spcPts val="1600"/>
-              </a:spcAft>
-              <a:defRPr sz="1900" b="1">
-                <a:solidFill>
-                  <a:srgbClr val="0B6B62"/>
-                </a:solidFill>
-                <a:latin typeface="Calibri"/>
-              </a:defRPr>
-            </a:pPr>
-            <a:r>
-              <a:t>4.   Warm the sensor by hand and watch the chart move</a:t>
-            </a:r>
-          </a:p>
-          <a:p>
-            <a:pPr>
-              <a:spcAft>
-                <a:spcPts val="2400"/>
-              </a:spcAft>
-              <a:defRPr sz="1900" b="0">
-                <a:solidFill>
-                  <a:srgbClr val="1A1A1A"/>
-                </a:solidFill>
-                <a:latin typeface="Calibri"/>
-              </a:defRPr>
-            </a:pPr>
-            <a:r>
-              <a:t>5.   Unplug Board 1:  node1_online goes false after 20 s</a:t>
-            </a:r>
-          </a:p>
-          <a:p>
-            <a:pPr>
-              <a:spcAft>
-                <a:spcPts val="0"/>
-              </a:spcAft>
-              <a:defRPr sz="1600" b="0">
+              <a:t>setPublishInterval range-checks and rejects rather than clamping. Silently applying a value the operator did not ask for would leave them believing something untrue about the device.</a:t>
+            </a:r>
+          </a:p>
+          <a:p>
+            <a:pPr>
+              <a:lnSpc>
+                <a:spcPct val="118000"/>
+              </a:lnSpc>
+              <a:spcAft>
+                <a:spcPts val="1100"/>
+              </a:spcAft>
+              <a:defRPr sz="1700" b="0">
                 <a:solidFill>
                   <a:srgbClr val="606060"/>
                 </a:solidFill>
@@ -5322,7 +5354,7 @@
               </a:defRPr>
             </a:pPr>
             <a:r>
-              <a:t>Roughly 21 C to 28 C in fifteen seconds - it proves the whole chain, sensor to cloud, in one gesture.</a:t>
+              <a:t>Unsent payloads go to a twelve-slot ring buffer and flush oldest-first on reconnect. Measured: 4 buffered, 4 flushed, 0 dropped.</a:t>
             </a:r>
           </a:p>
         </p:txBody>
@@ -5379,7 +5411,7 @@
               </a:defRPr>
             </a:pPr>
             <a:r>
-              <a:t>HARDWARE SUBSTITUTION</a:t>
+              <a:t>SWITCH TO HARDWARE</a:t>
             </a:r>
           </a:p>
           <a:p>
@@ -5395,7 +5427,7 @@
               </a:defRPr>
             </a:pPr>
             <a:r>
-              <a:t>DHT11 instead of BMP280</a:t>
+              <a:t>Live demonstration</a:t>
             </a:r>
           </a:p>
         </p:txBody>
@@ -5453,7 +5485,7 @@
         <p:spPr>
           <a:xfrm>
             <a:off x="640080" y="1828800"/>
-            <a:ext cx="10911535" cy="4480560"/>
+            <a:ext cx="9509760" cy="4480560"/>
           </a:xfrm>
           <a:prstGeom prst="rect">
             <a:avLst/>
@@ -5467,10 +5499,13 @@
           <a:lstStyle/>
           <a:p>
             <a:pPr>
-              <a:spcAft>
-                <a:spcPts val="2200"/>
-              </a:spcAft>
-              <a:defRPr sz="2000" b="0">
+              <a:lnSpc>
+                <a:spcPct val="118000"/>
+              </a:lnSpc>
+              <a:spcAft>
+                <a:spcPts val="1100"/>
+              </a:spcAft>
+              <a:defRPr sz="1900" b="0">
                 <a:solidFill>
                   <a:srgbClr val="1A1A1A"/>
                 </a:solidFill>
@@ -5478,31 +5513,18 @@
               </a:defRPr>
             </a:pPr>
             <a:r>
-              <a:t>The brief specified BMP280. The available hardware was DHT11.</a:t>
-            </a:r>
-          </a:p>
-          <a:p>
-            <a:pPr>
-              <a:spcAft>
-                <a:spcPts val="800"/>
-              </a:spcAft>
-              <a:defRPr sz="1800" b="1">
-                <a:solidFill>
-                  <a:srgbClr val="A83A1F"/>
-                </a:solidFill>
-                <a:latin typeface="Calibri"/>
-              </a:defRPr>
-            </a:pPr>
-            <a:r>
-              <a:t>Lost</a:t>
-            </a:r>
-          </a:p>
-          <a:p>
-            <a:pPr>
-              <a:spcAft>
-                <a:spcPts val="800"/>
-              </a:spcAft>
-              <a:defRPr sz="1700" b="0">
+              <a:t>1.   Board 1 serial:  no Wi-Fi association, and a real link-layer ack</a:t>
+            </a:r>
+          </a:p>
+          <a:p>
+            <a:pPr>
+              <a:lnSpc>
+                <a:spcPct val="118000"/>
+              </a:lnSpc>
+              <a:spcAft>
+                <a:spcPts val="1100"/>
+              </a:spcAft>
+              <a:defRPr sz="1900" b="0">
                 <a:solidFill>
                   <a:srgbClr val="1A1A1A"/>
                 </a:solidFill>
@@ -5510,15 +5532,18 @@
               </a:defRPr>
             </a:pPr>
             <a:r>
-              <a:t>-   No I2C experience - DHT11 is single-wire bit-banged</a:t>
-            </a:r>
-          </a:p>
-          <a:p>
-            <a:pPr>
-              <a:spcAft>
-                <a:spcPts val="1800"/>
-              </a:spcAft>
-              <a:defRPr sz="1700" b="0">
+              <a:t>2.   Board 2 serial:  the same packet arriving, validated, deduplicated</a:t>
+            </a:r>
+          </a:p>
+          <a:p>
+            <a:pPr>
+              <a:lnSpc>
+                <a:spcPct val="118000"/>
+              </a:lnSpc>
+              <a:spcAft>
+                <a:spcPts val="1100"/>
+              </a:spcAft>
+              <a:defRPr sz="1900" b="0">
                 <a:solidFill>
                   <a:srgbClr val="1A1A1A"/>
                 </a:solidFill>
@@ -5526,15 +5551,18 @@
               </a:defRPr>
             </a:pPr>
             <a:r>
-              <a:t>-   Lower resolution, hence the stepped chart traces</a:t>
-            </a:r>
-          </a:p>
-          <a:p>
-            <a:pPr>
-              <a:spcAft>
-                <a:spcPts val="800"/>
-              </a:spcAft>
-              <a:defRPr sz="1800" b="1">
+              <a:t>3.   ThingsBoard:  the same numbers, in the cloud</a:t>
+            </a:r>
+          </a:p>
+          <a:p>
+            <a:pPr>
+              <a:lnSpc>
+                <a:spcPct val="118000"/>
+              </a:lnSpc>
+              <a:spcAft>
+                <a:spcPts val="1100"/>
+              </a:spcAft>
+              <a:defRPr sz="1900" b="1">
                 <a:solidFill>
                   <a:srgbClr val="0B6B62"/>
                 </a:solidFill>
@@ -5542,15 +5570,18 @@
               </a:defRPr>
             </a:pPr>
             <a:r>
-              <a:t>Gained</a:t>
-            </a:r>
-          </a:p>
-          <a:p>
-            <a:pPr>
-              <a:spcAft>
-                <a:spcPts val="800"/>
-              </a:spcAft>
-              <a:defRPr sz="1700" b="0">
+              <a:t>4.   Warm the sensor by hand and watch the chart move</a:t>
+            </a:r>
+          </a:p>
+          <a:p>
+            <a:pPr>
+              <a:lnSpc>
+                <a:spcPct val="118000"/>
+              </a:lnSpc>
+              <a:spcAft>
+                <a:spcPts val="1100"/>
+              </a:spcAft>
+              <a:defRPr sz="1900" b="0">
                 <a:solidFill>
                   <a:srgbClr val="1A1A1A"/>
                 </a:solidFill>
@@ -5558,23 +5589,26 @@
               </a:defRPr>
             </a:pPr>
             <a:r>
-              <a:t>-   Humidity responds to a hand in seconds; indoor pressure would be flat for hours</a:t>
-            </a:r>
-          </a:p>
-          <a:p>
-            <a:pPr>
-              <a:spcAft>
-                <a:spcPts val="0"/>
-              </a:spcAft>
-              <a:defRPr sz="1700" b="0">
-                <a:solidFill>
-                  <a:srgbClr val="1A1A1A"/>
-                </a:solidFill>
-                <a:latin typeface="Calibri"/>
-              </a:defRPr>
-            </a:pPr>
-            <a:r>
-              <a:t>-   Everything above the sensing layer is unchanged - the packet carries two floats and does not care what they represent</a:t>
+              <a:t>5.   Unplug Board 1:  node1_online goes false after 20 s</a:t>
+            </a:r>
+          </a:p>
+          <a:p>
+            <a:pPr>
+              <a:lnSpc>
+                <a:spcPct val="118000"/>
+              </a:lnSpc>
+              <a:spcAft>
+                <a:spcPts val="1100"/>
+              </a:spcAft>
+              <a:defRPr sz="1600" b="0">
+                <a:solidFill>
+                  <a:srgbClr val="606060"/>
+                </a:solidFill>
+                <a:latin typeface="Calibri"/>
+              </a:defRPr>
+            </a:pPr>
+            <a:r>
+              <a:t>Roughly 21 C to 28 C in fifteen seconds - it proves the whole chain, sensor to cloud, in one gesture.</a:t>
             </a:r>
           </a:p>
         </p:txBody>
@@ -5631,7 +5665,7 @@
               </a:defRPr>
             </a:pPr>
             <a:r>
-              <a:t>HONESTLY</a:t>
+              <a:t>HARDWARE SUBSTITUTION</a:t>
             </a:r>
           </a:p>
           <a:p>
@@ -5647,7 +5681,7 @@
               </a:defRPr>
             </a:pPr>
             <a:r>
-              <a:t>Limitations</a:t>
+              <a:t>DHT11 instead of BMP280</a:t>
             </a:r>
           </a:p>
         </p:txBody>
@@ -5705,7 +5739,7 @@
         <p:spPr>
           <a:xfrm>
             <a:off x="640080" y="1828800"/>
-            <a:ext cx="10911535" cy="4480560"/>
+            <a:ext cx="9509760" cy="4480560"/>
           </a:xfrm>
           <a:prstGeom prst="rect">
             <a:avLst/>
@@ -5719,10 +5753,13 @@
           <a:lstStyle/>
           <a:p>
             <a:pPr>
-              <a:spcAft>
-                <a:spcPts val="1500"/>
-              </a:spcAft>
-              <a:defRPr sz="1800" b="0">
+              <a:lnSpc>
+                <a:spcPct val="118000"/>
+              </a:lnSpc>
+              <a:spcAft>
+                <a:spcPts val="1100"/>
+              </a:spcAft>
+              <a:defRPr sz="2000" b="0">
                 <a:solidFill>
                   <a:srgbClr val="1A1A1A"/>
                 </a:solidFill>
@@ -5730,15 +5767,37 @@
               </a:defRPr>
             </a:pPr>
             <a:r>
-              <a:t>-   One hop only - two radios cannot demonstrate multi-hop forwarding</a:t>
-            </a:r>
-          </a:p>
-          <a:p>
-            <a:pPr>
-              <a:spcAft>
-                <a:spcPts val="1500"/>
-              </a:spcAft>
-              <a:defRPr sz="1800" b="0">
+              <a:t>The brief specified BMP280. The available hardware was DHT11.</a:t>
+            </a:r>
+          </a:p>
+          <a:p>
+            <a:pPr>
+              <a:lnSpc>
+                <a:spcPct val="118000"/>
+              </a:lnSpc>
+              <a:spcAft>
+                <a:spcPts val="1100"/>
+              </a:spcAft>
+              <a:defRPr sz="1800" b="1">
+                <a:solidFill>
+                  <a:srgbClr val="A83A1F"/>
+                </a:solidFill>
+                <a:latin typeface="Calibri"/>
+              </a:defRPr>
+            </a:pPr>
+            <a:r>
+              <a:t>Lost</a:t>
+            </a:r>
+          </a:p>
+          <a:p>
+            <a:pPr>
+              <a:lnSpc>
+                <a:spcPct val="118000"/>
+              </a:lnSpc>
+              <a:spcAft>
+                <a:spcPts val="1100"/>
+              </a:spcAft>
+              <a:defRPr sz="1700" b="0">
                 <a:solidFill>
                   <a:srgbClr val="1A1A1A"/>
                 </a:solidFill>
@@ -5746,15 +5805,18 @@
               </a:defRPr>
             </a:pPr>
             <a:r>
-              <a:t>-   ttl and hop_count are designed for but unexercised</a:t>
-            </a:r>
-          </a:p>
-          <a:p>
-            <a:pPr>
-              <a:spcAft>
-                <a:spcPts val="1500"/>
-              </a:spcAft>
-              <a:defRPr sz="1800" b="0">
+              <a:t>-   No I2C experience - DHT11 is single-wire bit-banged</a:t>
+            </a:r>
+          </a:p>
+          <a:p>
+            <a:pPr>
+              <a:lnSpc>
+                <a:spcPct val="118000"/>
+              </a:lnSpc>
+              <a:spcAft>
+                <a:spcPts val="1100"/>
+              </a:spcAft>
+              <a:defRPr sz="1700" b="0">
                 <a:solidFill>
                   <a:srgbClr val="1A1A1A"/>
                 </a:solidFill>
@@ -5762,15 +5824,37 @@
               </a:defRPr>
             </a:pPr>
             <a:r>
-              <a:t>-   MQTT without TLS - the radio leg is encrypted, the cloud leg is not</a:t>
-            </a:r>
-          </a:p>
-          <a:p>
-            <a:pPr>
-              <a:spcAft>
-                <a:spcPts val="1500"/>
-              </a:spcAft>
-              <a:defRPr sz="1800" b="0">
+              <a:t>-   Lower resolution, hence the stepped chart traces</a:t>
+            </a:r>
+          </a:p>
+          <a:p>
+            <a:pPr>
+              <a:lnSpc>
+                <a:spcPct val="118000"/>
+              </a:lnSpc>
+              <a:spcAft>
+                <a:spcPts val="1100"/>
+              </a:spcAft>
+              <a:defRPr sz="1800" b="1">
+                <a:solidFill>
+                  <a:srgbClr val="0B6B62"/>
+                </a:solidFill>
+                <a:latin typeface="Calibri"/>
+              </a:defRPr>
+            </a:pPr>
+            <a:r>
+              <a:t>Gained</a:t>
+            </a:r>
+          </a:p>
+          <a:p>
+            <a:pPr>
+              <a:lnSpc>
+                <a:spcPct val="118000"/>
+              </a:lnSpc>
+              <a:spcAft>
+                <a:spcPts val="1100"/>
+              </a:spcAft>
+              <a:defRPr sz="1700" b="0">
                 <a:solidFill>
                   <a:srgbClr val="1A1A1A"/>
                 </a:solidFill>
@@ -5778,15 +5862,18 @@
               </a:defRPr>
             </a:pPr>
             <a:r>
-              <a:t>-   Credentials compiled into firmware, recoverable over USB</a:t>
-            </a:r>
-          </a:p>
-          <a:p>
-            <a:pPr>
-              <a:spcAft>
-                <a:spcPts val="1500"/>
-              </a:spcAft>
-              <a:defRPr sz="1800" b="0">
+              <a:t>-   Humidity responds to a hand in seconds; indoor pressure would be flat for hours</a:t>
+            </a:r>
+          </a:p>
+          <a:p>
+            <a:pPr>
+              <a:lnSpc>
+                <a:spcPct val="118000"/>
+              </a:lnSpc>
+              <a:spcAft>
+                <a:spcPts val="1100"/>
+              </a:spcAft>
+              <a:defRPr sz="1700" b="0">
                 <a:solidFill>
                   <a:srgbClr val="1A1A1A"/>
                 </a:solidFill>
@@ -5794,23 +5881,7 @@
               </a:defRPr>
             </a:pPr>
             <a:r>
-              <a:t>-   Manual channel configuration - a gateway roam silently breaks the link</a:t>
-            </a:r>
-          </a:p>
-          <a:p>
-            <a:pPr>
-              <a:spcAft>
-                <a:spcPts val="1500"/>
-              </a:spcAft>
-              <a:defRPr sz="1800" b="0">
-                <a:solidFill>
-                  <a:srgbClr val="1A1A1A"/>
-                </a:solidFill>
-                <a:latin typeface="Calibri"/>
-              </a:defRPr>
-            </a:pPr>
-            <a:r>
-              <a:t>-   Single remote node - dedup state is one slot, not an array</a:t>
+              <a:t>-   Everything above the sensing layer is unchanged - the packet carries two floats and does not care what they represent</a:t>
             </a:r>
           </a:p>
         </p:txBody>
@@ -5867,7 +5938,7 @@
               </a:defRPr>
             </a:pPr>
             <a:r>
-              <a:t>MEASURED, NOT ASSUMED</a:t>
+              <a:t>HONESTLY</a:t>
             </a:r>
           </a:p>
           <a:p>
@@ -5883,7 +5954,7 @@
               </a:defRPr>
             </a:pPr>
             <a:r>
-              <a:t>What we found</a:t>
+              <a:t>Limitations</a:t>
             </a:r>
           </a:p>
         </p:txBody>
@@ -5941,7 +6012,7 @@
         <p:spPr>
           <a:xfrm>
             <a:off x="640080" y="1828800"/>
-            <a:ext cx="10911535" cy="4480560"/>
+            <a:ext cx="9509760" cy="4480560"/>
           </a:xfrm>
           <a:prstGeom prst="rect">
             <a:avLst/>
@@ -5955,26 +6026,13 @@
           <a:lstStyle/>
           <a:p>
             <a:pPr>
-              <a:spcAft>
-                <a:spcPts val="800"/>
-              </a:spcAft>
-              <a:defRPr sz="1900" b="1">
-                <a:solidFill>
-                  <a:srgbClr val="0B6B62"/>
-                </a:solidFill>
-                <a:latin typeface="Calibri"/>
-              </a:defRPr>
-            </a:pPr>
-            <a:r>
-              <a:t>Port 1883 is open outbound on eduroam</a:t>
-            </a:r>
-          </a:p>
-          <a:p>
-            <a:pPr>
-              <a:spcAft>
-                <a:spcPts val="1800"/>
-              </a:spcAft>
-              <a:defRPr sz="1600" b="0">
+              <a:lnSpc>
+                <a:spcPct val="118000"/>
+              </a:lnSpc>
+              <a:spcAft>
+                <a:spcPts val="1100"/>
+              </a:spcAft>
+              <a:defRPr sz="1800" b="0">
                 <a:solidFill>
                   <a:srgbClr val="1A1A1A"/>
                 </a:solidFill>
@@ -5982,31 +6040,18 @@
               </a:defRPr>
             </a:pPr>
             <a:r>
-              <a:t>Proved by the MQTT return code: state=5 is a reply from the broker, so the packets crossed the firewall. state=-2 would have meant no TCP connection at all.</a:t>
-            </a:r>
-          </a:p>
-          <a:p>
-            <a:pPr>
-              <a:spcAft>
-                <a:spcPts val="800"/>
-              </a:spcAft>
-              <a:defRPr sz="1900" b="1">
-                <a:solidFill>
-                  <a:srgbClr val="0B6B62"/>
-                </a:solidFill>
-                <a:latin typeface="Calibri"/>
-              </a:defRPr>
-            </a:pPr>
-            <a:r>
-              <a:t>WPA2-Enterprise costs ~97 KB of flash</a:t>
-            </a:r>
-          </a:p>
-          <a:p>
-            <a:pPr>
-              <a:spcAft>
-                <a:spcPts val="1800"/>
-              </a:spcAft>
-              <a:defRPr sz="1600" b="0">
+              <a:t>-   One hop only - two radios cannot demonstrate multi-hop forwarding</a:t>
+            </a:r>
+          </a:p>
+          <a:p>
+            <a:pPr>
+              <a:lnSpc>
+                <a:spcPct val="118000"/>
+              </a:lnSpc>
+              <a:spcAft>
+                <a:spcPts val="1100"/>
+              </a:spcAft>
+              <a:defRPr sz="1800" b="0">
                 <a:solidFill>
                   <a:srgbClr val="1A1A1A"/>
                 </a:solidFill>
@@ -6014,31 +6059,18 @@
               </a:defRPr>
             </a:pPr>
             <a:r>
-              <a:t>915,267 bytes with PSK against 1,012,651 with PEAP. Enterprise auth is not free.</a:t>
-            </a:r>
-          </a:p>
-          <a:p>
-            <a:pPr>
-              <a:spcAft>
-                <a:spcPts val="800"/>
-              </a:spcAft>
-              <a:defRPr sz="1900" b="1">
-                <a:solidFill>
-                  <a:srgbClr val="0B6B62"/>
-                </a:solidFill>
-                <a:latin typeface="Calibri"/>
-              </a:defRPr>
-            </a:pPr>
-            <a:r>
-              <a:t>eduroam routes by RADIUS realm, not email domain</a:t>
-            </a:r>
-          </a:p>
-          <a:p>
-            <a:pPr>
-              <a:spcAft>
-                <a:spcPts val="0"/>
-              </a:spcAft>
-              <a:defRPr sz="1600" b="0">
+              <a:t>-   ttl and hop_count are designed for but unexercised</a:t>
+            </a:r>
+          </a:p>
+          <a:p>
+            <a:pPr>
+              <a:lnSpc>
+                <a:spcPct val="118000"/>
+              </a:lnSpc>
+              <a:spcAft>
+                <a:spcPts val="1100"/>
+              </a:spcAft>
+              <a:defRPr sz="1800" b="0">
                 <a:solidFill>
                   <a:srgbClr val="1A1A1A"/>
                 </a:solidFill>
@@ -6046,7 +6078,64 @@
               </a:defRPr>
             </a:pPr>
             <a:r>
-              <a:t>user@student.&lt;institution&gt; failed; user@&lt;institution&gt; worked. The failure is silent - the same status code as a wrong password.</a:t>
+              <a:t>-   MQTT without TLS - the radio leg is encrypted, the cloud leg is not</a:t>
+            </a:r>
+          </a:p>
+          <a:p>
+            <a:pPr>
+              <a:lnSpc>
+                <a:spcPct val="118000"/>
+              </a:lnSpc>
+              <a:spcAft>
+                <a:spcPts val="1100"/>
+              </a:spcAft>
+              <a:defRPr sz="1800" b="0">
+                <a:solidFill>
+                  <a:srgbClr val="1A1A1A"/>
+                </a:solidFill>
+                <a:latin typeface="Calibri"/>
+              </a:defRPr>
+            </a:pPr>
+            <a:r>
+              <a:t>-   Credentials compiled into firmware, recoverable over USB</a:t>
+            </a:r>
+          </a:p>
+          <a:p>
+            <a:pPr>
+              <a:lnSpc>
+                <a:spcPct val="118000"/>
+              </a:lnSpc>
+              <a:spcAft>
+                <a:spcPts val="1100"/>
+              </a:spcAft>
+              <a:defRPr sz="1800" b="0">
+                <a:solidFill>
+                  <a:srgbClr val="1A1A1A"/>
+                </a:solidFill>
+                <a:latin typeface="Calibri"/>
+              </a:defRPr>
+            </a:pPr>
+            <a:r>
+              <a:t>-   Manual channel configuration - a gateway roam silently breaks the link</a:t>
+            </a:r>
+          </a:p>
+          <a:p>
+            <a:pPr>
+              <a:lnSpc>
+                <a:spcPct val="118000"/>
+              </a:lnSpc>
+              <a:spcAft>
+                <a:spcPts val="1100"/>
+              </a:spcAft>
+              <a:defRPr sz="1800" b="0">
+                <a:solidFill>
+                  <a:srgbClr val="1A1A1A"/>
+                </a:solidFill>
+                <a:latin typeface="Calibri"/>
+              </a:defRPr>
+            </a:pPr>
+            <a:r>
+              <a:t>-   Single remote node - dedup state is one slot, not an array</a:t>
             </a:r>
           </a:p>
         </p:txBody>
@@ -6103,7 +6192,7 @@
               </a:defRPr>
             </a:pPr>
             <a:r>
-              <a:t>WHAT WOULD COME NEXT</a:t>
+              <a:t>MEASURED, NOT ASSUMED</a:t>
             </a:r>
           </a:p>
           <a:p>
@@ -6119,7 +6208,7 @@
               </a:defRPr>
             </a:pPr>
             <a:r>
-              <a:t>Further work</a:t>
+              <a:t>What we found</a:t>
             </a:r>
           </a:p>
         </p:txBody>
@@ -6177,7 +6266,7 @@
         <p:spPr>
           <a:xfrm>
             <a:off x="640080" y="1828800"/>
-            <a:ext cx="10911535" cy="4480560"/>
+            <a:ext cx="9509760" cy="4480560"/>
           </a:xfrm>
           <a:prstGeom prst="rect">
             <a:avLst/>
@@ -6191,10 +6280,32 @@
           <a:lstStyle/>
           <a:p>
             <a:pPr>
-              <a:spcAft>
-                <a:spcPts val="1700"/>
-              </a:spcAft>
-              <a:defRPr sz="1900" b="0">
+              <a:lnSpc>
+                <a:spcPct val="118000"/>
+              </a:lnSpc>
+              <a:spcAft>
+                <a:spcPts val="1100"/>
+              </a:spcAft>
+              <a:defRPr sz="1900" b="1">
+                <a:solidFill>
+                  <a:srgbClr val="0B6B62"/>
+                </a:solidFill>
+                <a:latin typeface="Calibri"/>
+              </a:defRPr>
+            </a:pPr>
+            <a:r>
+              <a:t>Port 1883 is open outbound on eduroam</a:t>
+            </a:r>
+          </a:p>
+          <a:p>
+            <a:pPr>
+              <a:lnSpc>
+                <a:spcPct val="118000"/>
+              </a:lnSpc>
+              <a:spcAft>
+                <a:spcPts val="1100"/>
+              </a:spcAft>
+              <a:defRPr sz="1600" b="0">
                 <a:solidFill>
                   <a:srgbClr val="1A1A1A"/>
                 </a:solidFill>
@@ -6202,15 +6313,37 @@
               </a:defRPr>
             </a:pPr>
             <a:r>
-              <a:t>1.   A third node - actually exercise ttl and hop_count</a:t>
-            </a:r>
-          </a:p>
-          <a:p>
-            <a:pPr>
-              <a:spcAft>
-                <a:spcPts val="1700"/>
-              </a:spcAft>
-              <a:defRPr sz="1900" b="0">
+              <a:t>Proved by the MQTT return code: state=5 is a reply from the broker, so the packets crossed the firewall. state=-2 would have meant no TCP connection at all.</a:t>
+            </a:r>
+          </a:p>
+          <a:p>
+            <a:pPr>
+              <a:lnSpc>
+                <a:spcPct val="118000"/>
+              </a:lnSpc>
+              <a:spcAft>
+                <a:spcPts val="1100"/>
+              </a:spcAft>
+              <a:defRPr sz="1900" b="1">
+                <a:solidFill>
+                  <a:srgbClr val="0B6B62"/>
+                </a:solidFill>
+                <a:latin typeface="Calibri"/>
+              </a:defRPr>
+            </a:pPr>
+            <a:r>
+              <a:t>WPA2-Enterprise costs ~97 KB of flash</a:t>
+            </a:r>
+          </a:p>
+          <a:p>
+            <a:pPr>
+              <a:lnSpc>
+                <a:spcPct val="118000"/>
+              </a:lnSpc>
+              <a:spcAft>
+                <a:spcPts val="1100"/>
+              </a:spcAft>
+              <a:defRPr sz="1600" b="0">
                 <a:solidFill>
                   <a:srgbClr val="1A1A1A"/>
                 </a:solidFill>
@@ -6218,15 +6351,37 @@
               </a:defRPr>
             </a:pPr>
             <a:r>
-              <a:t>2.   MQTT over TLS on port 8883</a:t>
-            </a:r>
-          </a:p>
-          <a:p>
-            <a:pPr>
-              <a:spcAft>
-                <a:spcPts val="1700"/>
-              </a:spcAft>
-              <a:defRPr sz="1900" b="0">
+              <a:t>915,267 bytes with PSK against 1,012,651 with PEAP. Enterprise auth is not free.</a:t>
+            </a:r>
+          </a:p>
+          <a:p>
+            <a:pPr>
+              <a:lnSpc>
+                <a:spcPct val="118000"/>
+              </a:lnSpc>
+              <a:spcAft>
+                <a:spcPts val="1100"/>
+              </a:spcAft>
+              <a:defRPr sz="1900" b="1">
+                <a:solidFill>
+                  <a:srgbClr val="0B6B62"/>
+                </a:solidFill>
+                <a:latin typeface="Calibri"/>
+              </a:defRPr>
+            </a:pPr>
+            <a:r>
+              <a:t>eduroam routes by RADIUS realm, not email domain</a:t>
+            </a:r>
+          </a:p>
+          <a:p>
+            <a:pPr>
+              <a:lnSpc>
+                <a:spcPct val="118000"/>
+              </a:lnSpc>
+              <a:spcAft>
+                <a:spcPts val="1100"/>
+              </a:spcAft>
+              <a:defRPr sz="1600" b="0">
                 <a:solidFill>
                   <a:srgbClr val="1A1A1A"/>
                 </a:solidFill>
@@ -6234,39 +6389,7 @@
               </a:defRPr>
             </a:pPr>
             <a:r>
-              <a:t>3.   Credentials provisioned into NVS at first boot, not compiled in</a:t>
-            </a:r>
-          </a:p>
-          <a:p>
-            <a:pPr>
-              <a:spcAft>
-                <a:spcPts val="1700"/>
-              </a:spcAft>
-              <a:defRPr sz="1900" b="0">
-                <a:solidFill>
-                  <a:srgbClr val="1A1A1A"/>
-                </a:solidFill>
-                <a:latin typeface="Calibri"/>
-              </a:defRPr>
-            </a:pPr>
-            <a:r>
-              <a:t>4.   Automatic channel recovery instead of a manual re-upload</a:t>
-            </a:r>
-          </a:p>
-          <a:p>
-            <a:pPr>
-              <a:spcAft>
-                <a:spcPts val="1700"/>
-              </a:spcAft>
-              <a:defRPr sz="1900" b="0">
-                <a:solidFill>
-                  <a:srgbClr val="1A1A1A"/>
-                </a:solidFill>
-                <a:latin typeface="Calibri"/>
-              </a:defRPr>
-            </a:pPr>
-            <a:r>
-              <a:t>5.   Persist the buffer to NVS so it survives a reboot, not just a reconnect</a:t>
+              <a:t>user@student.&lt;institution&gt; failed; user@&lt;institution&gt; worked. The failure is silent - the same status code as a wrong password.</a:t>
             </a:r>
           </a:p>
         </p:txBody>
@@ -6297,95 +6420,6 @@
         </p:nvSpPr>
         <p:spPr>
           <a:xfrm>
-            <a:off x="914400" y="2377440"/>
-            <a:ext cx="10362895" cy="2377440"/>
-          </a:xfrm>
-          <a:prstGeom prst="rect">
-            <a:avLst/>
-          </a:prstGeom>
-          <a:noFill/>
-        </p:spPr>
-        <p:txBody>
-          <a:bodyPr wrap="square">
-            <a:spAutoFit/>
-          </a:bodyPr>
-          <a:lstStyle/>
-          <a:p>
-            <a:pPr algn="ctr">
-              <a:spcAft>
-                <a:spcPts val="2600"/>
-              </a:spcAft>
-              <a:defRPr sz="4400" b="1">
-                <a:solidFill>
-                  <a:srgbClr val="1A1A1A"/>
-                </a:solidFill>
-                <a:latin typeface="Calibri"/>
-              </a:defRPr>
-            </a:pPr>
-            <a:r>
-              <a:t>Questions</a:t>
-            </a:r>
-          </a:p>
-          <a:p>
-            <a:pPr algn="ctr">
-              <a:spcAft>
-                <a:spcPts val="1800"/>
-              </a:spcAft>
-              <a:defRPr sz="1900" b="0">
-                <a:solidFill>
-                  <a:srgbClr val="606060"/>
-                </a:solidFill>
-                <a:latin typeface="Calibri"/>
-              </a:defRPr>
-            </a:pPr>
-            <a:r>
-              <a:t>Two ESP32 boards.  No wire between them.  Two sensors, one cloud stream.</a:t>
-            </a:r>
-          </a:p>
-          <a:p>
-            <a:pPr algn="ctr">
-              <a:spcAft>
-                <a:spcPts val="0"/>
-              </a:spcAft>
-              <a:defRPr sz="1400" b="0">
-                <a:solidFill>
-                  <a:srgbClr val="606060"/>
-                </a:solidFill>
-                <a:latin typeface="Calibri"/>
-              </a:defRPr>
-            </a:pPr>
-            <a:r>
-              <a:t>Code, evidence and full report:  github.com/bhanuGupta1/esp32-espnow-thingsboard-gateway</a:t>
-            </a:r>
-          </a:p>
-        </p:txBody>
-      </p:sp>
-    </p:spTree>
-  </p:cSld>
-  <p:clrMapOvr>
-    <a:masterClrMapping/>
-  </p:clrMapOvr>
-</p:sld>
-</file>
-
-<file path=ppt/slides/slide18.xml><?xml version="1.0" encoding="utf-8"?>
-<p:sld xmlns:a="http://schemas.openxmlformats.org/drawingml/2006/main" xmlns:p="http://schemas.openxmlformats.org/presentationml/2006/main" xmlns:r="http://schemas.openxmlformats.org/officeDocument/2006/relationships">
-  <p:cSld>
-    <p:spTree>
-      <p:nvGrpSpPr>
-        <p:cNvPr id="1" name=""/>
-        <p:cNvGrpSpPr/>
-        <p:nvPr/>
-      </p:nvGrpSpPr>
-      <p:grpSpPr/>
-      <p:sp>
-        <p:nvSpPr>
-          <p:cNvPr id="2" name="TextBox 1"/>
-          <p:cNvSpPr txBox="1"/>
-          <p:nvPr/>
-        </p:nvSpPr>
-        <p:spPr>
-          <a:xfrm>
             <a:off x="640080" y="411480"/>
             <a:ext cx="10911535" cy="1005840"/>
           </a:xfrm>
@@ -6412,7 +6446,7 @@
               </a:defRPr>
             </a:pPr>
             <a:r>
-              <a:t>WIRING</a:t>
+              <a:t>WHAT WOULD COME NEXT</a:t>
             </a:r>
           </a:p>
           <a:p>
@@ -6428,7 +6462,7 @@
               </a:defRPr>
             </a:pPr>
             <a:r>
-              <a:t>Circuit</a:t>
+              <a:t>Further work</a:t>
             </a:r>
           </a:p>
         </p:txBody>
@@ -6477,30 +6511,222 @@
           </a:p>
         </p:txBody>
       </p:sp>
-      <p:pic>
-        <p:nvPicPr>
-          <p:cNvPr id="4" name="Picture 3" descr="fig_circuit_diagram.png"/>
-          <p:cNvPicPr>
-            <a:picLocks noChangeAspect="1"/>
-          </p:cNvPicPr>
+      <p:sp>
+        <p:nvSpPr>
+          <p:cNvPr id="4" name="TextBox 3"/>
+          <p:cNvSpPr txBox="1"/>
           <p:nvPr/>
-        </p:nvPicPr>
-        <p:blipFill>
-          <a:blip r:embed="rId2"/>
-          <a:stretch>
-            <a:fillRect/>
-          </a:stretch>
-        </p:blipFill>
+        </p:nvSpPr>
         <p:spPr>
           <a:xfrm>
-            <a:off x="640080" y="1783080"/>
-            <a:ext cx="10908792" cy="6732847"/>
+            <a:off x="640080" y="1828800"/>
+            <a:ext cx="9509760" cy="4480560"/>
           </a:xfrm>
           <a:prstGeom prst="rect">
             <a:avLst/>
           </a:prstGeom>
+          <a:noFill/>
         </p:spPr>
-      </p:pic>
+        <p:txBody>
+          <a:bodyPr wrap="square">
+            <a:spAutoFit/>
+          </a:bodyPr>
+          <a:lstStyle/>
+          <a:p>
+            <a:pPr>
+              <a:lnSpc>
+                <a:spcPct val="118000"/>
+              </a:lnSpc>
+              <a:spcAft>
+                <a:spcPts val="1100"/>
+              </a:spcAft>
+              <a:defRPr sz="1900" b="0">
+                <a:solidFill>
+                  <a:srgbClr val="1A1A1A"/>
+                </a:solidFill>
+                <a:latin typeface="Calibri"/>
+              </a:defRPr>
+            </a:pPr>
+            <a:r>
+              <a:t>1.   A third node - actually exercise ttl and hop_count</a:t>
+            </a:r>
+          </a:p>
+          <a:p>
+            <a:pPr>
+              <a:lnSpc>
+                <a:spcPct val="118000"/>
+              </a:lnSpc>
+              <a:spcAft>
+                <a:spcPts val="1100"/>
+              </a:spcAft>
+              <a:defRPr sz="1900" b="0">
+                <a:solidFill>
+                  <a:srgbClr val="1A1A1A"/>
+                </a:solidFill>
+                <a:latin typeface="Calibri"/>
+              </a:defRPr>
+            </a:pPr>
+            <a:r>
+              <a:t>2.   MQTT over TLS on port 8883</a:t>
+            </a:r>
+          </a:p>
+          <a:p>
+            <a:pPr>
+              <a:lnSpc>
+                <a:spcPct val="118000"/>
+              </a:lnSpc>
+              <a:spcAft>
+                <a:spcPts val="1100"/>
+              </a:spcAft>
+              <a:defRPr sz="1900" b="0">
+                <a:solidFill>
+                  <a:srgbClr val="1A1A1A"/>
+                </a:solidFill>
+                <a:latin typeface="Calibri"/>
+              </a:defRPr>
+            </a:pPr>
+            <a:r>
+              <a:t>3.   Credentials provisioned into NVS at first boot, not compiled in</a:t>
+            </a:r>
+          </a:p>
+          <a:p>
+            <a:pPr>
+              <a:lnSpc>
+                <a:spcPct val="118000"/>
+              </a:lnSpc>
+              <a:spcAft>
+                <a:spcPts val="1100"/>
+              </a:spcAft>
+              <a:defRPr sz="1900" b="0">
+                <a:solidFill>
+                  <a:srgbClr val="1A1A1A"/>
+                </a:solidFill>
+                <a:latin typeface="Calibri"/>
+              </a:defRPr>
+            </a:pPr>
+            <a:r>
+              <a:t>4.   Automatic channel recovery instead of a manual re-upload</a:t>
+            </a:r>
+          </a:p>
+          <a:p>
+            <a:pPr>
+              <a:lnSpc>
+                <a:spcPct val="118000"/>
+              </a:lnSpc>
+              <a:spcAft>
+                <a:spcPts val="1100"/>
+              </a:spcAft>
+              <a:defRPr sz="1900" b="0">
+                <a:solidFill>
+                  <a:srgbClr val="1A1A1A"/>
+                </a:solidFill>
+                <a:latin typeface="Calibri"/>
+              </a:defRPr>
+            </a:pPr>
+            <a:r>
+              <a:t>5.   Persist the buffer to NVS so it survives a reboot, not just a reconnect</a:t>
+            </a:r>
+          </a:p>
+        </p:txBody>
+      </p:sp>
+    </p:spTree>
+  </p:cSld>
+  <p:clrMapOvr>
+    <a:masterClrMapping/>
+  </p:clrMapOvr>
+</p:sld>
+</file>
+
+<file path=ppt/slides/slide18.xml><?xml version="1.0" encoding="utf-8"?>
+<p:sld xmlns:a="http://schemas.openxmlformats.org/drawingml/2006/main" xmlns:p="http://schemas.openxmlformats.org/presentationml/2006/main" xmlns:r="http://schemas.openxmlformats.org/officeDocument/2006/relationships">
+  <p:cSld>
+    <p:spTree>
+      <p:nvGrpSpPr>
+        <p:cNvPr id="1" name=""/>
+        <p:cNvGrpSpPr/>
+        <p:nvPr/>
+      </p:nvGrpSpPr>
+      <p:grpSpPr/>
+      <p:sp>
+        <p:nvSpPr>
+          <p:cNvPr id="2" name="TextBox 1"/>
+          <p:cNvSpPr txBox="1"/>
+          <p:nvPr/>
+        </p:nvSpPr>
+        <p:spPr>
+          <a:xfrm>
+            <a:off x="914400" y="2377440"/>
+            <a:ext cx="9509760" cy="2377440"/>
+          </a:xfrm>
+          <a:prstGeom prst="rect">
+            <a:avLst/>
+          </a:prstGeom>
+          <a:noFill/>
+        </p:spPr>
+        <p:txBody>
+          <a:bodyPr wrap="square">
+            <a:spAutoFit/>
+          </a:bodyPr>
+          <a:lstStyle/>
+          <a:p>
+            <a:pPr algn="ctr">
+              <a:lnSpc>
+                <a:spcPct val="118000"/>
+              </a:lnSpc>
+              <a:spcAft>
+                <a:spcPts val="1100"/>
+              </a:spcAft>
+              <a:defRPr sz="4400" b="1">
+                <a:solidFill>
+                  <a:srgbClr val="1A1A1A"/>
+                </a:solidFill>
+                <a:latin typeface="Calibri"/>
+              </a:defRPr>
+            </a:pPr>
+            <a:r>
+              <a:t>Questions</a:t>
+            </a:r>
+          </a:p>
+          <a:p>
+            <a:pPr algn="ctr">
+              <a:lnSpc>
+                <a:spcPct val="118000"/>
+              </a:lnSpc>
+              <a:spcAft>
+                <a:spcPts val="1100"/>
+              </a:spcAft>
+              <a:defRPr sz="1900" b="0">
+                <a:solidFill>
+                  <a:srgbClr val="606060"/>
+                </a:solidFill>
+                <a:latin typeface="Calibri"/>
+              </a:defRPr>
+            </a:pPr>
+            <a:r>
+              <a:t>Two ESP32 boards.  No wire between them.  Two sensors, one cloud stream.</a:t>
+            </a:r>
+          </a:p>
+          <a:p>
+            <a:pPr algn="ctr">
+              <a:lnSpc>
+                <a:spcPct val="118000"/>
+              </a:lnSpc>
+              <a:spcAft>
+                <a:spcPts val="1100"/>
+              </a:spcAft>
+              <a:defRPr sz="1400" b="0">
+                <a:solidFill>
+                  <a:srgbClr val="606060"/>
+                </a:solidFill>
+                <a:latin typeface="Calibri"/>
+              </a:defRPr>
+            </a:pPr>
+            <a:r>
+              <a:t>Code, evidence and full report:  github.com/bhanuGupta1/esp32-espnow-thingsboard-gateway</a:t>
+            </a:r>
+          </a:p>
+        </p:txBody>
+      </p:sp>
     </p:spTree>
   </p:cSld>
   <p:clrMapOvr>
@@ -6627,7 +6853,7 @@
         <p:spPr>
           <a:xfrm>
             <a:off x="640080" y="1828800"/>
-            <a:ext cx="10911535" cy="4480560"/>
+            <a:ext cx="9509760" cy="4480560"/>
           </a:xfrm>
           <a:prstGeom prst="rect">
             <a:avLst/>
@@ -6641,8 +6867,11 @@
           <a:lstStyle/>
           <a:p>
             <a:pPr>
-              <a:spcAft>
-                <a:spcPts val="2600"/>
+              <a:lnSpc>
+                <a:spcPct val="118000"/>
+              </a:lnSpc>
+              <a:spcAft>
+                <a:spcPts val="1100"/>
               </a:spcAft>
               <a:defRPr sz="2200" b="0">
                 <a:solidFill>
@@ -6657,8 +6886,11 @@
           </a:p>
           <a:p>
             <a:pPr>
-              <a:spcAft>
-                <a:spcPts val="1400"/>
+              <a:lnSpc>
+                <a:spcPct val="118000"/>
+              </a:lnSpc>
+              <a:spcAft>
+                <a:spcPts val="1100"/>
               </a:spcAft>
               <a:defRPr sz="1900" b="0">
                 <a:solidFill>
@@ -6673,8 +6905,11 @@
           </a:p>
           <a:p>
             <a:pPr>
-              <a:spcAft>
-                <a:spcPts val="1400"/>
+              <a:lnSpc>
+                <a:spcPct val="118000"/>
+              </a:lnSpc>
+              <a:spcAft>
+                <a:spcPts val="1100"/>
               </a:spcAft>
               <a:defRPr sz="1900" b="0">
                 <a:solidFill>
@@ -6689,8 +6924,11 @@
           </a:p>
           <a:p>
             <a:pPr>
-              <a:spcAft>
-                <a:spcPts val="1400"/>
+              <a:lnSpc>
+                <a:spcPct val="118000"/>
+              </a:lnSpc>
+              <a:spcAft>
+                <a:spcPts val="1100"/>
               </a:spcAft>
               <a:defRPr sz="1900" b="0">
                 <a:solidFill>
@@ -6705,8 +6943,11 @@
           </a:p>
           <a:p>
             <a:pPr>
-              <a:spcAft>
-                <a:spcPts val="0"/>
+              <a:lnSpc>
+                <a:spcPct val="118000"/>
+              </a:lnSpc>
+              <a:spcAft>
+                <a:spcPts val="1100"/>
               </a:spcAft>
               <a:defRPr sz="2200" b="1">
                 <a:solidFill>
@@ -6847,7 +7088,7 @@
         <p:spPr>
           <a:xfrm>
             <a:off x="640080" y="1783080"/>
-            <a:ext cx="6400800" cy="4526280"/>
+            <a:ext cx="6931448" cy="4526280"/>
           </a:xfrm>
           <a:prstGeom prst="rect">
             <a:avLst/>
@@ -6861,8 +7102,11 @@
           <a:lstStyle/>
           <a:p>
             <a:pPr>
-              <a:spcAft>
-                <a:spcPts val="600"/>
+              <a:lnSpc>
+                <a:spcPct val="118000"/>
+              </a:lnSpc>
+              <a:spcAft>
+                <a:spcPts val="1100"/>
               </a:spcAft>
               <a:defRPr sz="2000" b="1">
                 <a:solidFill>
@@ -6877,8 +7121,11 @@
           </a:p>
           <a:p>
             <a:pPr>
-              <a:spcAft>
-                <a:spcPts val="1800"/>
+              <a:lnSpc>
+                <a:spcPct val="118000"/>
+              </a:lnSpc>
+              <a:spcAft>
+                <a:spcPts val="1100"/>
               </a:spcAft>
               <a:defRPr sz="1700" b="0">
                 <a:solidFill>
@@ -6893,8 +7140,11 @@
           </a:p>
           <a:p>
             <a:pPr>
-              <a:spcAft>
-                <a:spcPts val="600"/>
+              <a:lnSpc>
+                <a:spcPct val="118000"/>
+              </a:lnSpc>
+              <a:spcAft>
+                <a:spcPts val="1100"/>
               </a:spcAft>
               <a:defRPr sz="2000" b="1">
                 <a:solidFill>
@@ -6909,8 +7159,11 @@
           </a:p>
           <a:p>
             <a:pPr>
-              <a:spcAft>
-                <a:spcPts val="2000"/>
+              <a:lnSpc>
+                <a:spcPct val="118000"/>
+              </a:lnSpc>
+              <a:spcAft>
+                <a:spcPts val="1100"/>
               </a:spcAft>
               <a:defRPr sz="1700" b="0">
                 <a:solidFill>
@@ -6925,8 +7178,11 @@
           </a:p>
           <a:p>
             <a:pPr>
-              <a:spcAft>
-                <a:spcPts val="1600"/>
+              <a:lnSpc>
+                <a:spcPct val="118000"/>
+              </a:lnSpc>
+              <a:spcAft>
+                <a:spcPts val="1100"/>
               </a:spcAft>
               <a:defRPr sz="1800" b="1">
                 <a:solidFill>
@@ -6941,8 +7197,11 @@
           </a:p>
           <a:p>
             <a:pPr>
-              <a:spcAft>
-                <a:spcPts val="0"/>
+              <a:lnSpc>
+                <a:spcPct val="118000"/>
+              </a:lnSpc>
+              <a:spcAft>
+                <a:spcPts val="1100"/>
               </a:spcAft>
               <a:defRPr sz="1500" b="0">
                 <a:solidFill>
@@ -6973,8 +7232,8 @@
         </p:blipFill>
         <p:spPr>
           <a:xfrm>
-            <a:off x="7766313" y="1783080"/>
-            <a:ext cx="3785302" cy="5047488"/>
+            <a:off x="7983008" y="1783080"/>
+            <a:ext cx="3565864" cy="4754880"/>
           </a:xfrm>
           <a:prstGeom prst="rect">
             <a:avLst/>
@@ -7114,8 +7373,8 @@
         </p:blipFill>
         <p:spPr>
           <a:xfrm>
-            <a:off x="640080" y="1783080"/>
-            <a:ext cx="10908792" cy="6426809"/>
+            <a:off x="2059036" y="1783080"/>
+            <a:ext cx="8070878" cy="4754880"/>
           </a:xfrm>
           <a:prstGeom prst="rect">
             <a:avLst/>
@@ -7174,7 +7433,7 @@
               </a:defRPr>
             </a:pPr>
             <a:r>
-              <a:t>THE GOVERNING CONSTRAINT</a:t>
+              <a:t>WIRING</a:t>
             </a:r>
           </a:p>
           <a:p>
@@ -7190,7 +7449,7 @@
               </a:defRPr>
             </a:pPr>
             <a:r>
-              <a:t>One radio, one channel</a:t>
+              <a:t>Circuit</a:t>
             </a:r>
           </a:p>
         </p:txBody>
@@ -7239,125 +7498,30 @@
           </a:p>
         </p:txBody>
       </p:sp>
-      <p:sp>
-        <p:nvSpPr>
-          <p:cNvPr id="4" name="TextBox 3"/>
-          <p:cNvSpPr txBox="1"/>
+      <p:pic>
+        <p:nvPicPr>
+          <p:cNvPr id="4" name="Picture 3" descr="fig_circuit_diagram.png"/>
+          <p:cNvPicPr>
+            <a:picLocks noChangeAspect="1"/>
+          </p:cNvPicPr>
           <p:nvPr/>
-        </p:nvSpPr>
+        </p:nvPicPr>
+        <p:blipFill>
+          <a:blip r:embed="rId2"/>
+          <a:stretch>
+            <a:fillRect/>
+          </a:stretch>
+        </p:blipFill>
         <p:spPr>
           <a:xfrm>
-            <a:off x="640080" y="1828800"/>
-            <a:ext cx="10911535" cy="4480560"/>
+            <a:off x="2242465" y="1783080"/>
+            <a:ext cx="7704021" cy="4754880"/>
           </a:xfrm>
           <a:prstGeom prst="rect">
             <a:avLst/>
           </a:prstGeom>
-          <a:noFill/>
         </p:spPr>
-        <p:txBody>
-          <a:bodyPr wrap="square">
-            <a:spAutoFit/>
-          </a:bodyPr>
-          <a:lstStyle/>
-          <a:p>
-            <a:pPr>
-              <a:spcAft>
-                <a:spcPts val="2000"/>
-              </a:spcAft>
-              <a:defRPr sz="2100" b="0">
-                <a:solidFill>
-                  <a:srgbClr val="1A1A1A"/>
-                </a:solidFill>
-                <a:latin typeface="Calibri"/>
-              </a:defRPr>
-            </a:pPr>
-            <a:r>
-              <a:t>An ESP32 has a single radio, so it is on exactly one channel at a time.</a:t>
-            </a:r>
-          </a:p>
-          <a:p>
-            <a:pPr>
-              <a:spcAft>
-                <a:spcPts val="2000"/>
-              </a:spcAft>
-              <a:defRPr sz="1900" b="0">
-                <a:solidFill>
-                  <a:srgbClr val="1A1A1A"/>
-                </a:solidFill>
-                <a:latin typeface="Calibri"/>
-              </a:defRPr>
-            </a:pPr>
-            <a:r>
-              <a:t>The gateway must join Wi-Fi for the cloud - and the access point decides which channel that is.</a:t>
-            </a:r>
-          </a:p>
-          <a:p>
-            <a:pPr>
-              <a:spcAft>
-                <a:spcPts val="2400"/>
-              </a:spcAft>
-              <a:defRPr sz="2100" b="1">
-                <a:solidFill>
-                  <a:srgbClr val="0B6B62"/>
-                </a:solidFill>
-                <a:latin typeface="Calibri"/>
-              </a:defRPr>
-            </a:pPr>
-            <a:r>
-              <a:t>So the channel is discovered at runtime, never chosen at design time.</a:t>
-            </a:r>
-          </a:p>
-          <a:p>
-            <a:pPr>
-              <a:spcAft>
-                <a:spcPts val="1200"/>
-              </a:spcAft>
-              <a:defRPr sz="1700" b="0">
-                <a:solidFill>
-                  <a:srgbClr val="1A1A1A"/>
-                </a:solidFill>
-                <a:latin typeface="Calibri"/>
-              </a:defRPr>
-            </a:pPr>
-            <a:r>
-              <a:t>-   The node is pinned to that channel by hand, and reads it back to confirm</a:t>
-            </a:r>
-          </a:p>
-          <a:p>
-            <a:pPr>
-              <a:spcAft>
-                <a:spcPts val="1200"/>
-              </a:spcAft>
-              <a:defRPr sz="1700" b="0">
-                <a:solidFill>
-                  <a:srgbClr val="1A1A1A"/>
-                </a:solidFill>
-                <a:latin typeface="Calibri"/>
-              </a:defRPr>
-            </a:pPr>
-            <a:r>
-              <a:t>-   The node never associates - association would let the two boards drift apart</a:t>
-            </a:r>
-          </a:p>
-          <a:p>
-            <a:pPr>
-              <a:spcAft>
-                <a:spcPts val="1200"/>
-              </a:spcAft>
-              <a:defRPr sz="1700" b="0">
-                <a:solidFill>
-                  <a:srgbClr val="1A1A1A"/>
-                </a:solidFill>
-                <a:latin typeface="Calibri"/>
-              </a:defRPr>
-            </a:pPr>
-            <a:r>
-              <a:t>-   Gateway must be flashed and running before the node can even be configured</a:t>
-            </a:r>
-          </a:p>
-        </p:txBody>
-      </p:sp>
+      </p:pic>
     </p:spTree>
   </p:cSld>
   <p:clrMapOvr>
@@ -7410,7 +7574,7 @@
               </a:defRPr>
             </a:pPr>
             <a:r>
-              <a:t>26 BYTES</a:t>
+              <a:t>THE GOVERNING CONSTRAINT</a:t>
             </a:r>
           </a:p>
           <a:p>
@@ -7426,7 +7590,7 @@
               </a:defRPr>
             </a:pPr>
             <a:r>
-              <a:t>Packet design</a:t>
+              <a:t>One radio, one channel</a:t>
             </a:r>
           </a:p>
         </p:txBody>
@@ -7484,7 +7648,7 @@
         <p:spPr>
           <a:xfrm>
             <a:off x="640080" y="1828800"/>
-            <a:ext cx="5852160" cy="4480560"/>
+            <a:ext cx="9509760" cy="4480560"/>
           </a:xfrm>
           <a:prstGeom prst="rect">
             <a:avLst/>
@@ -7498,201 +7662,116 @@
           <a:lstStyle/>
           <a:p>
             <a:pPr>
-              <a:spcAft>
-                <a:spcPts val="900"/>
-              </a:spcAft>
-              <a:defRPr sz="1400" b="0">
+              <a:lnSpc>
+                <a:spcPct val="118000"/>
+              </a:lnSpc>
+              <a:spcAft>
+                <a:spcPts val="1100"/>
+              </a:spcAft>
+              <a:defRPr sz="2100" b="0">
                 <a:solidFill>
                   <a:srgbClr val="1A1A1A"/>
                 </a:solidFill>
-                <a:latin typeface="Consolas"/>
-              </a:defRPr>
-            </a:pPr>
-            <a:r>
-              <a:t>version, msg_type      protocol evolution</a:t>
-            </a:r>
-          </a:p>
-          <a:p>
-            <a:pPr>
-              <a:spcAft>
-                <a:spcPts val="900"/>
-              </a:spcAft>
-              <a:defRPr sz="1400" b="0">
+                <a:latin typeface="Calibri"/>
+              </a:defRPr>
+            </a:pPr>
+            <a:r>
+              <a:t>An ESP32 has a single radio, so it is on exactly one channel at a time.</a:t>
+            </a:r>
+          </a:p>
+          <a:p>
+            <a:pPr>
+              <a:lnSpc>
+                <a:spcPct val="118000"/>
+              </a:lnSpc>
+              <a:spcAft>
+                <a:spcPts val="1100"/>
+              </a:spcAft>
+              <a:defRPr sz="1900" b="0">
                 <a:solidFill>
                   <a:srgbClr val="1A1A1A"/>
                 </a:solidFill>
-                <a:latin typeface="Consolas"/>
-              </a:defRPr>
-            </a:pPr>
-            <a:r>
-              <a:t>src_id, dst_id         addressing, not broadcast</a:t>
-            </a:r>
-          </a:p>
-          <a:p>
-            <a:pPr>
-              <a:spcAft>
-                <a:spcPts val="900"/>
-              </a:spcAft>
-              <a:defRPr sz="1400" b="0">
+                <a:latin typeface="Calibri"/>
+              </a:defRPr>
+            </a:pPr>
+            <a:r>
+              <a:t>The gateway must join Wi-Fi for the cloud - and the access point decides which channel that is.</a:t>
+            </a:r>
+          </a:p>
+          <a:p>
+            <a:pPr>
+              <a:lnSpc>
+                <a:spcPct val="118000"/>
+              </a:lnSpc>
+              <a:spcAft>
+                <a:spcPts val="1100"/>
+              </a:spcAft>
+              <a:defRPr sz="2100" b="1">
+                <a:solidFill>
+                  <a:srgbClr val="0B6B62"/>
+                </a:solidFill>
+                <a:latin typeface="Calibri"/>
+              </a:defRPr>
+            </a:pPr>
+            <a:r>
+              <a:t>So the channel is discovered at runtime, never chosen at design time.</a:t>
+            </a:r>
+          </a:p>
+          <a:p>
+            <a:pPr>
+              <a:lnSpc>
+                <a:spcPct val="118000"/>
+              </a:lnSpc>
+              <a:spcAft>
+                <a:spcPts val="1100"/>
+              </a:spcAft>
+              <a:defRPr sz="1700" b="0">
                 <a:solidFill>
                   <a:srgbClr val="1A1A1A"/>
                 </a:solidFill>
-                <a:latin typeface="Consolas"/>
-              </a:defRPr>
-            </a:pPr>
-            <a:r>
-              <a:t>boot_id                random per power-up</a:t>
-            </a:r>
-          </a:p>
-          <a:p>
-            <a:pPr>
-              <a:spcAft>
-                <a:spcPts val="900"/>
-              </a:spcAft>
-              <a:defRPr sz="1400" b="0">
+                <a:latin typeface="Calibri"/>
+              </a:defRPr>
+            </a:pPr>
+            <a:r>
+              <a:t>-   The node is pinned to that channel by hand, and reads it back to confirm</a:t>
+            </a:r>
+          </a:p>
+          <a:p>
+            <a:pPr>
+              <a:lnSpc>
+                <a:spcPct val="118000"/>
+              </a:lnSpc>
+              <a:spcAft>
+                <a:spcPts val="1100"/>
+              </a:spcAft>
+              <a:defRPr sz="1700" b="0">
                 <a:solidFill>
                   <a:srgbClr val="1A1A1A"/>
                 </a:solidFill>
-                <a:latin typeface="Consolas"/>
-              </a:defRPr>
-            </a:pPr>
-            <a:r>
-              <a:t>seq                    ordering within a session</a:t>
-            </a:r>
-          </a:p>
-          <a:p>
-            <a:pPr>
-              <a:spcAft>
-                <a:spcPts val="900"/>
-              </a:spcAft>
-              <a:defRPr sz="1400" b="0">
+                <a:latin typeface="Calibri"/>
+              </a:defRPr>
+            </a:pPr>
+            <a:r>
+              <a:t>-   The node never associates - association would let the two boards drift apart</a:t>
+            </a:r>
+          </a:p>
+          <a:p>
+            <a:pPr>
+              <a:lnSpc>
+                <a:spcPct val="118000"/>
+              </a:lnSpc>
+              <a:spcAft>
+                <a:spcPts val="1100"/>
+              </a:spcAft>
+              <a:defRPr sz="1700" b="0">
                 <a:solidFill>
                   <a:srgbClr val="1A1A1A"/>
                 </a:solidFill>
-                <a:latin typeface="Consolas"/>
-              </a:defRPr>
-            </a:pPr>
-            <a:r>
-              <a:t>ttl, hop_count         carried, never decremented</a:t>
-            </a:r>
-          </a:p>
-          <a:p>
-            <a:pPr>
-              <a:spcAft>
-                <a:spcPts val="900"/>
-              </a:spcAft>
-              <a:defRPr sz="1400" b="0">
-                <a:solidFill>
-                  <a:srgbClr val="1A1A1A"/>
-                </a:solidFill>
-                <a:latin typeface="Consolas"/>
-              </a:defRPr>
-            </a:pPr>
-            <a:r>
-              <a:t>temperature, humidity  the payload</a:t>
-            </a:r>
-          </a:p>
-          <a:p>
-            <a:pPr>
-              <a:spcAft>
-                <a:spcPts val="900"/>
-              </a:spcAft>
-              <a:defRPr sz="1400" b="0">
-                <a:solidFill>
-                  <a:srgbClr val="1A1A1A"/>
-                </a:solidFill>
-                <a:latin typeface="Consolas"/>
-              </a:defRPr>
-            </a:pPr>
-            <a:r>
-              <a:t>uptime_ms              sender liveness</a:t>
-            </a:r>
-          </a:p>
-        </p:txBody>
-      </p:sp>
-      <p:sp>
-        <p:nvSpPr>
-          <p:cNvPr id="5" name="TextBox 4"/>
-          <p:cNvSpPr txBox="1"/>
-          <p:nvPr/>
-        </p:nvSpPr>
-        <p:spPr>
-          <a:xfrm>
-            <a:off x="6766560" y="1828800"/>
-            <a:ext cx="4754880" cy="4480560"/>
-          </a:xfrm>
-          <a:prstGeom prst="rect">
-            <a:avLst/>
-          </a:prstGeom>
-          <a:noFill/>
-        </p:spPr>
-        <p:txBody>
-          <a:bodyPr wrap="square">
-            <a:spAutoFit/>
-          </a:bodyPr>
-          <a:lstStyle/>
-          <a:p>
-            <a:pPr>
-              <a:spcAft>
-                <a:spcPts val="1000"/>
-              </a:spcAft>
-              <a:defRPr sz="1900" b="1">
-                <a:solidFill>
-                  <a:srgbClr val="0B6B62"/>
-                </a:solidFill>
-                <a:latin typeface="Calibri"/>
-              </a:defRPr>
-            </a:pPr>
-            <a:r>
-              <a:t>Why no checksum?</a:t>
-            </a:r>
-          </a:p>
-          <a:p>
-            <a:pPr>
-              <a:spcAft>
-                <a:spcPts val="2000"/>
-              </a:spcAft>
-              <a:defRPr sz="1600" b="0">
-                <a:solidFill>
-                  <a:srgbClr val="1A1A1A"/>
-                </a:solidFill>
-                <a:latin typeface="Calibri"/>
-              </a:defRPr>
-            </a:pPr>
-            <a:r>
-              <a:t>802.11 already CRC-checks every delivered frame. A checksum would duplicate hardware work - and would not authenticate anything.</a:t>
-            </a:r>
-          </a:p>
-          <a:p>
-            <a:pPr>
-              <a:spcAft>
-                <a:spcPts val="800"/>
-              </a:spcAft>
-              <a:defRPr sz="1400" b="1">
-                <a:solidFill>
-                  <a:srgbClr val="1A1A1A"/>
-                </a:solidFill>
-                <a:latin typeface="Calibri"/>
-              </a:defRPr>
-            </a:pPr>
-            <a:r>
-              <a:t>static_assert(sizeof == 26)</a:t>
-            </a:r>
-          </a:p>
-          <a:p>
-            <a:pPr>
-              <a:spcAft>
-                <a:spcPts val="800"/>
-              </a:spcAft>
-              <a:defRPr sz="1500" b="0">
-                <a:solidFill>
-                  <a:srgbClr val="606060"/>
-                </a:solidFill>
-                <a:latin typeface="Calibri"/>
-              </a:defRPr>
-            </a:pPr>
-            <a:r>
-              <a:t>Pins the size in both sketches. It constrains layout but does not prove field agreement - fields could be reordered and still pass.</a:t>
+                <a:latin typeface="Calibri"/>
+              </a:defRPr>
+            </a:pPr>
+            <a:r>
+              <a:t>-   Gateway must be flashed and running before the node can even be configured</a:t>
             </a:r>
           </a:p>
         </p:txBody>
@@ -7749,7 +7828,7 @@
               </a:defRPr>
             </a:pPr>
             <a:r>
-              <a:t>SOFTWARE</a:t>
+              <a:t>26 BYTES</a:t>
             </a:r>
           </a:p>
           <a:p>
@@ -7765,7 +7844,7 @@
               </a:defRPr>
             </a:pPr>
             <a:r>
-              <a:t>Deduplication</a:t>
+              <a:t>Packet design</a:t>
             </a:r>
           </a:p>
         </p:txBody>
@@ -7823,7 +7902,7 @@
         <p:spPr>
           <a:xfrm>
             <a:off x="640080" y="1828800"/>
-            <a:ext cx="10911535" cy="4480560"/>
+            <a:ext cx="5852160" cy="4480560"/>
           </a:xfrm>
           <a:prstGeom prst="rect">
             <a:avLst/>
@@ -7837,10 +7916,169 @@
           <a:lstStyle/>
           <a:p>
             <a:pPr>
-              <a:spcAft>
-                <a:spcPts val="2200"/>
-              </a:spcAft>
-              <a:defRPr sz="2200" b="1">
+              <a:lnSpc>
+                <a:spcPct val="118000"/>
+              </a:lnSpc>
+              <a:spcAft>
+                <a:spcPts val="1100"/>
+              </a:spcAft>
+              <a:defRPr sz="1400" b="0">
+                <a:solidFill>
+                  <a:srgbClr val="1A1A1A"/>
+                </a:solidFill>
+                <a:latin typeface="Consolas"/>
+              </a:defRPr>
+            </a:pPr>
+            <a:r>
+              <a:t>version, msg_type      protocol evolution</a:t>
+            </a:r>
+          </a:p>
+          <a:p>
+            <a:pPr>
+              <a:lnSpc>
+                <a:spcPct val="118000"/>
+              </a:lnSpc>
+              <a:spcAft>
+                <a:spcPts val="1100"/>
+              </a:spcAft>
+              <a:defRPr sz="1400" b="0">
+                <a:solidFill>
+                  <a:srgbClr val="1A1A1A"/>
+                </a:solidFill>
+                <a:latin typeface="Consolas"/>
+              </a:defRPr>
+            </a:pPr>
+            <a:r>
+              <a:t>src_id, dst_id         addressing, not broadcast</a:t>
+            </a:r>
+          </a:p>
+          <a:p>
+            <a:pPr>
+              <a:lnSpc>
+                <a:spcPct val="118000"/>
+              </a:lnSpc>
+              <a:spcAft>
+                <a:spcPts val="1100"/>
+              </a:spcAft>
+              <a:defRPr sz="1400" b="0">
+                <a:solidFill>
+                  <a:srgbClr val="1A1A1A"/>
+                </a:solidFill>
+                <a:latin typeface="Consolas"/>
+              </a:defRPr>
+            </a:pPr>
+            <a:r>
+              <a:t>boot_id                random per power-up</a:t>
+            </a:r>
+          </a:p>
+          <a:p>
+            <a:pPr>
+              <a:lnSpc>
+                <a:spcPct val="118000"/>
+              </a:lnSpc>
+              <a:spcAft>
+                <a:spcPts val="1100"/>
+              </a:spcAft>
+              <a:defRPr sz="1400" b="0">
+                <a:solidFill>
+                  <a:srgbClr val="1A1A1A"/>
+                </a:solidFill>
+                <a:latin typeface="Consolas"/>
+              </a:defRPr>
+            </a:pPr>
+            <a:r>
+              <a:t>seq                    ordering within a session</a:t>
+            </a:r>
+          </a:p>
+          <a:p>
+            <a:pPr>
+              <a:lnSpc>
+                <a:spcPct val="118000"/>
+              </a:lnSpc>
+              <a:spcAft>
+                <a:spcPts val="1100"/>
+              </a:spcAft>
+              <a:defRPr sz="1400" b="0">
+                <a:solidFill>
+                  <a:srgbClr val="1A1A1A"/>
+                </a:solidFill>
+                <a:latin typeface="Consolas"/>
+              </a:defRPr>
+            </a:pPr>
+            <a:r>
+              <a:t>ttl, hop_count         carried, never decremented</a:t>
+            </a:r>
+          </a:p>
+          <a:p>
+            <a:pPr>
+              <a:lnSpc>
+                <a:spcPct val="118000"/>
+              </a:lnSpc>
+              <a:spcAft>
+                <a:spcPts val="1100"/>
+              </a:spcAft>
+              <a:defRPr sz="1400" b="0">
+                <a:solidFill>
+                  <a:srgbClr val="1A1A1A"/>
+                </a:solidFill>
+                <a:latin typeface="Consolas"/>
+              </a:defRPr>
+            </a:pPr>
+            <a:r>
+              <a:t>temperature, humidity  the payload</a:t>
+            </a:r>
+          </a:p>
+          <a:p>
+            <a:pPr>
+              <a:lnSpc>
+                <a:spcPct val="118000"/>
+              </a:lnSpc>
+              <a:spcAft>
+                <a:spcPts val="1100"/>
+              </a:spcAft>
+              <a:defRPr sz="1400" b="0">
+                <a:solidFill>
+                  <a:srgbClr val="1A1A1A"/>
+                </a:solidFill>
+                <a:latin typeface="Consolas"/>
+              </a:defRPr>
+            </a:pPr>
+            <a:r>
+              <a:t>uptime_ms              sender liveness</a:t>
+            </a:r>
+          </a:p>
+        </p:txBody>
+      </p:sp>
+      <p:sp>
+        <p:nvSpPr>
+          <p:cNvPr id="5" name="TextBox 4"/>
+          <p:cNvSpPr txBox="1"/>
+          <p:nvPr/>
+        </p:nvSpPr>
+        <p:spPr>
+          <a:xfrm>
+            <a:off x="6766560" y="1828800"/>
+            <a:ext cx="4754880" cy="4480560"/>
+          </a:xfrm>
+          <a:prstGeom prst="rect">
+            <a:avLst/>
+          </a:prstGeom>
+          <a:noFill/>
+        </p:spPr>
+        <p:txBody>
+          <a:bodyPr wrap="square">
+            <a:spAutoFit/>
+          </a:bodyPr>
+          <a:lstStyle/>
+          <a:p>
+            <a:pPr>
+              <a:lnSpc>
+                <a:spcPct val="118000"/>
+              </a:lnSpc>
+              <a:spcAft>
+                <a:spcPts val="1100"/>
+              </a:spcAft>
+              <a:defRPr sz="1900" b="1">
                 <a:solidFill>
                   <a:srgbClr val="0B6B62"/>
                 </a:solidFill>
@@ -7848,15 +8086,18 @@
               </a:defRPr>
             </a:pPr>
             <a:r>
-              <a:t>Key:   (src_id, boot_id, seq)</a:t>
-            </a:r>
-          </a:p>
-          <a:p>
-            <a:pPr>
-              <a:spcAft>
-                <a:spcPts val="1800"/>
-              </a:spcAft>
-              <a:defRPr sz="1800" b="0">
+              <a:t>Why no checksum?</a:t>
+            </a:r>
+          </a:p>
+          <a:p>
+            <a:pPr>
+              <a:lnSpc>
+                <a:spcPct val="118000"/>
+              </a:lnSpc>
+              <a:spcAft>
+                <a:spcPts val="1100"/>
+              </a:spcAft>
+              <a:defRPr sz="1600" b="0">
                 <a:solidFill>
                   <a:srgbClr val="1A1A1A"/>
                 </a:solidFill>
@@ -7864,15 +8105,18 @@
               </a:defRPr>
             </a:pPr>
             <a:r>
-              <a:t>Strict last-sequence-wins. Anything not newer than the highest already accepted in this session is a duplicate.</a:t>
-            </a:r>
-          </a:p>
-          <a:p>
-            <a:pPr>
-              <a:spcAft>
-                <a:spcPts val="1000"/>
-              </a:spcAft>
-              <a:defRPr sz="1900" b="1">
+              <a:t>802.11 already CRC-checks every delivered frame. A checksum would duplicate hardware work - and would not authenticate anything.</a:t>
+            </a:r>
+          </a:p>
+          <a:p>
+            <a:pPr>
+              <a:lnSpc>
+                <a:spcPct val="118000"/>
+              </a:lnSpc>
+              <a:spcAft>
+                <a:spcPts val="1100"/>
+              </a:spcAft>
+              <a:defRPr sz="1400" b="1">
                 <a:solidFill>
                   <a:srgbClr val="1A1A1A"/>
                 </a:solidFill>
@@ -7880,31 +8124,18 @@
               </a:defRPr>
             </a:pPr>
             <a:r>
-              <a:t>boot_id is randomised every power-up.</a:t>
-            </a:r>
-          </a:p>
-          <a:p>
-            <a:pPr>
-              <a:spcAft>
-                <a:spcPts val="1800"/>
-              </a:spcAft>
-              <a:defRPr sz="1700" b="0">
-                <a:solidFill>
-                  <a:srgbClr val="1A1A1A"/>
-                </a:solidFill>
-                <a:latin typeface="Calibri"/>
-              </a:defRPr>
-            </a:pPr>
-            <a:r>
-              <a:t>Without it, a node restart looks identical to a replay: every packet arrives with a sequence below the stored baseline and is rejected forever. The node never comes back.</a:t>
-            </a:r>
-          </a:p>
-          <a:p>
-            <a:pPr>
-              <a:spcAft>
-                <a:spcPts val="0"/>
-              </a:spcAft>
-              <a:defRPr sz="1700" b="0">
+              <a:t>static_assert(sizeof == 26)</a:t>
+            </a:r>
+          </a:p>
+          <a:p>
+            <a:pPr>
+              <a:lnSpc>
+                <a:spcPct val="118000"/>
+              </a:lnSpc>
+              <a:spcAft>
+                <a:spcPts val="1100"/>
+              </a:spcAft>
+              <a:defRPr sz="1500" b="0">
                 <a:solidFill>
                   <a:srgbClr val="606060"/>
                 </a:solidFill>
@@ -7912,7 +8143,7 @@
               </a:defRPr>
             </a:pPr>
             <a:r>
-              <a:t>A forward jump is a gap, not a duplicate - those packets were lost, not repeated. A receiver demanding contiguous sequences would deadlock on the first loss.</a:t>
+              <a:t>Pins the size in both sketches. It constrains layout but does not prove field agreement - fields could be reordered and still pass.</a:t>
             </a:r>
           </a:p>
         </p:txBody>
@@ -7969,7 +8200,7 @@
               </a:defRPr>
             </a:pPr>
             <a:r>
-              <a:t>THREAT MODEL</a:t>
+              <a:t>SOFTWARE</a:t>
             </a:r>
           </a:p>
           <a:p>
@@ -7985,7 +8216,7 @@
               </a:defRPr>
             </a:pPr>
             <a:r>
-              <a:t>Security</a:t>
+              <a:t>Deduplication</a:t>
             </a:r>
           </a:p>
         </p:txBody>
@@ -8042,8 +8273,8 @@
         </p:nvSpPr>
         <p:spPr>
           <a:xfrm>
-            <a:off x="640080" y="1783080"/>
-            <a:ext cx="5760720" cy="4526280"/>
+            <a:off x="640080" y="1828800"/>
+            <a:ext cx="9509760" cy="4480560"/>
           </a:xfrm>
           <a:prstGeom prst="rect">
             <a:avLst/>
@@ -8057,42 +8288,70 @@
           <a:lstStyle/>
           <a:p>
             <a:pPr>
-              <a:spcAft>
-                <a:spcPts val="1000"/>
+              <a:lnSpc>
+                <a:spcPct val="118000"/>
+              </a:lnSpc>
+              <a:spcAft>
+                <a:spcPts val="1100"/>
+              </a:spcAft>
+              <a:defRPr sz="2200" b="1">
+                <a:solidFill>
+                  <a:srgbClr val="0B6B62"/>
+                </a:solidFill>
+                <a:latin typeface="Calibri"/>
+              </a:defRPr>
+            </a:pPr>
+            <a:r>
+              <a:t>Key:   (src_id, boot_id, seq)</a:t>
+            </a:r>
+          </a:p>
+          <a:p>
+            <a:pPr>
+              <a:lnSpc>
+                <a:spcPct val="118000"/>
+              </a:lnSpc>
+              <a:spcAft>
+                <a:spcPts val="1100"/>
+              </a:spcAft>
+              <a:defRPr sz="1800" b="0">
+                <a:solidFill>
+                  <a:srgbClr val="1A1A1A"/>
+                </a:solidFill>
+                <a:latin typeface="Calibri"/>
+              </a:defRPr>
+            </a:pPr>
+            <a:r>
+              <a:t>Strict last-sequence-wins. Anything not newer than the highest already accepted in this session is a duplicate.</a:t>
+            </a:r>
+          </a:p>
+          <a:p>
+            <a:pPr>
+              <a:lnSpc>
+                <a:spcPct val="118000"/>
+              </a:lnSpc>
+              <a:spcAft>
+                <a:spcPts val="1100"/>
               </a:spcAft>
               <a:defRPr sz="1900" b="1">
                 <a:solidFill>
-                  <a:srgbClr val="0B6B62"/>
-                </a:solidFill>
-                <a:latin typeface="Calibri"/>
-              </a:defRPr>
-            </a:pPr>
-            <a:r>
-              <a:t>Defended</a:t>
-            </a:r>
-          </a:p>
-          <a:p>
-            <a:pPr>
-              <a:spcAft>
-                <a:spcPts val="900"/>
-              </a:spcAft>
-              <a:defRPr sz="1600" b="0">
-                <a:solidFill>
                   <a:srgbClr val="1A1A1A"/>
                 </a:solidFill>
                 <a:latin typeface="Calibri"/>
               </a:defRPr>
             </a:pPr>
             <a:r>
-              <a:t>+   Length, version, type, addressing, range validation</a:t>
-            </a:r>
-          </a:p>
-          <a:p>
-            <a:pPr>
-              <a:spcAft>
-                <a:spcPts val="900"/>
-              </a:spcAft>
-              <a:defRPr sz="1600" b="0">
+              <a:t>boot_id is randomised every power-up.</a:t>
+            </a:r>
+          </a:p>
+          <a:p>
+            <a:pPr>
+              <a:lnSpc>
+                <a:spcPct val="118000"/>
+              </a:lnSpc>
+              <a:spcAft>
+                <a:spcPts val="1100"/>
+              </a:spcAft>
+              <a:defRPr sz="1700" b="0">
                 <a:solidFill>
                   <a:srgbClr val="1A1A1A"/>
                 </a:solidFill>
@@ -8100,197 +8359,26 @@
               </a:defRPr>
             </a:pPr>
             <a:r>
-              <a:t>+   Replay rejection via sequence numbers</a:t>
-            </a:r>
-          </a:p>
-          <a:p>
-            <a:pPr>
-              <a:spcAft>
-                <a:spcPts val="900"/>
-              </a:spcAft>
-              <a:defRPr sz="1600" b="0">
-                <a:solidFill>
-                  <a:srgbClr val="1A1A1A"/>
-                </a:solidFill>
-                <a:latin typeface="Calibri"/>
-              </a:defRPr>
-            </a:pPr>
-            <a:r>
-              <a:t>+   ESP-NOW encryption + sender auth - PMK + per-peer LMK</a:t>
-            </a:r>
-          </a:p>
-          <a:p>
-            <a:pPr>
-              <a:spcAft>
-                <a:spcPts val="900"/>
-              </a:spcAft>
-              <a:defRPr sz="1600" b="0">
-                <a:solidFill>
-                  <a:srgbClr val="1A1A1A"/>
-                </a:solidFill>
-                <a:latin typeface="Calibri"/>
-              </a:defRPr>
-            </a:pPr>
-            <a:r>
-              <a:t>+   Sender MAC filtering (defence in depth)</a:t>
-            </a:r>
-          </a:p>
-          <a:p>
-            <a:pPr>
-              <a:spcAft>
-                <a:spcPts val="900"/>
-              </a:spcAft>
-              <a:defRPr sz="1600" b="0">
-                <a:solidFill>
-                  <a:srgbClr val="1A1A1A"/>
-                </a:solidFill>
-                <a:latin typeface="Calibri"/>
-              </a:defRPr>
-            </a:pPr>
-            <a:r>
-              <a:t>+   Credentials excluded from version control</a:t>
-            </a:r>
-          </a:p>
-        </p:txBody>
-      </p:sp>
-      <p:sp>
-        <p:nvSpPr>
-          <p:cNvPr id="5" name="TextBox 4"/>
-          <p:cNvSpPr txBox="1"/>
-          <p:nvPr/>
-        </p:nvSpPr>
-        <p:spPr>
-          <a:xfrm>
-            <a:off x="6492240" y="1783080"/>
-            <a:ext cx="5029200" cy="4526280"/>
-          </a:xfrm>
-          <a:prstGeom prst="rect">
-            <a:avLst/>
-          </a:prstGeom>
-          <a:noFill/>
-        </p:spPr>
-        <p:txBody>
-          <a:bodyPr wrap="square">
-            <a:spAutoFit/>
-          </a:bodyPr>
-          <a:lstStyle/>
-          <a:p>
-            <a:pPr>
-              <a:spcAft>
-                <a:spcPts val="1000"/>
-              </a:spcAft>
-              <a:defRPr sz="1900" b="1">
-                <a:solidFill>
-                  <a:srgbClr val="A83A1F"/>
-                </a:solidFill>
-                <a:latin typeface="Calibri"/>
-              </a:defRPr>
-            </a:pPr>
-            <a:r>
-              <a:t>Not defended</a:t>
-            </a:r>
-          </a:p>
-          <a:p>
-            <a:pPr>
-              <a:spcAft>
-                <a:spcPts val="900"/>
-              </a:spcAft>
-              <a:defRPr sz="1600" b="0">
-                <a:solidFill>
-                  <a:srgbClr val="1A1A1A"/>
-                </a:solidFill>
-                <a:latin typeface="Calibri"/>
-              </a:defRPr>
-            </a:pPr>
-            <a:r>
-              <a:t>-   MQTT without TLS - token in clear text</a:t>
-            </a:r>
-          </a:p>
-          <a:p>
-            <a:pPr>
-              <a:spcAft>
-                <a:spcPts val="900"/>
-              </a:spcAft>
-              <a:defRPr sz="1600" b="0">
-                <a:solidFill>
-                  <a:srgbClr val="1A1A1A"/>
-                </a:solidFill>
-                <a:latin typeface="Calibri"/>
-              </a:defRPr>
-            </a:pPr>
-            <a:r>
-              <a:t>-   RADIUS certificate not validated</a:t>
-            </a:r>
-          </a:p>
-          <a:p>
-            <a:pPr>
-              <a:spcAft>
-                <a:spcPts val="900"/>
-              </a:spcAft>
-              <a:defRPr sz="1600" b="0">
-                <a:solidFill>
-                  <a:srgbClr val="1A1A1A"/>
-                </a:solidFill>
-                <a:latin typeface="Calibri"/>
-              </a:defRPr>
-            </a:pPr>
-            <a:r>
-              <a:t>-   Credentials readable from flash over USB</a:t>
-            </a:r>
-          </a:p>
-        </p:txBody>
-      </p:sp>
-      <p:sp>
-        <p:nvSpPr>
-          <p:cNvPr id="6" name="TextBox 5"/>
-          <p:cNvSpPr txBox="1"/>
-          <p:nvPr/>
-        </p:nvSpPr>
-        <p:spPr>
-          <a:xfrm>
-            <a:off x="640080" y="4892040"/>
-            <a:ext cx="10911535" cy="1463040"/>
-          </a:xfrm>
-          <a:prstGeom prst="rect">
-            <a:avLst/>
-          </a:prstGeom>
-          <a:noFill/>
-        </p:spPr>
-        <p:txBody>
-          <a:bodyPr wrap="square">
-            <a:spAutoFit/>
-          </a:bodyPr>
-          <a:lstStyle/>
-          <a:p>
-            <a:pPr>
-              <a:spcAft>
-                <a:spcPts val="800"/>
-              </a:spcAft>
-              <a:defRPr sz="1700" b="1">
-                <a:solidFill>
-                  <a:srgbClr val="A83A1F"/>
-                </a:solidFill>
-                <a:latin typeface="Calibri"/>
-              </a:defRPr>
-            </a:pPr>
-            <a:r>
-              <a:t>The interesting finding</a:t>
-            </a:r>
-          </a:p>
-          <a:p>
-            <a:pPr>
-              <a:spcAft>
-                <a:spcPts val="0"/>
-              </a:spcAft>
-              <a:defRPr sz="1500" b="0">
-                <a:solidFill>
-                  <a:srgbClr val="1A1A1A"/>
-                </a:solidFill>
-                <a:latin typeface="Calibri"/>
-              </a:defRPr>
-            </a:pPr>
-            <a:r>
-              <a:t>src_id is a claim, not proof. A forged packet with a high sequence number under the live boot_id advances the dedup baseline - after which every genuine packet is rejected until the node reboots. Replay protection becomes the attack surface. Fixed by encrypting the link: a MAC filter was not enough, because the attacker controls the value being filtered on.</a:t>
+              <a:t>Without it, a node restart looks identical to a replay: every packet arrives with a sequence below the stored baseline and is rejected forever. The node never comes back.</a:t>
+            </a:r>
+          </a:p>
+          <a:p>
+            <a:pPr>
+              <a:lnSpc>
+                <a:spcPct val="118000"/>
+              </a:lnSpc>
+              <a:spcAft>
+                <a:spcPts val="1100"/>
+              </a:spcAft>
+              <a:defRPr sz="1700" b="0">
+                <a:solidFill>
+                  <a:srgbClr val="606060"/>
+                </a:solidFill>
+                <a:latin typeface="Calibri"/>
+              </a:defRPr>
+            </a:pPr>
+            <a:r>
+              <a:t>A forward jump is a gap, not a duplicate - those packets were lost, not repeated. A receiver demanding contiguous sequences would deadlock on the first loss.</a:t>
             </a:r>
           </a:p>
         </p:txBody>
@@ -8347,7 +8435,7 @@
               </a:defRPr>
             </a:pPr>
             <a:r>
-              <a:t>MEASURED</a:t>
+              <a:t>THREAT MODEL</a:t>
             </a:r>
           </a:p>
           <a:p>
@@ -8363,7 +8451,7 @@
               </a:defRPr>
             </a:pPr>
             <a:r>
-              <a:t>Results</a:t>
+              <a:t>Security</a:t>
             </a:r>
           </a:p>
         </p:txBody>
@@ -8420,8 +8508,8 @@
         </p:nvSpPr>
         <p:spPr>
           <a:xfrm>
-            <a:off x="640080" y="1920240"/>
-            <a:ext cx="10911535" cy="4389120"/>
+            <a:off x="640080" y="1783080"/>
+            <a:ext cx="5760720" cy="4526280"/>
           </a:xfrm>
           <a:prstGeom prst="rect">
             <a:avLst/>
@@ -8435,10 +8523,32 @@
           <a:lstStyle/>
           <a:p>
             <a:pPr>
-              <a:spcAft>
-                <a:spcPts val="1600"/>
-              </a:spcAft>
-              <a:defRPr sz="2000" b="1">
+              <a:lnSpc>
+                <a:spcPct val="118000"/>
+              </a:lnSpc>
+              <a:spcAft>
+                <a:spcPts val="1100"/>
+              </a:spcAft>
+              <a:defRPr sz="1900" b="1">
+                <a:solidFill>
+                  <a:srgbClr val="0B6B62"/>
+                </a:solidFill>
+                <a:latin typeface="Calibri"/>
+              </a:defRPr>
+            </a:pPr>
+            <a:r>
+              <a:t>Defended</a:t>
+            </a:r>
+          </a:p>
+          <a:p>
+            <a:pPr>
+              <a:lnSpc>
+                <a:spcPct val="118000"/>
+              </a:lnSpc>
+              <a:spcAft>
+                <a:spcPts val="1100"/>
+              </a:spcAft>
+              <a:defRPr sz="1600" b="0">
                 <a:solidFill>
                   <a:srgbClr val="1A1A1A"/>
                 </a:solidFill>
@@ -8446,15 +8556,18 @@
               </a:defRPr>
             </a:pPr>
             <a:r>
-              <a:t>634        packets received and validated</a:t>
-            </a:r>
-          </a:p>
-          <a:p>
-            <a:pPr>
-              <a:spcAft>
-                <a:spcPts val="1600"/>
-              </a:spcAft>
-              <a:defRPr sz="2000" b="1">
+              <a:t>+   Length, version, type, addressing, range validation</a:t>
+            </a:r>
+          </a:p>
+          <a:p>
+            <a:pPr>
+              <a:lnSpc>
+                <a:spcPct val="118000"/>
+              </a:lnSpc>
+              <a:spcAft>
+                <a:spcPts val="1100"/>
+              </a:spcAft>
+              <a:defRPr sz="1600" b="0">
                 <a:solidFill>
                   <a:srgbClr val="1A1A1A"/>
                 </a:solidFill>
@@ -8462,15 +8575,18 @@
               </a:defRPr>
             </a:pPr>
             <a:r>
-              <a:t>82        duplicates rejected</a:t>
-            </a:r>
-          </a:p>
-          <a:p>
-            <a:pPr>
-              <a:spcAft>
-                <a:spcPts val="1600"/>
-              </a:spcAft>
-              <a:defRPr sz="2000" b="1">
+              <a:t>+   Replay rejection via sequence numbers</a:t>
+            </a:r>
+          </a:p>
+          <a:p>
+            <a:pPr>
+              <a:lnSpc>
+                <a:spcPct val="118000"/>
+              </a:lnSpc>
+              <a:spcAft>
+                <a:spcPts val="1100"/>
+              </a:spcAft>
+              <a:defRPr sz="1600" b="0">
                 <a:solidFill>
                   <a:srgbClr val="1A1A1A"/>
                 </a:solidFill>
@@ -8478,15 +8594,18 @@
               </a:defRPr>
             </a:pPr>
             <a:r>
-              <a:t>0        invalid packets - both boards agree on the 26-byte layout</a:t>
-            </a:r>
-          </a:p>
-          <a:p>
-            <a:pPr>
-              <a:spcAft>
-                <a:spcPts val="1600"/>
-              </a:spcAft>
-              <a:defRPr sz="2000" b="1">
+              <a:t>+   ESP-NOW encryption + sender auth - PMK + per-peer LMK</a:t>
+            </a:r>
+          </a:p>
+          <a:p>
+            <a:pPr>
+              <a:lnSpc>
+                <a:spcPct val="118000"/>
+              </a:lnSpc>
+              <a:spcAft>
+                <a:spcPts val="1100"/>
+              </a:spcAft>
+              <a:defRPr sz="1600" b="0">
                 <a:solidFill>
                   <a:srgbClr val="1A1A1A"/>
                 </a:solidFill>
@@ -8494,23 +8613,186 @@
               </a:defRPr>
             </a:pPr>
             <a:r>
-              <a:t>14 / 14        acceptance criteria evidenced</a:t>
-            </a:r>
-          </a:p>
-          <a:p>
-            <a:pPr>
-              <a:spcAft>
-                <a:spcPts val="0"/>
+              <a:t>+   Sender MAC filtering (defence in depth)</a:t>
+            </a:r>
+          </a:p>
+          <a:p>
+            <a:pPr>
+              <a:lnSpc>
+                <a:spcPct val="118000"/>
+              </a:lnSpc>
+              <a:spcAft>
+                <a:spcPts val="1100"/>
               </a:spcAft>
               <a:defRPr sz="1600" b="0">
                 <a:solidFill>
-                  <a:srgbClr val="606060"/>
-                </a:solidFill>
-                <a:latin typeface="Calibri"/>
-              </a:defRPr>
-            </a:pPr>
-            <a:r>
-              <a:t>Node offline detection latches at 20 s; last known value keeps publishing while node1_online carries the truth about freshness.</a:t>
+                  <a:srgbClr val="1A1A1A"/>
+                </a:solidFill>
+                <a:latin typeface="Calibri"/>
+              </a:defRPr>
+            </a:pPr>
+            <a:r>
+              <a:t>+   Credentials excluded from version control</a:t>
+            </a:r>
+          </a:p>
+        </p:txBody>
+      </p:sp>
+      <p:sp>
+        <p:nvSpPr>
+          <p:cNvPr id="5" name="TextBox 4"/>
+          <p:cNvSpPr txBox="1"/>
+          <p:nvPr/>
+        </p:nvSpPr>
+        <p:spPr>
+          <a:xfrm>
+            <a:off x="6492240" y="1783080"/>
+            <a:ext cx="5029200" cy="4526280"/>
+          </a:xfrm>
+          <a:prstGeom prst="rect">
+            <a:avLst/>
+          </a:prstGeom>
+          <a:noFill/>
+        </p:spPr>
+        <p:txBody>
+          <a:bodyPr wrap="square">
+            <a:spAutoFit/>
+          </a:bodyPr>
+          <a:lstStyle/>
+          <a:p>
+            <a:pPr>
+              <a:lnSpc>
+                <a:spcPct val="118000"/>
+              </a:lnSpc>
+              <a:spcAft>
+                <a:spcPts val="1100"/>
+              </a:spcAft>
+              <a:defRPr sz="1900" b="1">
+                <a:solidFill>
+                  <a:srgbClr val="A83A1F"/>
+                </a:solidFill>
+                <a:latin typeface="Calibri"/>
+              </a:defRPr>
+            </a:pPr>
+            <a:r>
+              <a:t>Not defended</a:t>
+            </a:r>
+          </a:p>
+          <a:p>
+            <a:pPr>
+              <a:lnSpc>
+                <a:spcPct val="118000"/>
+              </a:lnSpc>
+              <a:spcAft>
+                <a:spcPts val="1100"/>
+              </a:spcAft>
+              <a:defRPr sz="1600" b="0">
+                <a:solidFill>
+                  <a:srgbClr val="1A1A1A"/>
+                </a:solidFill>
+                <a:latin typeface="Calibri"/>
+              </a:defRPr>
+            </a:pPr>
+            <a:r>
+              <a:t>-   MQTT without TLS - token in clear text</a:t>
+            </a:r>
+          </a:p>
+          <a:p>
+            <a:pPr>
+              <a:lnSpc>
+                <a:spcPct val="118000"/>
+              </a:lnSpc>
+              <a:spcAft>
+                <a:spcPts val="1100"/>
+              </a:spcAft>
+              <a:defRPr sz="1600" b="0">
+                <a:solidFill>
+                  <a:srgbClr val="1A1A1A"/>
+                </a:solidFill>
+                <a:latin typeface="Calibri"/>
+              </a:defRPr>
+            </a:pPr>
+            <a:r>
+              <a:t>-   RADIUS certificate not validated</a:t>
+            </a:r>
+          </a:p>
+          <a:p>
+            <a:pPr>
+              <a:lnSpc>
+                <a:spcPct val="118000"/>
+              </a:lnSpc>
+              <a:spcAft>
+                <a:spcPts val="1100"/>
+              </a:spcAft>
+              <a:defRPr sz="1600" b="0">
+                <a:solidFill>
+                  <a:srgbClr val="1A1A1A"/>
+                </a:solidFill>
+                <a:latin typeface="Calibri"/>
+              </a:defRPr>
+            </a:pPr>
+            <a:r>
+              <a:t>-   Credentials readable from flash over USB</a:t>
+            </a:r>
+          </a:p>
+        </p:txBody>
+      </p:sp>
+      <p:sp>
+        <p:nvSpPr>
+          <p:cNvPr id="6" name="TextBox 5"/>
+          <p:cNvSpPr txBox="1"/>
+          <p:nvPr/>
+        </p:nvSpPr>
+        <p:spPr>
+          <a:xfrm>
+            <a:off x="640080" y="4892040"/>
+            <a:ext cx="9509760" cy="1463040"/>
+          </a:xfrm>
+          <a:prstGeom prst="rect">
+            <a:avLst/>
+          </a:prstGeom>
+          <a:noFill/>
+        </p:spPr>
+        <p:txBody>
+          <a:bodyPr wrap="square">
+            <a:spAutoFit/>
+          </a:bodyPr>
+          <a:lstStyle/>
+          <a:p>
+            <a:pPr>
+              <a:lnSpc>
+                <a:spcPct val="118000"/>
+              </a:lnSpc>
+              <a:spcAft>
+                <a:spcPts val="1100"/>
+              </a:spcAft>
+              <a:defRPr sz="1700" b="1">
+                <a:solidFill>
+                  <a:srgbClr val="A83A1F"/>
+                </a:solidFill>
+                <a:latin typeface="Calibri"/>
+              </a:defRPr>
+            </a:pPr>
+            <a:r>
+              <a:t>The interesting finding</a:t>
+            </a:r>
+          </a:p>
+          <a:p>
+            <a:pPr>
+              <a:lnSpc>
+                <a:spcPct val="118000"/>
+              </a:lnSpc>
+              <a:spcAft>
+                <a:spcPts val="1100"/>
+              </a:spcAft>
+              <a:defRPr sz="1500" b="0">
+                <a:solidFill>
+                  <a:srgbClr val="1A1A1A"/>
+                </a:solidFill>
+                <a:latin typeface="Calibri"/>
+              </a:defRPr>
+            </a:pPr>
+            <a:r>
+              <a:t>src_id is a claim, not proof. A forged packet with a high sequence number under the live boot_id advances the dedup baseline - after which every genuine packet is rejected until the node reboots. Replay protection becomes the attack surface. Fixed by encrypting the link: a MAC filter was not enough, because the attacker controls the value being filtered on.</a:t>
             </a:r>
           </a:p>
         </p:txBody>

--- a/PRESENTATION.pptx
+++ b/PRESENTATION.pptx
@@ -519,7 +519,29 @@
           <a:lstStyle/>
           <a:p>
             <a:r>
-              <a:t>10 minutes total, then 5 for questions. Names and course code on this slide before you present. Have both boards powered and the dashboard already open.</a:t>
+              <a:t>~15 s. Do not read the slide.</a:t>
+            </a:r>
+          </a:p>
+          <a:p/>
+          <a:p>
+            <a:r>
+              <a:t>SAY: "Project one. Two ESP32 boards. One of them has no internet connection at</a:t>
+            </a:r>
+          </a:p>
+          <a:p>
+            <a:r>
+              <a:t>all, and its readings still reach the cloud - because the other one carries</a:t>
+            </a:r>
+          </a:p>
+          <a:p>
+            <a:r>
+              <a:t>them for it."</a:t>
+            </a:r>
+          </a:p>
+          <a:p/>
+          <a:p>
+            <a:r>
+              <a:t>Then move on. The title slide is not where marks are.</a:t>
             </a:r>
           </a:p>
         </p:txBody>
@@ -589,7 +611,55 @@
           <a:lstStyle/>
           <a:p>
             <a:r>
-              <a:t>This is the money shot. Two physically separate sensors, one of which has no network connection, arriving as a single cloud stream.</a:t>
+              <a:t>~40 s.</a:t>
+            </a:r>
+          </a:p>
+          <a:p/>
+          <a:p>
+            <a:r>
+              <a:t>SAY: "Two physically separate sensors appear in the cloud as one device and one</a:t>
+            </a:r>
+          </a:p>
+          <a:p>
+            <a:r>
+              <a:t>data stream, because the merge happens on Board 2 before anything leaves the</a:t>
+            </a:r>
+          </a:p>
+          <a:p>
+            <a:r>
+              <a:t>building. Blue is the gateway's own sensor. Green is the remote node, arriving</a:t>
+            </a:r>
+          </a:p>
+          <a:p>
+            <a:r>
+              <a:t>by radio."</a:t>
+            </a:r>
+          </a:p>
+          <a:p/>
+          <a:p>
+            <a:r>
+              <a:t>WHY MERGE AT THE EDGE: less traffic, less power, and the cloud does not have to</a:t>
+            </a:r>
+          </a:p>
+          <a:p>
+            <a:r>
+              <a:t>correlate two separate streams. Two 26-byte frames every five seconds become one</a:t>
+            </a:r>
+          </a:p>
+          <a:p>
+            <a:r>
+              <a:t>publish every ten. And the remote node needs no cloud credentials at all.</a:t>
+            </a:r>
+          </a:p>
+          <a:p/>
+          <a:p>
+            <a:r>
+              <a:t>IF THE TRACE LOOKS STEPPED: that is the DHT11's one-degree resolution, not a</a:t>
+            </a:r>
+          </a:p>
+          <a:p>
+            <a:r>
+              <a:t>frozen sensor. Say it before they wonder.</a:t>
             </a:r>
           </a:p>
         </p:txBody>
@@ -659,7 +729,164 @@
           <a:lstStyle/>
           <a:p>
             <a:r>
-              <a:t>SWITCH TO LIVE. Three windows: both serials and the dashboard. Warm the sensor with your thumb - about 7 degrees in 15 seconds, and it relaxes back after.</a:t>
+              <a:t>3 MINUTES. Most of the marks are here. Stop presenting, start operating,</a:t>
+            </a:r>
+          </a:p>
+          <a:p>
+            <a:r>
+              <a:t>and keep talking while you do it.</a:t>
+            </a:r>
+          </a:p>
+          <a:p/>
+          <a:p>
+            <a:r>
+              <a:t>BEFORE YOU BEGIN: three windows visible at once - Board 1 serial, Board 2</a:t>
+            </a:r>
+          </a:p>
+          <a:p>
+            <a:r>
+              <a:t>serial, ThingsBoard. The argument only lands if all three are on screen.</a:t>
+            </a:r>
+          </a:p>
+          <a:p/>
+          <a:p>
+            <a:r>
+              <a:t>1. BOTH TERMINALS</a:t>
+            </a:r>
+          </a:p>
+          <a:p>
+            <a:r>
+              <a:t>   "Left is Board 1 sending. Right is Board 2 receiving. Same sequence number,</a:t>
+            </a:r>
+          </a:p>
+          <a:p>
+            <a:r>
+              <a:t>   one millisecond apart."</a:t>
+            </a:r>
+          </a:p>
+          <a:p>
+            <a:r>
+              <a:t>   If pressed on why that matters: the acknowledgement is from the receiving</a:t>
+            </a:r>
+          </a:p>
+          <a:p>
+            <a:r>
+              <a:t>   radio, not the application. It proves the bytes arrived, not that they were</a:t>
+            </a:r>
+          </a:p>
+          <a:p>
+            <a:r>
+              <a:t>   accepted. The arrival line on the other board proves acceptance. Together</a:t>
+            </a:r>
+          </a:p>
+          <a:p>
+            <a:r>
+              <a:t>   they prove both - which one port alone cannot.</a:t>
+            </a:r>
+          </a:p>
+          <a:p/>
+          <a:p>
+            <a:r>
+              <a:t>2. THUMB ON THE SENSOR</a:t>
+            </a:r>
+          </a:p>
+          <a:p>
+            <a:r>
+              <a:t>   "Watch the temperature climb."</a:t>
+            </a:r>
+          </a:p>
+          <a:p>
+            <a:r>
+              <a:t>   WAIT. Let them see it move. This proves the entire chain - sensor, radio,</a:t>
+            </a:r>
+          </a:p>
+          <a:p>
+            <a:r>
+              <a:t>   gateway, internet, dashboard - in about fifteen seconds. It is the single</a:t>
+            </a:r>
+          </a:p>
+          <a:p>
+            <a:r>
+              <a:t>   most convincing thing you can do.</a:t>
+            </a:r>
+          </a:p>
+          <a:p/>
+          <a:p>
+            <a:r>
+              <a:t>3. PRESS "FAST PUBLISH (2 s)"</a:t>
+            </a:r>
+          </a:p>
+          <a:p>
+            <a:r>
+              <a:t>   "That button sends an instruction from the cloud down to the device. It</a:t>
+            </a:r>
+          </a:p>
+          <a:p>
+            <a:r>
+              <a:t>   changes how often it reports - from ten seconds to two."</a:t>
+            </a:r>
+          </a:p>
+          <a:p>
+            <a:r>
+              <a:t>   Then show the value returning: "And there is the device confirming it. Not</a:t>
+            </a:r>
+          </a:p>
+          <a:p>
+            <a:r>
+              <a:t>   just that we sent it - that it arrived and took effect."</a:t>
+            </a:r>
+          </a:p>
+          <a:p/>
+          <a:p>
+            <a:r>
+              <a:t>4. UNPLUG BOARD 1 - keep talking, do not stand in silence</a:t>
+            </a:r>
+          </a:p>
+          <a:p>
+            <a:r>
+              <a:t>   "The gateway keeps publishing its own reading. Give it twenty seconds and it</a:t>
+            </a:r>
+          </a:p>
+          <a:p>
+            <a:r>
+              <a:t>   will mark the other board offline - but it keeps showing the last known</a:t>
+            </a:r>
+          </a:p>
+          <a:p>
+            <a:r>
+              <a:t>   temperature so the chart does not gap. The status flag carries the truth</a:t>
+            </a:r>
+          </a:p>
+          <a:p>
+            <a:r>
+              <a:t>   about freshness."</a:t>
+            </a:r>
+          </a:p>
+          <a:p/>
+          <a:p>
+            <a:r>
+              <a:t>5. PLUG IT BACK IN</a:t>
+            </a:r>
+          </a:p>
+          <a:p>
+            <a:r>
+              <a:t>   "New random ID, numbering restarts, accepted cleanly. No flood of rejected</a:t>
+            </a:r>
+          </a:p>
+          <a:p>
+            <a:r>
+              <a:t>   duplicates."</a:t>
+            </a:r>
+          </a:p>
+          <a:p/>
+          <a:p>
+            <a:r>
+              <a:t>IF THE LINK IS DEAD: it is the channel. Read it off Board 2's boot banner, put</a:t>
+            </a:r>
+          </a:p>
+          <a:p>
+            <a:r>
+              <a:t>it in sketch 04, re-upload to Board 1. Two minutes. Do not guess.</a:t>
             </a:r>
           </a:p>
         </p:txBody>
@@ -729,7 +956,34 @@
           <a:lstStyle/>
           <a:p>
             <a:r>
-              <a:t>Own the substitution rather than hiding it. The gain is real: indoor pressure would be a flat line for hours, humidity responds to a hand in seconds.</a:t>
+              <a:t>~30 s.</a:t>
+            </a:r>
+          </a:p>
+          <a:p/>
+          <a:p>
+            <a:r>
+              <a:t>SAY: "The brief specified a BMP280. The hardware available was a DHT11. That</a:t>
+            </a:r>
+          </a:p>
+          <a:p>
+            <a:r>
+              <a:t>changes what we measure - humidity instead of pressure - but not the</a:t>
+            </a:r>
+          </a:p>
+          <a:p>
+            <a:r>
+              <a:t>architecture we are demonstrating. It is documented in the report rather than</a:t>
+            </a:r>
+          </a:p>
+          <a:p>
+            <a:r>
+              <a:t>glossed over."</a:t>
+            </a:r>
+          </a:p>
+          <a:p/>
+          <a:p>
+            <a:r>
+              <a:t>Owning a substitution is stronger than hoping nobody checks.</a:t>
             </a:r>
           </a:p>
         </p:txBody>
@@ -799,7 +1053,44 @@
           <a:lstStyle/>
           <a:p>
             <a:r>
-              <a:t>Name these yourself. Being asked about a limitation you did not mention is worse than raising it first.</a:t>
+              <a:t>~45 s. Name your own limits. It reads as maturity, not weakness.</a:t>
+            </a:r>
+          </a:p>
+          <a:p/>
+          <a:p>
+            <a:r>
+              <a:t>SAY: "One hop only - two radios cannot demonstrate forwarding. The cloud</a:t>
+            </a:r>
+          </a:p>
+          <a:p>
+            <a:r>
+              <a:t>connection is not encrypted, so the access token crosses in clear text.</a:t>
+            </a:r>
+          </a:p>
+          <a:p>
+            <a:r>
+              <a:t>Credentials are compiled into the firmware and recoverable over USB. And the</a:t>
+            </a:r>
+          </a:p>
+          <a:p>
+            <a:r>
+              <a:t>channel is set by hand, so a Wi-Fi roam breaks the link silently."</a:t>
+            </a:r>
+          </a:p>
+          <a:p/>
+          <a:p>
+            <a:r>
+              <a:t>DO NOT list ESP-NOW encryption as a limitation. It is implemented - a primary</a:t>
+            </a:r>
+          </a:p>
+          <a:p>
+            <a:r>
+              <a:t>master key plus a per-peer key, and the receiver authenticates the sender. That</a:t>
+            </a:r>
+          </a:p>
+          <a:p>
+            <a:r>
+              <a:t>is a feature you built, not a gap.</a:t>
             </a:r>
           </a:p>
         </p:txBody>
@@ -869,7 +1160,44 @@
           <a:lstStyle/>
           <a:p>
             <a:r>
-              <a:t>These are yours - measured, not read in a datasheet. Worth saying that explicitly.</a:t>
+              <a:t>~30 s.</a:t>
+            </a:r>
+          </a:p>
+          <a:p/>
+          <a:p>
+            <a:r>
+              <a:t>SAY: "We tested the assumptions rather than trusting them. Port 1883 is open</a:t>
+            </a:r>
+          </a:p>
+          <a:p>
+            <a:r>
+              <a:t>outbound on eduroam - we verified that rather than assuming it. The realm for</a:t>
+            </a:r>
+          </a:p>
+          <a:p>
+            <a:r>
+              <a:t>authentication turned out to be the university domain, not the student mail</a:t>
+            </a:r>
+          </a:p>
+          <a:p>
+            <a:r>
+              <a:t>domain, and enterprise Wi-Fi gives you no error that distinguishes a wrong</a:t>
+            </a:r>
+          </a:p>
+          <a:p>
+            <a:r>
+              <a:t>username from a wrong password or being out of range. We found it by changing</a:t>
+            </a:r>
+          </a:p>
+          <a:p>
+            <a:r>
+              <a:t>one thing at a time."</a:t>
+            </a:r>
+          </a:p>
+          <a:p/>
+          <a:p>
+            <a:r>
+              <a:t>That story answers "what was the hardest part" before it is asked.</a:t>
             </a:r>
           </a:p>
         </p:txBody>
@@ -939,7 +1267,44 @@
           <a:lstStyle/>
           <a:p>
             <a:r>
-              <a:t>Short. Shows you know what production would need.</a:t>
+              <a:t>~30 s.</a:t>
+            </a:r>
+          </a:p>
+          <a:p/>
+          <a:p>
+            <a:r>
+              <a:t>SAY: "Next steps, in order of value: a third board so the forwarding fields are</a:t>
+            </a:r>
+          </a:p>
+          <a:p>
+            <a:r>
+              <a:t>actually exercised. TLS on the cloud leg, which is the most serious remaining</a:t>
+            </a:r>
+          </a:p>
+          <a:p>
+            <a:r>
+              <a:t>exposure. Credentials provisioned at first boot rather than compiled in. And the</a:t>
+            </a:r>
+          </a:p>
+          <a:p>
+            <a:r>
+              <a:t>node scanning for the gateway instead of being told the channel by hand - that</a:t>
+            </a:r>
+          </a:p>
+          <a:p>
+            <a:r>
+              <a:t>would have prevented three outages during development."</a:t>
+            </a:r>
+          </a:p>
+          <a:p/>
+          <a:p>
+            <a:r>
+              <a:t>Each item maps to a limitation on the previous slide. That symmetry is</a:t>
+            </a:r>
+          </a:p>
+          <a:p>
+            <a:r>
+              <a:t>deliberate - show it.</a:t>
             </a:r>
           </a:p>
         </p:txBody>
@@ -1009,7 +1374,383 @@
           <a:lstStyle/>
           <a:p>
             <a:r>
-              <a:t>Stop here and take questions. Rehearsed answers are in DEMO_PLAN.md - especially the security one, which is the likeliest question.</a:t>
+              <a:t>Questions - 5 minutes.</a:t>
+            </a:r>
+          </a:p>
+          <a:p/>
+          <a:p>
+            <a:r>
+              <a:t>"HOW DOES IT WORK?" - One board measures and radios it across. The other adds</a:t>
+            </a:r>
+          </a:p>
+          <a:p>
+            <a:r>
+              <a:t>its own reading and sends both to the cloud.</a:t>
+            </a:r>
+          </a:p>
+          <a:p/>
+          <a:p>
+            <a:r>
+              <a:t>"WHY NOT WI-FI ON BOTH?" - Both would need credentials, setup and battery to</a:t>
+            </a:r>
+          </a:p>
+          <a:p>
+            <a:r>
+              <a:t>join. One gateway carrying several nodes scales better.</a:t>
+            </a:r>
+          </a:p>
+          <a:p/>
+          <a:p>
+            <a:r>
+              <a:t>"IS IT SECURE?" - The radio link is: encrypted, keys on both ends, and the</a:t>
+            </a:r>
+          </a:p>
+          <a:p>
+            <a:r>
+              <a:t>receiver rejects anything that does not decrypt. The cloud link is not. That is</a:t>
+            </a:r>
+          </a:p>
+          <a:p>
+            <a:r>
+              <a:t>the honest gap.</a:t>
+            </a:r>
+          </a:p>
+          <a:p/>
+          <a:p>
+            <a:r>
+              <a:t>"IS IT A MESH?" - Mesh-ready. Two radios can only do one hop. The format carries</a:t>
+            </a:r>
+          </a:p>
+          <a:p>
+            <a:r>
+              <a:t>a hop counter; we simply never forward.</a:t>
+            </a:r>
+          </a:p>
+          <a:p/>
+          <a:p>
+            <a:r>
+              <a:t>"WHY QoS 0?" - Telemetry every ten seconds. A lost sample is superseded ten</a:t>
+            </a:r>
+          </a:p>
+          <a:p>
+            <a:r>
+              <a:t>seconds later. QoS 1 costs round trips and a queue for data with a very short</a:t>
+            </a:r>
+          </a:p>
+          <a:p>
+            <a:r>
+              <a:t>shelf life.</a:t>
+            </a:r>
+          </a:p>
+          <a:p/>
+          <a:p>
+            <a:r>
+              <a:t>"ISN'T THE ACKNOWLEDGEMENT PROOF ENOUGH?" - No. It comes from the radio, not the</a:t>
+            </a:r>
+          </a:p>
+          <a:p>
+            <a:r>
+              <a:t>application. It proves the bytes arrived, not that they were accepted. That is</a:t>
+            </a:r>
+          </a:p>
+          <a:p>
+            <a:r>
+              <a:t>why we captured both boards against one clock.</a:t>
+            </a:r>
+          </a:p>
+          <a:p/>
+          <a:p>
+            <a:r>
+              <a:t>"WHAT WAS THE HARDEST PART?" - Not the code, the campus network. Enterprise</a:t>
+            </a:r>
+          </a:p>
+          <a:p>
+            <a:r>
+              <a:t>Wi-Fi gives no useful error, so a wrong username looks identical to a wrong</a:t>
+            </a:r>
+          </a:p>
+          <a:p>
+            <a:r>
+              <a:t>password or being out of range.</a:t>
+            </a:r>
+          </a:p>
+          <a:p/>
+          <a:p>
+            <a:r>
+              <a:t>"WHY DHT11?" - It is what was available. It changes what we measure, not the</a:t>
+            </a:r>
+          </a:p>
+          <a:p>
+            <a:r>
+              <a:t>architecture.</a:t>
+            </a:r>
+          </a:p>
+          <a:p/>
+          <a:p>
+            <a:r>
+              <a:t>IF YOU DO NOT KNOW: "I don't know off the top of my head - it is in the report</a:t>
+            </a:r>
+          </a:p>
+          <a:p>
+            <a:r>
+              <a:t>and I can check." That costs almost nothing. Guessing and being wrong costs a</a:t>
+            </a:r>
+          </a:p>
+          <a:p>
+            <a:r>
+              <a:t>great deal.</a:t>
+            </a:r>
+          </a:p>
+        </p:txBody>
+      </p:sp>
+      <p:sp>
+        <p:nvSpPr>
+          <p:cNvPr id="4" name="Slide Number Placeholder 3"/>
+          <p:cNvSpPr>
+            <a:spLocks noGrp="1"/>
+          </p:cNvSpPr>
+          <p:nvPr>
+            <p:ph type="sldNum" idx="5" sz="quarter"/>
+          </p:nvPr>
+        </p:nvSpPr>
+        <p:spPr/>
+      </p:sp>
+    </p:spTree>
+  </p:cSld>
+  <p:clrMapOvr>
+    <a:masterClrMapping/>
+  </p:clrMapOvr>
+</p:notes>
+</file>
+
+<file path=ppt/notesSlides/notesSlide17.xml><?xml version="1.0" encoding="utf-8"?>
+<p:notes xmlns:a="http://schemas.openxmlformats.org/drawingml/2006/main" xmlns:p="http://schemas.openxmlformats.org/presentationml/2006/main" xmlns:r="http://schemas.openxmlformats.org/officeDocument/2006/relationships">
+  <p:cSld>
+    <p:spTree>
+      <p:nvGrpSpPr>
+        <p:cNvPr id="1" name=""/>
+        <p:cNvGrpSpPr/>
+        <p:nvPr/>
+      </p:nvGrpSpPr>
+      <p:grpSpPr>
+        <a:xfrm>
+          <a:off x="0" y="0"/>
+          <a:ext cx="0" cy="0"/>
+          <a:chOff x="0" y="0"/>
+          <a:chExt cx="0" cy="0"/>
+        </a:xfrm>
+      </p:grpSpPr>
+      <p:sp>
+        <p:nvSpPr>
+          <p:cNvPr id="2" name="Slide Image Placeholder 1"/>
+          <p:cNvSpPr>
+            <a:spLocks noGrp="1"/>
+          </p:cNvSpPr>
+          <p:nvPr>
+            <p:ph type="sldImg" idx="2"/>
+          </p:nvPr>
+        </p:nvSpPr>
+        <p:spPr/>
+      </p:sp>
+      <p:sp>
+        <p:nvSpPr>
+          <p:cNvPr id="3" name="Notes Placeholder 2"/>
+          <p:cNvSpPr>
+            <a:spLocks noGrp="1"/>
+          </p:cNvSpPr>
+          <p:nvPr>
+            <p:ph type="body" idx="3" sz="quarter"/>
+          </p:nvPr>
+        </p:nvSpPr>
+        <p:spPr/>
+        <p:txBody>
+          <a:bodyPr/>
+          <a:lstStyle/>
+          <a:p>
+            <a:r>
+              <a:t>~40 s. The circuit diagram answers a different question from the block</a:t>
+            </a:r>
+          </a:p>
+          <a:p>
+            <a:r>
+              <a:t>diagram: block is what moves, circuit is which pin connects to which.</a:t>
+            </a:r>
+          </a:p>
+          <a:p/>
+          <a:p>
+            <a:r>
+              <a:t>SAY: "Three wires per board - power, ground, and data. Identical on both boards</a:t>
+            </a:r>
+          </a:p>
+          <a:p>
+            <a:r>
+              <a:t>apart from which pin the data goes into: GPIO4 on one, GPIO5 on the other.</a:t>
+            </a:r>
+          </a:p>
+          <a:p>
+            <a:r>
+              <a:t>Notice there is no wire between the two boards. Separate USB supplies, separate</a:t>
+            </a:r>
+          </a:p>
+          <a:p>
+            <a:r>
+              <a:t>grounds. Nothing crosses between them except radio."</a:t>
+            </a:r>
+          </a:p>
+          <a:p/>
+          <a:p>
+            <a:r>
+              <a:t>WHY THE PINS DIFFER: they were wired at different times and nothing required</a:t>
+            </a:r>
+          </a:p>
+          <a:p>
+            <a:r>
+              <a:t>them to match. That is the honest answer - do not invent a reason.</a:t>
+            </a:r>
+          </a:p>
+          <a:p/>
+          <a:p>
+            <a:r>
+              <a:t>IF ASKED where the pull-up resistor is: "These are three-pin breakout modules -</a:t>
+            </a:r>
+          </a:p>
+          <a:p>
+            <a:r>
+              <a:t>the resistor is already on the module. A bare DHT11 would need about 10 k on the</a:t>
+            </a:r>
+          </a:p>
+          <a:p>
+            <a:r>
+              <a:t>data line."</a:t>
+            </a:r>
+          </a:p>
+          <a:p/>
+          <a:p>
+            <a:r>
+              <a:t>IF ASKED about the dashed line: that is ESP-NOW, encrypted with a shared key</a:t>
+            </a:r>
+          </a:p>
+          <a:p>
+            <a:r>
+              <a:t>pair. It is drawn dashed precisely because it is not a wire.</a:t>
+            </a:r>
+          </a:p>
+        </p:txBody>
+      </p:sp>
+      <p:sp>
+        <p:nvSpPr>
+          <p:cNvPr id="4" name="Slide Number Placeholder 3"/>
+          <p:cNvSpPr>
+            <a:spLocks noGrp="1"/>
+          </p:cNvSpPr>
+          <p:nvPr>
+            <p:ph type="sldNum" idx="5" sz="quarter"/>
+          </p:nvPr>
+        </p:nvSpPr>
+        <p:spPr/>
+      </p:sp>
+    </p:spTree>
+  </p:cSld>
+  <p:clrMapOvr>
+    <a:masterClrMapping/>
+  </p:clrMapOvr>
+</p:notes>
+</file>
+
+<file path=ppt/notesSlides/notesSlide18.xml><?xml version="1.0" encoding="utf-8"?>
+<p:notes xmlns:a="http://schemas.openxmlformats.org/drawingml/2006/main" xmlns:p="http://schemas.openxmlformats.org/presentationml/2006/main" xmlns:r="http://schemas.openxmlformats.org/officeDocument/2006/relationships">
+  <p:cSld>
+    <p:spTree>
+      <p:nvGrpSpPr>
+        <p:cNvPr id="1" name=""/>
+        <p:cNvGrpSpPr/>
+        <p:nvPr/>
+      </p:nvGrpSpPr>
+      <p:grpSpPr>
+        <a:xfrm>
+          <a:off x="0" y="0"/>
+          <a:ext cx="0" cy="0"/>
+          <a:chOff x="0" y="0"/>
+          <a:chExt cx="0" cy="0"/>
+        </a:xfrm>
+      </p:grpSpPr>
+      <p:sp>
+        <p:nvSpPr>
+          <p:cNvPr id="2" name="Slide Image Placeholder 1"/>
+          <p:cNvSpPr>
+            <a:spLocks noGrp="1"/>
+          </p:cNvSpPr>
+          <p:nvPr>
+            <p:ph type="sldImg" idx="2"/>
+          </p:nvPr>
+        </p:nvSpPr>
+        <p:spPr/>
+      </p:sp>
+      <p:sp>
+        <p:nvSpPr>
+          <p:cNvPr id="3" name="Notes Placeholder 2"/>
+          <p:cNvSpPr>
+            <a:spLocks noGrp="1"/>
+          </p:cNvSpPr>
+          <p:nvPr>
+            <p:ph type="body" idx="3" sz="quarter"/>
+          </p:nvPr>
+        </p:nvSpPr>
+        <p:spPr/>
+        <p:txBody>
+          <a:bodyPr/>
+          <a:lstStyle/>
+          <a:p>
+            <a:r>
+              <a:t>~40 s.</a:t>
+            </a:r>
+          </a:p>
+          <a:p/>
+          <a:p>
+            <a:r>
+              <a:t>SAY: "Telemetry alone makes a device observable. It does not make it</a:t>
+            </a:r>
+          </a:p>
+          <a:p>
+            <a:r>
+              <a:t>manageable. These three buttons send commands from the cloud down to the</a:t>
+            </a:r>
+          </a:p>
+          <a:p>
+            <a:r>
+              <a:t>device - change how often it reports, reset its counters, ask for its status."</a:t>
+            </a:r>
+          </a:p>
+          <a:p/>
+          <a:p>
+            <a:r>
+              <a:t>THE KEY POINT: "And the device reports the change back in its own telemetry. So</a:t>
+            </a:r>
+          </a:p>
+          <a:p>
+            <a:r>
+              <a:t>we are not just seeing that the command was sent - we are seeing that it</a:t>
+            </a:r>
+          </a:p>
+          <a:p>
+            <a:r>
+              <a:t>arrived and took effect. The round trip is confirmed at both ends."</a:t>
+            </a:r>
+          </a:p>
+          <a:p/>
+          <a:p>
+            <a:r>
+              <a:t>ON VALIDATION: out-of-range values are refused rather than quietly adjusted.</a:t>
+            </a:r>
+          </a:p>
+          <a:p>
+            <a:r>
+              <a:t>Silently applying something different from what was asked would leave the</a:t>
+            </a:r>
+          </a:p>
+          <a:p>
+            <a:r>
+              <a:t>operator believing something untrue about the device.</a:t>
             </a:r>
           </a:p>
         </p:txBody>
@@ -1079,7 +1820,54 @@
           <a:lstStyle/>
           <a:p>
             <a:r>
-              <a:t>Frame the problem before the solution. The point is that a sensor with no network connection of its own still gets its data to the cloud.</a:t>
+              <a:t>~40 s.</a:t>
+            </a:r>
+          </a:p>
+          <a:p/>
+          <a:p>
+            <a:r>
+              <a:t>SAY: "Imagine a sensor somewhere with no Wi-Fi - a basement, a field, a corner</a:t>
+            </a:r>
+          </a:p>
+          <a:p>
+            <a:r>
+              <a:t>of a building. Connecting it properly is expensive. Every device needs its own</a:t>
+            </a:r>
+          </a:p>
+          <a:p>
+            <a:r>
+              <a:t>network password and its own setup, and joining Wi-Fi burns battery for several</a:t>
+            </a:r>
+          </a:p>
+          <a:p>
+            <a:r>
+              <a:t>seconds before a single reading is sent. So we flipped it. One device does the</a:t>
+            </a:r>
+          </a:p>
+          <a:p>
+            <a:r>
+              <a:t>connecting. The others talk to it cheaply over short-range radio."</a:t>
+            </a:r>
+          </a:p>
+          <a:p/>
+          <a:p>
+            <a:r>
+              <a:t>IF ASKED why joining is expensive: scan every channel for beacons, authenticate</a:t>
+            </a:r>
+          </a:p>
+          <a:p>
+            <a:r>
+              <a:t>against the university RADIUS server, associate, then request an IP by DHCP -</a:t>
+            </a:r>
+          </a:p>
+          <a:p>
+            <a:r>
+              <a:t>all before one useful byte moves. On battery the radio is the largest draw in</a:t>
+            </a:r>
+          </a:p>
+          <a:p>
+            <a:r>
+              <a:t>the device.</a:t>
             </a:r>
           </a:p>
         </p:txBody>
@@ -1149,7 +1937,66 @@
           <a:lstStyle/>
           <a:p>
             <a:r>
-              <a:t>Hold the boards up here. Physically separate them so the audience sees there is no wire. Say the scope claim now, not at the end.</a:t>
+              <a:t>~30 s. Say the limitation FIRST, before anyone asks.</a:t>
+            </a:r>
+          </a:p>
+          <a:p/>
+          <a:p>
+            <a:r>
+              <a:t>SAY: "Two ESP32 boards, each with a temperature and humidity sensor. Board 1</a:t>
+            </a:r>
+          </a:p>
+          <a:p>
+            <a:r>
+              <a:t>measures and sends by radio. Board 2 listens, adds its own reading, and</a:t>
+            </a:r>
+          </a:p>
+          <a:p>
+            <a:r>
+              <a:t>publishes both to the cloud."</a:t>
+            </a:r>
+          </a:p>
+          <a:p/>
+          <a:p>
+            <a:r>
+              <a:t>THEN: "With only two boards this is one hop - one sender, one receiver. We</a:t>
+            </a:r>
+          </a:p>
+          <a:p>
+            <a:r>
+              <a:t>designed the message so a third board could pass it along, but nothing is ever</a:t>
+            </a:r>
+          </a:p>
+          <a:p>
+            <a:r>
+              <a:t>actually forwarded here. It is mesh-ready, not a mesh."</a:t>
+            </a:r>
+          </a:p>
+          <a:p/>
+          <a:p>
+            <a:r>
+              <a:t>Volunteering your own limits reads as confidence. Being caught out on them does</a:t>
+            </a:r>
+          </a:p>
+          <a:p>
+            <a:r>
+              <a:t>not.</a:t>
+            </a:r>
+          </a:p>
+          <a:p/>
+          <a:p>
+            <a:r>
+              <a:t>BACKUP: ESP32-D0WD-V3, dual core 240 MHz, 520 KB RAM, 4 MB flash, one 2.4 GHz</a:t>
+            </a:r>
+          </a:p>
+          <a:p>
+            <a:r>
+              <a:t>radio. DHT11: 0-50 C plus/minus 2, 20-90 % RH plus/minus 5, 1 Hz max sample</a:t>
+            </a:r>
+          </a:p>
+          <a:p>
+            <a:r>
+              <a:t>rate. Substituted for the BMP280 in the brief - documented in the report.</a:t>
             </a:r>
           </a:p>
         </p:txBody>
@@ -1219,7 +2066,124 @@
           <a:lstStyle/>
           <a:p>
             <a:r>
-              <a:t>Walk left to right. Two protocols doing two different jobs: ESP-NOW has no IP stack at all, MQTT is TCP to the cloud.</a:t>
+              <a:t>~1 minute. This is your strongest slide. Point at the middle column first.</a:t>
+            </a:r>
+          </a:p>
+          <a:p/>
+          <a:p>
+            <a:r>
+              <a:t>SAY: "Three stages - the sensor, the middleman, the cloud. The one in the middle</a:t>
+            </a:r>
+          </a:p>
+          <a:p>
+            <a:r>
+              <a:t>is on both networks at the same time: the radio network and the Wi-Fi. That is</a:t>
+            </a:r>
+          </a:p>
+          <a:p>
+            <a:r>
+              <a:t>the whole trick. It holds both sets of keys, so Board 1 reaches the internet</a:t>
+            </a:r>
+          </a:p>
+          <a:p>
+            <a:r>
+              <a:t>without ever joining it."</a:t>
+            </a:r>
+          </a:p>
+          <a:p/>
+          <a:p>
+            <a:r>
+              <a:t>THEN WALK THE THREE ARROWS:</a:t>
+            </a:r>
+          </a:p>
+          <a:p>
+            <a:r>
+              <a:t>  Orange  - the radio between the boards. Dashed, because there is no wire.</a:t>
+            </a:r>
+          </a:p>
+          <a:p>
+            <a:r>
+              <a:t>  Green   - data going up to the cloud.</a:t>
+            </a:r>
+          </a:p>
+          <a:p>
+            <a:r>
+              <a:t>  Purple  - instructions coming back down.</a:t>
+            </a:r>
+          </a:p>
+          <a:p/>
+          <a:p>
+            <a:r>
+              <a:t>THE LINE WORTH MEMORISING:</a:t>
+            </a:r>
+          </a:p>
+          <a:p>
+            <a:r>
+              <a:t>  "Green means we can watch it. Purple means we can control it."</a:t>
+            </a:r>
+          </a:p>
+          <a:p/>
+          <a:p>
+            <a:r>
+              <a:t>WHY THREE COLUMNS: the diagram is drawn as columns so the single crossing point</a:t>
+            </a:r>
+          </a:p>
+          <a:p>
+            <a:r>
+              <a:t>is obvious. That crossing point is the entire argument of the project.</a:t>
+            </a:r>
+          </a:p>
+          <a:p/>
+          <a:p>
+            <a:r>
+              <a:t>THE THEORY UNDERNEATH: networks are built in layers. ESP-NOW works at the link</a:t>
+            </a:r>
+          </a:p>
+          <a:p>
+            <a:r>
+              <a:t>layer - no IP address, no routing, no concept of "somewhere else". It can only</a:t>
+            </a:r>
+          </a:p>
+          <a:p>
+            <a:r>
+              <a:t>reach a radio it can physically hear. MQTT works at the application layer, on</a:t>
+            </a:r>
+          </a:p>
+          <a:p>
+            <a:r>
+              <a:t>top of TCP and IP. Because the two protocols sit at different layers, one device</a:t>
+            </a:r>
+          </a:p>
+          <a:p>
+            <a:r>
+              <a:t>can bridge them. A bridge between layers is what the word "gateway" means.</a:t>
+            </a:r>
+          </a:p>
+          <a:p/>
+          <a:p>
+            <a:r>
+              <a:t>IF ASKED why two arrows for MQTT: because that is the difference between a</a:t>
+            </a:r>
+          </a:p>
+          <a:p>
+            <a:r>
+              <a:t>device you can watch and a device you can operate. One connection, two</a:t>
+            </a:r>
+          </a:p>
+          <a:p>
+            <a:r>
+              <a:t>directions.</a:t>
+            </a:r>
+          </a:p>
+          <a:p/>
+          <a:p>
+            <a:r>
+              <a:t>FOOTNOTES ON THE SLIDE protect you: the access point chooses the channel, and</a:t>
+            </a:r>
+          </a:p>
+          <a:p>
+            <a:r>
+              <a:t>ttl and hop_count exist but nothing is ever forwarded.</a:t>
             </a:r>
           </a:p>
         </p:txBody>
@@ -1289,7 +2253,76 @@
           <a:lstStyle/>
           <a:p>
             <a:r>
-              <a:t>This is the best thing you have to explain and it is worth dwelling on. The channel is discovered, not chosen. It dictates the whole upload order.</a:t>
+              <a:t>~45 s. This slide shows engineering judgement rather than coding.</a:t>
+            </a:r>
+          </a:p>
+          <a:p/>
+          <a:p>
+            <a:r>
+              <a:t>SAY: "A radio can only listen on one channel at a time. Board 2 has to join the</a:t>
+            </a:r>
+          </a:p>
+          <a:p>
+            <a:r>
+              <a:t>campus Wi-Fi to reach the cloud, and the Wi-Fi network decides which channel</a:t>
+            </a:r>
+          </a:p>
+          <a:p>
+            <a:r>
+              <a:t>that is. We do not get to pick it - we find out at runtime and tell Board 1 to</a:t>
+            </a:r>
+          </a:p>
+          <a:p>
+            <a:r>
+              <a:t>match. That decides the whole setup order: you cannot configure Board 1 until</a:t>
+            </a:r>
+          </a:p>
+          <a:p>
+            <a:r>
+              <a:t>Board 2 tells you where it landed."</a:t>
+            </a:r>
+          </a:p>
+          <a:p/>
+          <a:p>
+            <a:r>
+              <a:t>THEN THE HONEST PART: "It also means that if the Wi-Fi moves us to a different</a:t>
+            </a:r>
+          </a:p>
+          <a:p>
+            <a:r>
+              <a:t>channel, our link breaks silently. Wi-Fi and the cloud still look perfectly</a:t>
+            </a:r>
+          </a:p>
+          <a:p>
+            <a:r>
+              <a:t>healthy - only the radio link is dead. It happened three times during</a:t>
+            </a:r>
+          </a:p>
+          <a:p>
+            <a:r>
+              <a:t>development, so we check before every demonstration."</a:t>
+            </a:r>
+          </a:p>
+          <a:p/>
+          <a:p>
+            <a:r>
+              <a:t>WHY IT IS SILENT: every indicator a casual observer checks still passes. The</a:t>
+            </a:r>
+          </a:p>
+          <a:p>
+            <a:r>
+              <a:t>gateway keeps publishing its own sensor. Only the node's data stops.</a:t>
+            </a:r>
+          </a:p>
+          <a:p/>
+          <a:p>
+            <a:r>
+              <a:t>BACKUP: eduroam runs access points on channels 1, 6 and 11. We observed the</a:t>
+            </a:r>
+          </a:p>
+          <a:p>
+            <a:r>
+              <a:t>gateway on all three.</a:t>
             </a:r>
           </a:p>
         </p:txBody>
@@ -1359,7 +2392,45 @@
           <a:lstStyle/>
           <a:p>
             <a:r>
-              <a:t>26 bytes against a 250-byte limit. Point out ttl and hop_count are carried but never decremented - that is the mesh-ready part, and it is honest to say so.</a:t>
+              <a:t>~30 s.</a:t>
+            </a:r>
+          </a:p>
+          <a:p/>
+          <a:p>
+            <a:r>
+              <a:t>SAY: "Every message is 26 bytes. It carries a version, who it is from and to, a</a:t>
+            </a:r>
+          </a:p>
+          <a:p>
+            <a:r>
+              <a:t>sequence number, and the two readings. Small on purpose - the radio protocol</a:t>
+            </a:r>
+          </a:p>
+          <a:p>
+            <a:r>
+              <a:t>allows 250 bytes, and we use 26."</a:t>
+            </a:r>
+          </a:p>
+          <a:p/>
+          <a:p>
+            <a:r>
+              <a:t>WHY VERSION AND TYPE: so the format can change later without both boards</a:t>
+            </a:r>
+          </a:p>
+          <a:p>
+            <a:r>
+              <a:t>silently disagreeing about what the bytes mean.</a:t>
+            </a:r>
+          </a:p>
+          <a:p/>
+          <a:p>
+            <a:r>
+              <a:t>BACKUP: a compile-time assertion locks the structure at exactly 26 bytes, so the</a:t>
+            </a:r>
+          </a:p>
+          <a:p>
+            <a:r>
+              <a:t>two sketches cannot drift apart without the build failing.</a:t>
             </a:r>
           </a:p>
         </p:txBody>
@@ -1429,7 +2500,87 @@
           <a:lstStyle/>
           <a:p>
             <a:r>
-              <a:t>boot_id is the part worth explaining. Without it a node restart is indistinguishable from a replay and the node never comes back.</a:t>
+              <a:t>~45 s. This is a genuinely subtle piece of design - take the time.</a:t>
+            </a:r>
+          </a:p>
+          <a:p/>
+          <a:p>
+            <a:r>
+              <a:t>SAY: "Every message is numbered so we can spot repeats. But each board also</a:t>
+            </a:r>
+          </a:p>
+          <a:p>
+            <a:r>
+              <a:t>picks a random ID when it powers on, and that part is essential."</a:t>
+            </a:r>
+          </a:p>
+          <a:p/>
+          <a:p>
+            <a:r>
+              <a:t>THEN THE WHY: "Without it, a board restarting looks exactly like an attacker</a:t>
+            </a:r>
+          </a:p>
+          <a:p>
+            <a:r>
+              <a:t>replaying old messages. The numbers start low again, we would reject every one</a:t>
+            </a:r>
+          </a:p>
+          <a:p>
+            <a:r>
+              <a:t>of them, and the board would never come back - and nothing would look broken."</a:t>
+            </a:r>
+          </a:p>
+          <a:p/>
+          <a:p>
+            <a:r>
+              <a:t>THREE CASES the logic distinguishes:</a:t>
+            </a:r>
+          </a:p>
+          <a:p>
+            <a:r>
+              <a:t>  new packet     - accept</a:t>
+            </a:r>
+          </a:p>
+          <a:p>
+            <a:r>
+              <a:t>  duplicate      - reject</a:t>
+            </a:r>
+          </a:p>
+          <a:p>
+            <a:r>
+              <a:t>  gap (loss)     - accept, do not wait</a:t>
+            </a:r>
+          </a:p>
+          <a:p/>
+          <a:p>
+            <a:r>
+              <a:t>A jump forward is a gap, not a duplicate. If we demanded consecutive numbers we</a:t>
+            </a:r>
+          </a:p>
+          <a:p>
+            <a:r>
+              <a:t>would deadlock on the first lost packet, waiting forever for something that is</a:t>
+            </a:r>
+          </a:p>
+          <a:p>
+            <a:r>
+              <a:t>never coming.</a:t>
+            </a:r>
+          </a:p>
+          <a:p/>
+          <a:p>
+            <a:r>
+              <a:t>BACKUP: key is the triple (src_id, boot_id, seq). The comparison is wrap-aware -</a:t>
+            </a:r>
+          </a:p>
+          <a:p>
+            <a:r>
+              <a:t>unsigned subtraction then a signed compare - so it stays correct when a 32-bit</a:t>
+            </a:r>
+          </a:p>
+          <a:p>
+            <a:r>
+              <a:t>counter overflows.</a:t>
             </a:r>
           </a:p>
         </p:txBody>
@@ -1499,7 +2650,139 @@
           <a:lstStyle/>
           <a:p>
             <a:r>
-              <a:t>Security is 25 marks with the other domains. Lead with the attack you found yourselves - that reads far better than a list of things you did not do.</a:t>
+              <a:t>~90 seconds. Worth 25 marks. Slow down. Tell it as a story.</a:t>
+            </a:r>
+          </a:p>
+          <a:p/>
+          <a:p>
+            <a:r>
+              <a:t>SAY: "At first, anyone with a matching radio nearby could send us a fake</a:t>
+            </a:r>
+          </a:p>
+          <a:p>
+            <a:r>
+              <a:t>reading. The message says who it is from, but that is just a claim - anyone can</a:t>
+            </a:r>
+          </a:p>
+          <a:p>
+            <a:r>
+              <a:t>write anything in that field."</a:t>
+            </a:r>
+          </a:p>
+          <a:p/>
+          <a:p>
+            <a:r>
+              <a:t>"Our first fix was to check the sender's hardware address. Someone reviewed it</a:t>
+            </a:r>
+          </a:p>
+          <a:p>
+            <a:r>
+              <a:t>and pointed out the flaw straight away: an attacker can simply set that address</a:t>
+            </a:r>
+          </a:p>
+          <a:p>
+            <a:r>
+              <a:t>to whatever they like. We were checking a value the attacker controls. That is a</a:t>
+            </a:r>
+          </a:p>
+          <a:p>
+            <a:r>
+              <a:t>name badge, not a passport."</a:t>
+            </a:r>
+          </a:p>
+          <a:p/>
+          <a:p>
+            <a:r>
+              <a:t>"So we encrypted the link instead. Both boards share a key. Now a message only</a:t>
+            </a:r>
+          </a:p>
+          <a:p>
+            <a:r>
+              <a:t>works if the sender actually has that key. That is the difference between</a:t>
+            </a:r>
+          </a:p>
+          <a:p>
+            <a:r>
+              <a:t>claiming who you are and proving it."</a:t>
+            </a:r>
+          </a:p>
+          <a:p/>
+          <a:p>
+            <a:r>
+              <a:t>THEN CLOSE THE LOOP HONESTLY, before they ask:</a:t>
+            </a:r>
+          </a:p>
+          <a:p>
+            <a:r>
+              <a:t>"The cloud connection is still unencrypted - the access token crosses in plain</a:t>
+            </a:r>
+          </a:p>
+          <a:p>
+            <a:r>
+              <a:t>text. That is the most serious weakness left, and the fix is TLS on port 8883."</a:t>
+            </a:r>
+          </a:p>
+          <a:p/>
+          <a:p>
+            <a:r>
+              <a:t>THE RULE UNDERNEATH IT: you cannot authenticate using a value the attacker</a:t>
+            </a:r>
+          </a:p>
+          <a:p>
+            <a:r>
+              <a:t>supplies. That is the whole lesson and it generalises far beyond this project.</a:t>
+            </a:r>
+          </a:p>
+          <a:p/>
+          <a:p>
+            <a:r>
+              <a:t>WHAT THE ATTACK ACTUALLY DID: not a wrong temperature on a dashboard. A forged</a:t>
+            </a:r>
+          </a:p>
+          <a:p>
+            <a:r>
+              <a:t>packet carrying a very high sequence number advances the duplicate-detection</a:t>
+            </a:r>
+          </a:p>
+          <a:p>
+            <a:r>
+              <a:t>baseline, and after that every genuine packet from the real sensor is rejected</a:t>
+            </a:r>
+          </a:p>
+          <a:p>
+            <a:r>
+              <a:t>as a duplicate until the board reboots. One forged frame silences the real</a:t>
+            </a:r>
+          </a:p>
+          <a:p>
+            <a:r>
+              <a:t>sensor. It is a denial of service delivered through the integrity mechanism</a:t>
+            </a:r>
+          </a:p>
+          <a:p>
+            <a:r>
+              <a:t>itself.</a:t>
+            </a:r>
+          </a:p>
+          <a:p/>
+          <a:p>
+            <a:r>
+              <a:t>BACKUP: a primary master key protects the per-peer key during setup; the</a:t>
+            </a:r>
+          </a:p>
+          <a:p>
+            <a:r>
+              <a:t>per-peer key encrypts the payload. The receiver also needs a peer entry, or the</a:t>
+            </a:r>
+          </a:p>
+          <a:p>
+            <a:r>
+              <a:t>driver discards the frame before any application code runs - a silent failure</a:t>
+            </a:r>
+          </a:p>
+          <a:p>
+            <a:r>
+              <a:t>with no error at all.</a:t>
             </a:r>
           </a:p>
         </p:txBody>
@@ -1569,7 +2852,55 @@
           <a:lstStyle/>
           <a:p>
             <a:r>
-              <a:t>Numbers from evidence/01_gateway_running_state.txt. invalid=0 across 634 packets is the one to point at - it proves both boards agree on the packet layout.</a:t>
+              <a:t>~30 s.</a:t>
+            </a:r>
+          </a:p>
+          <a:p/>
+          <a:p>
+            <a:r>
+              <a:t>SAY: "634 messages received and validated. 82 repeats caught and rejected. Zero</a:t>
+            </a:r>
+          </a:p>
+          <a:p>
+            <a:r>
+              <a:t>corrupted - both boards agree on the format. Fourteen out of fourteen acceptance</a:t>
+            </a:r>
+          </a:p>
+          <a:p>
+            <a:r>
+              <a:t>criteria evidenced."</a:t>
+            </a:r>
+          </a:p>
+          <a:p/>
+          <a:p>
+            <a:r>
+              <a:t>ON THE OFFLINE BEHAVIOUR: "When the node goes quiet we keep publishing its last</a:t>
+            </a:r>
+          </a:p>
+          <a:p>
+            <a:r>
+              <a:t>known temperature, so the chart stays continuous - but a separate flag says the</a:t>
+            </a:r>
+          </a:p>
+          <a:p>
+            <a:r>
+              <a:t>data is stale. We do not put 'unknown' in the data field. We put it in a status</a:t>
+            </a:r>
+          </a:p>
+          <a:p>
+            <a:r>
+              <a:t>field."</a:t>
+            </a:r>
+          </a:p>
+          <a:p/>
+          <a:p>
+            <a:r>
+              <a:t>That is a design decision worth defending if asked: nobody is misled, and the</a:t>
+            </a:r>
+          </a:p>
+          <a:p>
+            <a:r>
+              <a:t>chart stays readable.</a:t>
             </a:r>
           </a:p>
         </p:txBody>
